--- a/FabLuxe_Digital_Marketing_Strategy.pptx
+++ b/FabLuxe_Digital_Marketing_Strategy.pptx
@@ -594,7 +594,7 @@
           <a:p>
             <a:r>
               <a:rPr lang="en-US" dirty="0"/>
-              <a:t>Slide 2: end-to-end funnel from traffic sources to conversion, via authorized dealer/location landing pages. Objective panel on the right; services strip at the bottom.</a:t>
+              <a:t>Slide 2: end-to-end funnel from traffic sources to conversion, via campaign &amp; product landing pages. Objective panel on the right; services strip at the bottom.</a:t>
             </a:r>
             <a:endParaRPr lang="en-US" dirty="0"/>
           </a:p>
@@ -682,7 +682,7 @@
           <a:p>
             <a:r>
               <a:rPr lang="en-US" dirty="0"/>
-              <a:t>Slide 3: nine services with the concrete deliverable for each — SEO, SEM, SMO/SMM, website, dealer/location landing pages, lead capture &amp; routing, email &amp; WhatsApp, creative, analytics.</a:t>
+              <a:t>Slide 3: nine services with the concrete deliverable for each — SEO, SEM, SMO/SMM, website, campaign landing pages, lead capture &amp; routing, email &amp; WhatsApp, creative, analytics.</a:t>
             </a:r>
             <a:endParaRPr lang="en-US" dirty="0"/>
           </a:p>
@@ -770,7 +770,7 @@
           <a:p>
             <a:r>
               <a:rPr lang="en-US" dirty="0"/>
-              <a:t>Slide 4: our approach (full-funnel, data-led, authorized &amp; on-brand, always optimizing), our delivery model (dedicated pod, weekly sprints, transparent reporting, tools, single POC, monthly review), and a clean You-provide / We-deliver split between One Global/Fab Luxe and the Digital Marketing Team.</a:t>
+              <a:t>Slide 4: our approach (full-funnel, data-led, conversion-focused, always optimizing), our delivery model (dedicated pod, weekly sprints, transparent reporting, tools, single POC, monthly review), and a clean You-provide / We-deliver split between One Global/Fab Luxe and the Digital Marketing Team.</a:t>
             </a:r>
             <a:endParaRPr lang="en-US" dirty="0"/>
           </a:p>
@@ -2417,7 +2417,7 @@
                 <a:ea typeface="Calibri" pitchFamily="34" charset="-122"/>
                 <a:cs typeface="Calibri" pitchFamily="34" charset="-120"/>
               </a:rPr>
-              <a:t>Authorized Dealer / Location Landing Pages</a:t>
+              <a:t>Campaign &amp; Product Landing Pages</a:t>
             </a:r>
             <a:endParaRPr lang="en-US" sz="1200" dirty="0"/>
           </a:p>
@@ -2753,7 +2753,7 @@
                 <a:ea typeface="Calibri" pitchFamily="34" charset="-122"/>
                 <a:cs typeface="Calibri" pitchFamily="34" charset="-120"/>
               </a:rPr>
-              <a:t>Dealer / Sales Assignment</a:t>
+              <a:t>Sales Team Assignment</a:t>
             </a:r>
             <a:endParaRPr lang="en-US" sz="1200" dirty="0"/>
           </a:p>
@@ -3343,7 +3343,7 @@
                 <a:ea typeface="Calibri" pitchFamily="34" charset="-122"/>
                 <a:cs typeface="Calibri" pitchFamily="34" charset="-120"/>
               </a:rPr>
-              <a:t>Assign to dealers → close → revenue &amp; ROI</a:t>
+              <a:t>Assign to sales → close → revenue &amp; ROI</a:t>
             </a:r>
             <a:endParaRPr lang="en-US" sz="1400" dirty="0"/>
           </a:p>
@@ -4637,7 +4637,7 @@
                 <a:ea typeface="Cambria" pitchFamily="34" charset="-122"/>
                 <a:cs typeface="Cambria" pitchFamily="34" charset="-120"/>
               </a:rPr>
-              <a:t>Dealer / Location Pages</a:t>
+              <a:t>Campaign Landing Pages</a:t>
             </a:r>
             <a:endParaRPr lang="en-US" sz="1450" dirty="0"/>
           </a:p>
@@ -4676,7 +4676,7 @@
                 <a:ea typeface="Calibri" pitchFamily="34" charset="-122"/>
                 <a:cs typeface="Calibri" pitchFamily="34" charset="-120"/>
               </a:rPr>
-              <a:t>Authorized pages · WhatsApp / Call CTAs</a:t>
+              <a:t>High-converting pages · WhatsApp / Call CTAs</a:t>
             </a:r>
             <a:endParaRPr lang="en-US" sz="1050" dirty="0"/>
           </a:p>
@@ -4852,7 +4852,7 @@
                 <a:ea typeface="Calibri" pitchFamily="34" charset="-122"/>
                 <a:cs typeface="Calibri" pitchFamily="34" charset="-120"/>
               </a:rPr>
-              <a:t>Forms → CRM → dealer assignment</a:t>
+              <a:t>Forms → CRM → sales assignment</a:t>
             </a:r>
             <a:endParaRPr lang="en-US" sz="1050" dirty="0"/>
           </a:p>
@@ -6054,7 +6054,7 @@
                 <a:ea typeface="Cambria" pitchFamily="34" charset="-122"/>
                 <a:cs typeface="Cambria" pitchFamily="34" charset="-120"/>
               </a:rPr>
-              <a:t>Authorized &amp; On-Brand</a:t>
+              <a:t>Conversion-Focused</a:t>
             </a:r>
             <a:endParaRPr lang="en-US" sz="1500" dirty="0"/>
           </a:p>
@@ -6096,7 +6096,7 @@
                 <a:ea typeface="Calibri" pitchFamily="34" charset="-122"/>
                 <a:cs typeface="Calibri" pitchFamily="34" charset="-120"/>
               </a:rPr>
-              <a:t>Official Fab Luxe dealer / location pages</a:t>
+              <a:t>Landing pages &amp; CTAs built to convert</a:t>
             </a:r>
             <a:endParaRPr lang="en-US" sz="1100" dirty="0"/>
           </a:p>
@@ -6604,7 +6604,7 @@
                 <a:ea typeface="Calibri" pitchFamily="34" charset="-122"/>
                 <a:cs typeface="Calibri" pitchFamily="34" charset="-120"/>
               </a:rPr>
-              <a:t>Product info &amp; dealer authorization</a:t>
+              <a:t>Product info &amp; content</a:t>
             </a:r>
             <a:endParaRPr lang="en-US" sz="1100" dirty="0"/>
           </a:p>
@@ -6650,7 +6650,7 @@
                 <a:ea typeface="Calibri" pitchFamily="34" charset="-122"/>
                 <a:cs typeface="Calibri" pitchFamily="34" charset="-120"/>
               </a:rPr>
-              <a:t>Sales team to assign &amp; close</a:t>
+              <a:t>Sales team to close leads</a:t>
             </a:r>
             <a:endParaRPr lang="en-US" sz="1100" dirty="0"/>
           </a:p>
@@ -7500,7 +7500,7 @@
                 <a:ea typeface="Calibri" pitchFamily="34" charset="-122"/>
                 <a:cs typeface="Calibri" pitchFamily="34" charset="-120"/>
               </a:rPr>
-              <a:t>Dealer mapping</a:t>
+              <a:t>Audience &amp; market mapping</a:t>
             </a:r>
             <a:endParaRPr lang="en-US" sz="1050" dirty="0"/>
           </a:p>

--- a/FabLuxe_Digital_Marketing_Strategy.pptx
+++ b/FabLuxe_Digital_Marketing_Strategy.pptx
@@ -858,7 +858,7 @@
           <a:p>
             <a:r>
               <a:rPr lang="en-US" dirty="0"/>
-              <a:t>Slide 5: 90-day timeline — Plan &amp; Foundation (wk 1-2), Build &amp; Launch (wk 3-4), Generate &amp; Optimize (wk 5-8), Scale (wk 9-12), then ongoing growth. KPIs tracked weekly: traffic, leads, qualified leads, CPL, conversion rate, revenue, ROI.</a:t>
+              <a:t>Slide 5: fast-ramp timeline. Week 1 Plan &amp; Foundation; Week 2 Launch &amp; Scale (scale-up pulled forward into the launch week to cut time-to-scale); Week 3+ Generate &amp; Optimize continuously; then Ongoing — Stay Market-Ready, adjusting to real-estate cost shifts and attracting customers consistently. KPIs tracked weekly: traffic, leads, qualified leads, CPL, conversion rate, revenue, ROI.</a:t>
             </a:r>
             <a:endParaRPr lang="en-US" dirty="0"/>
           </a:p>
@@ -1960,7 +1960,7 @@
                 <a:ea typeface="Calibri" pitchFamily="34" charset="-122"/>
                 <a:cs typeface="Calibri" pitchFamily="34" charset="-120"/>
               </a:rPr>
-              <a:t>Services  ·  Our Approach  ·  Delivery Model  ·  90-Day Timeline</a:t>
+              <a:t>Services  ·  Our Approach  ·  Delivery Model  ·  Fast-Ramp Timeline</a:t>
             </a:r>
             <a:endParaRPr lang="en-US" sz="1150" dirty="0"/>
           </a:p>
@@ -7148,7 +7148,7 @@
                 <a:ea typeface="Calibri" pitchFamily="34" charset="-122"/>
                 <a:cs typeface="Calibri" pitchFamily="34" charset="-120"/>
               </a:rPr>
-              <a:t>HOW MUCH TIME</a:t>
+              <a:t>FAST-RAMP ROLLOUT</a:t>
             </a:r>
             <a:endParaRPr lang="en-US" sz="1150" dirty="0"/>
           </a:p>
@@ -7207,7 +7207,7 @@
                 <a:ea typeface="Cambria" pitchFamily="34" charset="-122"/>
                 <a:cs typeface="Cambria" pitchFamily="34" charset="-120"/>
               </a:rPr>
-              <a:t>90-Day Timeline &amp; KPIs</a:t>
+              <a:t>Timeline &amp; KPIs</a:t>
             </a:r>
             <a:endParaRPr lang="en-US" sz="3000" dirty="0"/>
           </a:p>
@@ -7367,7 +7367,7 @@
                 <a:ea typeface="Calibri" pitchFamily="34" charset="-122"/>
                 <a:cs typeface="Calibri" pitchFamily="34" charset="-120"/>
               </a:rPr>
-              <a:t>WEEKS 1–2</a:t>
+              <a:t>WEEK 1</a:t>
             </a:r>
             <a:endParaRPr lang="en-US" sz="1000" dirty="0"/>
           </a:p>
@@ -7685,7 +7685,7 @@
                 <a:ea typeface="Calibri" pitchFamily="34" charset="-122"/>
                 <a:cs typeface="Calibri" pitchFamily="34" charset="-120"/>
               </a:rPr>
-              <a:t>WEEKS 3–4</a:t>
+              <a:t>WEEK 2</a:t>
             </a:r>
             <a:endParaRPr lang="en-US" sz="1000" dirty="0"/>
           </a:p>
@@ -7724,7 +7724,7 @@
                 <a:ea typeface="Cambria" pitchFamily="34" charset="-122"/>
                 <a:cs typeface="Cambria" pitchFamily="34" charset="-120"/>
               </a:rPr>
-              <a:t>Build &amp; Launch</a:t>
+              <a:t>Launch &amp; Scale</a:t>
             </a:r>
             <a:endParaRPr lang="en-US" sz="1650" dirty="0"/>
           </a:p>
@@ -7818,7 +7818,7 @@
                 <a:ea typeface="Calibri" pitchFamily="34" charset="-122"/>
                 <a:cs typeface="Calibri" pitchFamily="34" charset="-120"/>
               </a:rPr>
-              <a:t>Social setup</a:t>
+              <a:t>Campaigns live: SEO/SEM/SMM</a:t>
             </a:r>
             <a:endParaRPr lang="en-US" sz="1050" dirty="0"/>
           </a:p>
@@ -7842,7 +7842,7 @@
                 <a:ea typeface="Calibri" pitchFamily="34" charset="-122"/>
                 <a:cs typeface="Calibri" pitchFamily="34" charset="-120"/>
               </a:rPr>
-              <a:t>Content &amp; creative</a:t>
+              <a:t>Scale winning pages fast</a:t>
             </a:r>
             <a:endParaRPr lang="en-US" sz="1050" dirty="0"/>
           </a:p>
@@ -7866,7 +7866,7 @@
                 <a:ea typeface="Calibri" pitchFamily="34" charset="-122"/>
                 <a:cs typeface="Calibri" pitchFamily="34" charset="-120"/>
               </a:rPr>
-              <a:t>Google Ads · WhatsApp / email</a:t>
+              <a:t>Expand channels &amp; budgets</a:t>
             </a:r>
             <a:endParaRPr lang="en-US" sz="1050" dirty="0"/>
           </a:p>
@@ -8003,7 +8003,7 @@
                 <a:ea typeface="Calibri" pitchFamily="34" charset="-122"/>
                 <a:cs typeface="Calibri" pitchFamily="34" charset="-120"/>
               </a:rPr>
-              <a:t>WEEKS 5–8</a:t>
+              <a:t>WEEK 3+</a:t>
             </a:r>
             <a:endParaRPr lang="en-US" sz="1000" dirty="0"/>
           </a:p>
@@ -8088,7 +8088,7 @@
                 <a:ea typeface="Calibri" pitchFamily="34" charset="-122"/>
                 <a:cs typeface="Calibri" pitchFamily="34" charset="-120"/>
               </a:rPr>
-              <a:t>Launch SEO / SEM / SMM</a:t>
+              <a:t>Continuous lead generation</a:t>
             </a:r>
             <a:endParaRPr lang="en-US" sz="1050" dirty="0"/>
           </a:p>
@@ -8112,7 +8112,7 @@
                 <a:ea typeface="Calibri" pitchFamily="34" charset="-122"/>
                 <a:cs typeface="Calibri" pitchFamily="34" charset="-120"/>
               </a:rPr>
-              <a:t>Social posting</a:t>
+              <a:t>Qualify &amp; assign leads</a:t>
             </a:r>
             <a:endParaRPr lang="en-US" sz="1050" dirty="0"/>
           </a:p>
@@ -8136,7 +8136,7 @@
                 <a:ea typeface="Calibri" pitchFamily="34" charset="-122"/>
                 <a:cs typeface="Calibri" pitchFamily="34" charset="-120"/>
               </a:rPr>
-              <a:t>Email / WhatsApp campaigns</a:t>
+              <a:t>Weekly optimization &amp; A/B tests</a:t>
             </a:r>
             <a:endParaRPr lang="en-US" sz="1050" dirty="0"/>
           </a:p>
@@ -8160,31 +8160,7 @@
                 <a:ea typeface="Calibri" pitchFamily="34" charset="-122"/>
                 <a:cs typeface="Calibri" pitchFamily="34" charset="-120"/>
               </a:rPr>
-              <a:t>Qualify &amp; assign leads</a:t>
-            </a:r>
-            <a:endParaRPr lang="en-US" sz="1050" dirty="0"/>
-          </a:p>
-          <a:p>
-            <a:pPr marL="152400" indent="-152400">
-              <a:lnSpc>
-                <a:spcPct val="100000"/>
-              </a:lnSpc>
-              <a:spcAft>
-                <a:spcPts val="600"/>
-              </a:spcAft>
-              <a:buSzPct val="100000"/>
-              <a:buChar char="•"/>
-            </a:pPr>
-            <a:r>
-              <a:rPr lang="en-US" sz="1050" dirty="0">
-                <a:solidFill>
-                  <a:srgbClr val="1A1E24"/>
-                </a:solidFill>
-                <a:latin typeface="Calibri" pitchFamily="34" charset="0"/>
-                <a:ea typeface="Calibri" pitchFamily="34" charset="-122"/>
-                <a:cs typeface="Calibri" pitchFamily="34" charset="-120"/>
-              </a:rPr>
-              <a:t>Weekly optimization</a:t>
+              <a:t>Track CPL, QL &amp; ROI</a:t>
             </a:r>
             <a:endParaRPr lang="en-US" sz="1050" dirty="0"/>
           </a:p>
@@ -8321,7 +8297,7 @@
                 <a:ea typeface="Calibri" pitchFamily="34" charset="-122"/>
                 <a:cs typeface="Calibri" pitchFamily="34" charset="-120"/>
               </a:rPr>
-              <a:t>WEEKS 9–12</a:t>
+              <a:t>ONGOING</a:t>
             </a:r>
             <a:endParaRPr lang="en-US" sz="1000" dirty="0"/>
           </a:p>
@@ -8360,7 +8336,7 @@
                 <a:ea typeface="Cambria" pitchFamily="34" charset="-122"/>
                 <a:cs typeface="Cambria" pitchFamily="34" charset="-120"/>
               </a:rPr>
-              <a:t>Scale</a:t>
+              <a:t>Stay Market-Ready</a:t>
             </a:r>
             <a:endParaRPr lang="en-US" sz="1650" dirty="0"/>
           </a:p>
@@ -8406,7 +8382,7 @@
                 <a:ea typeface="Calibri" pitchFamily="34" charset="-122"/>
                 <a:cs typeface="Calibri" pitchFamily="34" charset="-120"/>
               </a:rPr>
-              <a:t>Analyze CPL, QL &amp; ROI</a:t>
+              <a:t>Adjust to real-estate cost shifts</a:t>
             </a:r>
             <a:endParaRPr lang="en-US" sz="1050" dirty="0"/>
           </a:p>
@@ -8430,7 +8406,7 @@
                 <a:ea typeface="Calibri" pitchFamily="34" charset="-122"/>
                 <a:cs typeface="Calibri" pitchFamily="34" charset="-120"/>
               </a:rPr>
-              <a:t>Optimize campaigns</a:t>
+              <a:t>Keep CPL efficient</a:t>
             </a:r>
             <a:endParaRPr lang="en-US" sz="1050" dirty="0"/>
           </a:p>
@@ -8454,7 +8430,7 @@
                 <a:ea typeface="Calibri" pitchFamily="34" charset="-122"/>
                 <a:cs typeface="Calibri" pitchFamily="34" charset="-120"/>
               </a:rPr>
-              <a:t>Scale winning pages</a:t>
+              <a:t>Attract customers consistently</a:t>
             </a:r>
             <a:endParaRPr lang="en-US" sz="1050" dirty="0"/>
           </a:p>
@@ -8478,7 +8454,7 @@
                 <a:ea typeface="Calibri" pitchFamily="34" charset="-122"/>
                 <a:cs typeface="Calibri" pitchFamily="34" charset="-120"/>
               </a:rPr>
-              <a:t>Next 6-month growth plan</a:t>
+              <a:t>Scale what works, cut the rest</a:t>
             </a:r>
             <a:endParaRPr lang="en-US" sz="1050" dirty="0"/>
           </a:p>

--- a/FabLuxe_Digital_Marketing_Strategy.pptx
+++ b/FabLuxe_Digital_Marketing_Strategy.pptx
@@ -10,9 +10,10 @@
     <p:sldId id="258" r:id="rId4"/>
     <p:sldId id="259" r:id="rId5"/>
     <p:sldId id="260" r:id="rId6"/>
+    <p:sldId id="261" r:id="rId7"/>
   </p:sldIdLst>
   <p:notesMasterIdLst>
-    <p:notesMasterId r:id="rId7"/>
+    <p:notesMasterId r:id="rId8"/>
   </p:notesMasterIdLst>
   <p:sldSz cx="12192000" cy="6858000"/>
   <p:notesSz cx="6858000" cy="12192000"/>
@@ -770,7 +771,7 @@
           <a:p>
             <a:r>
               <a:rPr lang="en-US" dirty="0"/>
-              <a:t>Slide 4: our approach (full-funnel, data-led, conversion-focused, always optimizing), our delivery model (dedicated pod, weekly sprints, transparent reporting, tools, single POC, monthly review), and a clean You-provide / We-deliver split between One Global/Fab Luxe and the Digital Marketing Team.</a:t>
+              <a:t>Slide 4: on-site conversational AI lead agent. Engages every visitor 24/7, qualifies on budget/BHK/timeline/location, and verifies a real reachable buyer via OTP or CAPTCHA before routing the lead to CRM, WhatsApp and sales — filtering out spam and fake numbers. Platforms to evaluate (their own websites show a live agent): Landbot, Tidio, Intercom, Verloop.io; OTP/verification via MSG91 or Twilio Verify.</a:t>
             </a:r>
             <a:endParaRPr lang="en-US" dirty="0"/>
           </a:p>
@@ -858,7 +859,7 @@
           <a:p>
             <a:r>
               <a:rPr lang="en-US" dirty="0"/>
-              <a:t>Slide 5: fast-ramp timeline. Week 1 Plan &amp; Foundation; Week 2 Launch &amp; Scale (scale-up pulled forward into the launch week to cut time-to-scale); Week 3+ Generate &amp; Optimize continuously; then Ongoing — Stay Market-Ready, adjusting to real-estate cost shifts and attracting customers consistently. KPIs tracked weekly: traffic, leads, qualified leads, CPL, conversion rate, revenue, ROI.</a:t>
+              <a:t>Slide 4: our approach (full-funnel, data-led, conversion-focused, always optimizing), our delivery model (dedicated pod, weekly sprints, transparent reporting, tools, single POC, monthly review), and a clean You-provide / We-deliver split between One Global/Fab Luxe and the Digital Marketing Team.</a:t>
             </a:r>
             <a:endParaRPr lang="en-US" dirty="0"/>
           </a:p>
@@ -882,6 +883,94 @@
             <a:fld id="{F7021451-1387-4CA6-816F-3879F97B5CBC}" type="slidenum">
               <a:rPr lang="en-US"/>
               <a:t>5</a:t>
+            </a:fld>
+            <a:endParaRPr lang="en-US"/>
+          </a:p>
+        </p:txBody>
+      </p:sp>
+    </p:spTree>
+    <p:extLst>
+      <p:ext uri="{BB962C8B-B14F-4D97-AF65-F5344CB8AC3E}">
+        <p14:creationId xmlns:p14="http://schemas.microsoft.com/office/powerpoint/2010/main" val="1024086991"/>
+      </p:ext>
+    </p:extLst>
+  </p:cSld>
+  <p:clrMapOvr>
+    <a:masterClrMapping/>
+  </p:clrMapOvr>
+</p:notes>
+</file>
+
+<file path=ppt/notesSlides/notesSlide6.xml><?xml version="1.0" encoding="utf-8"?>
+<p:notes xmlns:a="http://schemas.openxmlformats.org/drawingml/2006/main" xmlns:r="http://schemas.openxmlformats.org/officeDocument/2006/relationships" xmlns:p="http://schemas.openxmlformats.org/presentationml/2006/main">
+  <p:cSld>
+    <p:spTree>
+      <p:nvGrpSpPr>
+        <p:cNvPr id="1" name=""/>
+        <p:cNvGrpSpPr/>
+        <p:nvPr/>
+      </p:nvGrpSpPr>
+      <p:grpSpPr>
+        <a:xfrm>
+          <a:off x="0" y="0"/>
+          <a:ext cx="0" cy="0"/>
+          <a:chOff x="0" y="0"/>
+          <a:chExt cx="0" cy="0"/>
+        </a:xfrm>
+      </p:grpSpPr>
+      <p:sp>
+        <p:nvSpPr>
+          <p:cNvPr id="2" name="Slide Image Placeholder 1"/>
+          <p:cNvSpPr>
+            <a:spLocks noGrp="1" noRot="1" noChangeAspect="1"/>
+          </p:cNvSpPr>
+          <p:nvPr>
+            <p:ph type="sldImg"/>
+          </p:nvPr>
+        </p:nvSpPr>
+        <p:spPr/>
+      </p:sp>
+      <p:sp>
+        <p:nvSpPr>
+          <p:cNvPr id="3" name="Notes Placeholder 2"/>
+          <p:cNvSpPr>
+            <a:spLocks noGrp="1"/>
+          </p:cNvSpPr>
+          <p:nvPr>
+            <p:ph type="body" idx="1"/>
+          </p:nvPr>
+        </p:nvSpPr>
+        <p:spPr/>
+        <p:txBody>
+          <a:bodyPr/>
+          <a:lstStyle/>
+          <a:p>
+            <a:r>
+              <a:rPr lang="en-US" dirty="0"/>
+              <a:t>Slide 5: fast-ramp timeline. Week 1 Plan &amp; Foundation; Week 2 Launch &amp; Scale (scale-up pulled forward into the launch week to cut time-to-scale); Week 3+ Generate &amp; Optimize continuously; then Ongoing — Stay Market-Ready, adjusting to real-estate cost shifts and attracting customers consistently. KPIs tracked weekly: traffic, leads, qualified leads, CPL, conversion rate, revenue, ROI.</a:t>
+            </a:r>
+            <a:endParaRPr lang="en-US" dirty="0"/>
+          </a:p>
+        </p:txBody>
+      </p:sp>
+      <p:sp>
+        <p:nvSpPr>
+          <p:cNvPr id="4" name="Slide Number Placeholder 3"/>
+          <p:cNvSpPr>
+            <a:spLocks noGrp="1"/>
+          </p:cNvSpPr>
+          <p:nvPr>
+            <p:ph type="sldNum" sz="quarter" idx="10"/>
+          </p:nvPr>
+        </p:nvSpPr>
+        <p:spPr/>
+        <p:txBody>
+          <a:bodyPr/>
+          <a:lstStyle/>
+          <a:p>
+            <a:fld id="{F7021451-1387-4CA6-816F-3879F97B5CBC}" type="slidenum">
+              <a:rPr lang="en-US"/>
+              <a:t>6</a:t>
             </a:fld>
             <a:endParaRPr lang="en-US"/>
           </a:p>
@@ -1960,7 +2049,7 @@
                 <a:ea typeface="Calibri" pitchFamily="34" charset="-122"/>
                 <a:cs typeface="Calibri" pitchFamily="34" charset="-120"/>
               </a:rPr>
-              <a:t>Services  ·  Our Approach  ·  Delivery Model  ·  Fast-Ramp Timeline</a:t>
+              <a:t>Services  ·  AI Lead Agent  ·  Approach &amp; Delivery  ·  Fast-Ramp Timeline</a:t>
             </a:r>
             <a:endParaRPr lang="en-US" sz="1150" dirty="0"/>
           </a:p>
@@ -5581,7 +5670,7 @@
     <p:bg>
       <p:bgPr>
         <a:solidFill>
-          <a:srgbClr val="FFFFFF"/>
+          <a:srgbClr val="0E1116"/>
         </a:solidFill>
       </p:bgPr>
     </p:bg>
@@ -5632,7 +5721,7 @@
                 <a:ea typeface="Calibri" pitchFamily="34" charset="-122"/>
                 <a:cs typeface="Calibri" pitchFamily="34" charset="-120"/>
               </a:rPr>
-              <a:t>HOW WE WORK</a:t>
+              <a:t>ON-SITE AI</a:t>
             </a:r>
             <a:endParaRPr lang="en-US" sz="1150" dirty="0"/>
           </a:p>
@@ -5685,13 +5774,13 @@
             <a:r>
               <a:rPr lang="en-US" sz="3000" b="1" dirty="0">
                 <a:solidFill>
-                  <a:srgbClr val="1A1E24"/>
+                  <a:srgbClr val="F5F2EA"/>
                 </a:solidFill>
                 <a:latin typeface="Cambria" pitchFamily="34" charset="0"/>
                 <a:ea typeface="Cambria" pitchFamily="34" charset="-122"/>
                 <a:cs typeface="Cambria" pitchFamily="34" charset="-120"/>
               </a:rPr>
-              <a:t>Our Approach &amp; Delivery</a:t>
+              <a:t>Conversational Lead Agent</a:t>
             </a:r>
             <a:endParaRPr lang="en-US" sz="3000" dirty="0"/>
           </a:p>
@@ -5699,564 +5788,68 @@
       </p:sp>
       <p:sp>
         <p:nvSpPr>
-          <p:cNvPr id="5" name="Shape 3"/>
-          <p:cNvSpPr/>
-          <p:nvPr/>
-        </p:nvSpPr>
-        <p:spPr>
-          <a:xfrm>
-            <a:off x="640080" y="1508760"/>
-            <a:ext cx="2926080" cy="1298448"/>
+          <p:cNvPr id="5" name="Text 3"/>
+          <p:cNvSpPr/>
+          <p:nvPr/>
+        </p:nvSpPr>
+        <p:spPr>
+          <a:xfrm>
+            <a:off x="932688" y="1115568"/>
+            <a:ext cx="8686800" cy="320040"/>
+          </a:xfrm>
+          <a:prstGeom prst="rect">
+            <a:avLst/>
+          </a:prstGeom>
+          <a:noFill/>
+          <a:ln/>
+        </p:spPr>
+        <p:txBody>
+          <a:bodyPr wrap="square" lIns="0" tIns="0" rIns="0" bIns="0" rtlCol="0" anchor="ctr"/>
+          <a:lstStyle/>
+          <a:p>
+            <a:pPr indent="0" marL="0">
+              <a:buNone/>
+            </a:pPr>
+            <a:r>
+              <a:rPr lang="en-US" sz="1300" i="1" dirty="0">
+                <a:solidFill>
+                  <a:srgbClr val="9AA2AD"/>
+                </a:solidFill>
+                <a:latin typeface="Calibri" pitchFamily="34" charset="0"/>
+                <a:ea typeface="Calibri" pitchFamily="34" charset="-122"/>
+                <a:cs typeface="Calibri" pitchFamily="34" charset="-120"/>
+              </a:rPr>
+              <a:t>A 24/7 chat agent on your website that qualifies visitors and confirms real buyers with OTP / CAPTCHA.</a:t>
+            </a:r>
+            <a:endParaRPr lang="en-US" sz="1300" dirty="0"/>
+          </a:p>
+        </p:txBody>
+      </p:sp>
+      <p:sp>
+        <p:nvSpPr>
+          <p:cNvPr id="6" name="Shape 4"/>
+          <p:cNvSpPr/>
+          <p:nvPr/>
+        </p:nvSpPr>
+        <p:spPr>
+          <a:xfrm>
+            <a:off x="822960" y="1600200"/>
+            <a:ext cx="3931920" cy="3767328"/>
           </a:xfrm>
           <a:prstGeom prst="roundRect">
             <a:avLst>
-              <a:gd name="adj" fmla="val 5634"/>
+              <a:gd name="adj" fmla="val 2427"/>
             </a:avLst>
           </a:prstGeom>
           <a:solidFill>
-            <a:srgbClr val="F3F1EA"/>
+            <a:srgbClr val="1E2530"/>
           </a:solidFill>
           <a:ln w="12700">
             <a:solidFill>
-              <a:srgbClr val="E4E0D6"/>
+              <a:srgbClr val="262E3A"/>
             </a:solidFill>
             <a:prstDash val="solid"/>
           </a:ln>
-          <a:effectLst>
-            <a:outerShdw sx="100000" sy="100000" kx="0" ky="0" algn="bl" rotWithShape="0" blurRad="63500" dist="25400" dir="5400000">
-              <a:srgbClr val="000000">
-                <a:alpha val="12000"/>
-              </a:srgbClr>
-            </a:outerShdw>
-          </a:effectLst>
-        </p:spPr>
-      </p:sp>
-      <p:sp>
-        <p:nvSpPr>
-          <p:cNvPr id="6" name="Shape 4"/>
-          <p:cNvSpPr/>
-          <p:nvPr/>
-        </p:nvSpPr>
-        <p:spPr>
-          <a:xfrm>
-            <a:off x="896112" y="1746504"/>
-            <a:ext cx="128016" cy="128016"/>
-          </a:xfrm>
-          <a:prstGeom prst="ellipse">
-            <a:avLst/>
-          </a:prstGeom>
-          <a:solidFill>
-            <a:srgbClr val="C6A15B"/>
-          </a:solidFill>
-          <a:ln/>
-        </p:spPr>
-      </p:sp>
-      <p:sp>
-        <p:nvSpPr>
-          <p:cNvPr id="7" name="Text 5"/>
-          <p:cNvSpPr/>
-          <p:nvPr/>
-        </p:nvSpPr>
-        <p:spPr>
-          <a:xfrm>
-            <a:off x="1115568" y="1673352"/>
-            <a:ext cx="2286000" cy="320040"/>
-          </a:xfrm>
-          <a:prstGeom prst="rect">
-            <a:avLst/>
-          </a:prstGeom>
-          <a:noFill/>
-          <a:ln/>
-        </p:spPr>
-        <p:txBody>
-          <a:bodyPr wrap="square" lIns="0" tIns="0" rIns="0" bIns="0" rtlCol="0" anchor="ctr"/>
-          <a:lstStyle/>
-          <a:p>
-            <a:pPr indent="0" marL="0">
-              <a:buNone/>
-            </a:pPr>
-            <a:r>
-              <a:rPr lang="en-US" sz="1500" b="1" dirty="0">
-                <a:solidFill>
-                  <a:srgbClr val="1A1E24"/>
-                </a:solidFill>
-                <a:latin typeface="Cambria" pitchFamily="34" charset="0"/>
-                <a:ea typeface="Cambria" pitchFamily="34" charset="-122"/>
-                <a:cs typeface="Cambria" pitchFamily="34" charset="-120"/>
-              </a:rPr>
-              <a:t>Full-Funnel</a:t>
-            </a:r>
-            <a:endParaRPr lang="en-US" sz="1500" dirty="0"/>
-          </a:p>
-        </p:txBody>
-      </p:sp>
-      <p:sp>
-        <p:nvSpPr>
-          <p:cNvPr id="8" name="Text 6"/>
-          <p:cNvSpPr/>
-          <p:nvPr/>
-        </p:nvSpPr>
-        <p:spPr>
-          <a:xfrm>
-            <a:off x="914400" y="2075688"/>
-            <a:ext cx="2423160" cy="640080"/>
-          </a:xfrm>
-          <a:prstGeom prst="rect">
-            <a:avLst/>
-          </a:prstGeom>
-          <a:noFill/>
-          <a:ln/>
-        </p:spPr>
-        <p:txBody>
-          <a:bodyPr wrap="square" lIns="0" tIns="0" rIns="0" bIns="0" rtlCol="0" anchor="t"/>
-          <a:lstStyle/>
-          <a:p>
-            <a:pPr indent="0" marL="0">
-              <a:lnSpc>
-                <a:spcPct val="108000"/>
-              </a:lnSpc>
-              <a:buNone/>
-            </a:pPr>
-            <a:r>
-              <a:rPr lang="en-US" sz="1100" dirty="0">
-                <a:solidFill>
-                  <a:srgbClr val="5C6470"/>
-                </a:solidFill>
-                <a:latin typeface="Calibri" pitchFamily="34" charset="0"/>
-                <a:ea typeface="Calibri" pitchFamily="34" charset="-122"/>
-                <a:cs typeface="Calibri" pitchFamily="34" charset="-120"/>
-              </a:rPr>
-              <a:t>One connected system from click to close</a:t>
-            </a:r>
-            <a:endParaRPr lang="en-US" sz="1100" dirty="0"/>
-          </a:p>
-        </p:txBody>
-      </p:sp>
-      <p:sp>
-        <p:nvSpPr>
-          <p:cNvPr id="9" name="Shape 7"/>
-          <p:cNvSpPr/>
-          <p:nvPr/>
-        </p:nvSpPr>
-        <p:spPr>
-          <a:xfrm>
-            <a:off x="3840480" y="1508760"/>
-            <a:ext cx="2926080" cy="1298448"/>
-          </a:xfrm>
-          <a:prstGeom prst="roundRect">
-            <a:avLst>
-              <a:gd name="adj" fmla="val 5634"/>
-            </a:avLst>
-          </a:prstGeom>
-          <a:solidFill>
-            <a:srgbClr val="F3F1EA"/>
-          </a:solidFill>
-          <a:ln w="12700">
-            <a:solidFill>
-              <a:srgbClr val="E4E0D6"/>
-            </a:solidFill>
-            <a:prstDash val="solid"/>
-          </a:ln>
-          <a:effectLst>
-            <a:outerShdw sx="100000" sy="100000" kx="0" ky="0" algn="bl" rotWithShape="0" blurRad="63500" dist="25400" dir="5400000">
-              <a:srgbClr val="000000">
-                <a:alpha val="12000"/>
-              </a:srgbClr>
-            </a:outerShdw>
-          </a:effectLst>
-        </p:spPr>
-      </p:sp>
-      <p:sp>
-        <p:nvSpPr>
-          <p:cNvPr id="10" name="Shape 8"/>
-          <p:cNvSpPr/>
-          <p:nvPr/>
-        </p:nvSpPr>
-        <p:spPr>
-          <a:xfrm>
-            <a:off x="4096512" y="1746504"/>
-            <a:ext cx="128016" cy="128016"/>
-          </a:xfrm>
-          <a:prstGeom prst="ellipse">
-            <a:avLst/>
-          </a:prstGeom>
-          <a:solidFill>
-            <a:srgbClr val="C6A15B"/>
-          </a:solidFill>
-          <a:ln/>
-        </p:spPr>
-      </p:sp>
-      <p:sp>
-        <p:nvSpPr>
-          <p:cNvPr id="11" name="Text 9"/>
-          <p:cNvSpPr/>
-          <p:nvPr/>
-        </p:nvSpPr>
-        <p:spPr>
-          <a:xfrm>
-            <a:off x="4315968" y="1673352"/>
-            <a:ext cx="2286000" cy="320040"/>
-          </a:xfrm>
-          <a:prstGeom prst="rect">
-            <a:avLst/>
-          </a:prstGeom>
-          <a:noFill/>
-          <a:ln/>
-        </p:spPr>
-        <p:txBody>
-          <a:bodyPr wrap="square" lIns="0" tIns="0" rIns="0" bIns="0" rtlCol="0" anchor="ctr"/>
-          <a:lstStyle/>
-          <a:p>
-            <a:pPr indent="0" marL="0">
-              <a:buNone/>
-            </a:pPr>
-            <a:r>
-              <a:rPr lang="en-US" sz="1500" b="1" dirty="0">
-                <a:solidFill>
-                  <a:srgbClr val="1A1E24"/>
-                </a:solidFill>
-                <a:latin typeface="Cambria" pitchFamily="34" charset="0"/>
-                <a:ea typeface="Cambria" pitchFamily="34" charset="-122"/>
-                <a:cs typeface="Cambria" pitchFamily="34" charset="-120"/>
-              </a:rPr>
-              <a:t>Data-Led</a:t>
-            </a:r>
-            <a:endParaRPr lang="en-US" sz="1500" dirty="0"/>
-          </a:p>
-        </p:txBody>
-      </p:sp>
-      <p:sp>
-        <p:nvSpPr>
-          <p:cNvPr id="12" name="Text 10"/>
-          <p:cNvSpPr/>
-          <p:nvPr/>
-        </p:nvSpPr>
-        <p:spPr>
-          <a:xfrm>
-            <a:off x="4114800" y="2075688"/>
-            <a:ext cx="2423160" cy="640080"/>
-          </a:xfrm>
-          <a:prstGeom prst="rect">
-            <a:avLst/>
-          </a:prstGeom>
-          <a:noFill/>
-          <a:ln/>
-        </p:spPr>
-        <p:txBody>
-          <a:bodyPr wrap="square" lIns="0" tIns="0" rIns="0" bIns="0" rtlCol="0" anchor="t"/>
-          <a:lstStyle/>
-          <a:p>
-            <a:pPr indent="0" marL="0">
-              <a:lnSpc>
-                <a:spcPct val="108000"/>
-              </a:lnSpc>
-              <a:buNone/>
-            </a:pPr>
-            <a:r>
-              <a:rPr lang="en-US" sz="1100" dirty="0">
-                <a:solidFill>
-                  <a:srgbClr val="5C6470"/>
-                </a:solidFill>
-                <a:latin typeface="Calibri" pitchFamily="34" charset="0"/>
-                <a:ea typeface="Calibri" pitchFamily="34" charset="-122"/>
-                <a:cs typeface="Calibri" pitchFamily="34" charset="-120"/>
-              </a:rPr>
-              <a:t>Every decision from analytics, tracking &amp; CPL</a:t>
-            </a:r>
-            <a:endParaRPr lang="en-US" sz="1100" dirty="0"/>
-          </a:p>
-        </p:txBody>
-      </p:sp>
-      <p:sp>
-        <p:nvSpPr>
-          <p:cNvPr id="13" name="Shape 11"/>
-          <p:cNvSpPr/>
-          <p:nvPr/>
-        </p:nvSpPr>
-        <p:spPr>
-          <a:xfrm>
-            <a:off x="640080" y="3008376"/>
-            <a:ext cx="2926080" cy="1298448"/>
-          </a:xfrm>
-          <a:prstGeom prst="roundRect">
-            <a:avLst>
-              <a:gd name="adj" fmla="val 5634"/>
-            </a:avLst>
-          </a:prstGeom>
-          <a:solidFill>
-            <a:srgbClr val="F3F1EA"/>
-          </a:solidFill>
-          <a:ln w="12700">
-            <a:solidFill>
-              <a:srgbClr val="E4E0D6"/>
-            </a:solidFill>
-            <a:prstDash val="solid"/>
-          </a:ln>
-          <a:effectLst>
-            <a:outerShdw sx="100000" sy="100000" kx="0" ky="0" algn="bl" rotWithShape="0" blurRad="63500" dist="25400" dir="5400000">
-              <a:srgbClr val="000000">
-                <a:alpha val="12000"/>
-              </a:srgbClr>
-            </a:outerShdw>
-          </a:effectLst>
-        </p:spPr>
-      </p:sp>
-      <p:sp>
-        <p:nvSpPr>
-          <p:cNvPr id="14" name="Shape 12"/>
-          <p:cNvSpPr/>
-          <p:nvPr/>
-        </p:nvSpPr>
-        <p:spPr>
-          <a:xfrm>
-            <a:off x="896112" y="3246120"/>
-            <a:ext cx="128016" cy="128016"/>
-          </a:xfrm>
-          <a:prstGeom prst="ellipse">
-            <a:avLst/>
-          </a:prstGeom>
-          <a:solidFill>
-            <a:srgbClr val="C6A15B"/>
-          </a:solidFill>
-          <a:ln/>
-        </p:spPr>
-      </p:sp>
-      <p:sp>
-        <p:nvSpPr>
-          <p:cNvPr id="15" name="Text 13"/>
-          <p:cNvSpPr/>
-          <p:nvPr/>
-        </p:nvSpPr>
-        <p:spPr>
-          <a:xfrm>
-            <a:off x="1115568" y="3172968"/>
-            <a:ext cx="2286000" cy="320040"/>
-          </a:xfrm>
-          <a:prstGeom prst="rect">
-            <a:avLst/>
-          </a:prstGeom>
-          <a:noFill/>
-          <a:ln/>
-        </p:spPr>
-        <p:txBody>
-          <a:bodyPr wrap="square" lIns="0" tIns="0" rIns="0" bIns="0" rtlCol="0" anchor="ctr"/>
-          <a:lstStyle/>
-          <a:p>
-            <a:pPr indent="0" marL="0">
-              <a:buNone/>
-            </a:pPr>
-            <a:r>
-              <a:rPr lang="en-US" sz="1500" b="1" dirty="0">
-                <a:solidFill>
-                  <a:srgbClr val="1A1E24"/>
-                </a:solidFill>
-                <a:latin typeface="Cambria" pitchFamily="34" charset="0"/>
-                <a:ea typeface="Cambria" pitchFamily="34" charset="-122"/>
-                <a:cs typeface="Cambria" pitchFamily="34" charset="-120"/>
-              </a:rPr>
-              <a:t>Conversion-Focused</a:t>
-            </a:r>
-            <a:endParaRPr lang="en-US" sz="1500" dirty="0"/>
-          </a:p>
-        </p:txBody>
-      </p:sp>
-      <p:sp>
-        <p:nvSpPr>
-          <p:cNvPr id="16" name="Text 14"/>
-          <p:cNvSpPr/>
-          <p:nvPr/>
-        </p:nvSpPr>
-        <p:spPr>
-          <a:xfrm>
-            <a:off x="914400" y="3575304"/>
-            <a:ext cx="2423160" cy="640080"/>
-          </a:xfrm>
-          <a:prstGeom prst="rect">
-            <a:avLst/>
-          </a:prstGeom>
-          <a:noFill/>
-          <a:ln/>
-        </p:spPr>
-        <p:txBody>
-          <a:bodyPr wrap="square" lIns="0" tIns="0" rIns="0" bIns="0" rtlCol="0" anchor="t"/>
-          <a:lstStyle/>
-          <a:p>
-            <a:pPr indent="0" marL="0">
-              <a:lnSpc>
-                <a:spcPct val="108000"/>
-              </a:lnSpc>
-              <a:buNone/>
-            </a:pPr>
-            <a:r>
-              <a:rPr lang="en-US" sz="1100" dirty="0">
-                <a:solidFill>
-                  <a:srgbClr val="5C6470"/>
-                </a:solidFill>
-                <a:latin typeface="Calibri" pitchFamily="34" charset="0"/>
-                <a:ea typeface="Calibri" pitchFamily="34" charset="-122"/>
-                <a:cs typeface="Calibri" pitchFamily="34" charset="-120"/>
-              </a:rPr>
-              <a:t>Landing pages &amp; CTAs built to convert</a:t>
-            </a:r>
-            <a:endParaRPr lang="en-US" sz="1100" dirty="0"/>
-          </a:p>
-        </p:txBody>
-      </p:sp>
-      <p:sp>
-        <p:nvSpPr>
-          <p:cNvPr id="17" name="Shape 15"/>
-          <p:cNvSpPr/>
-          <p:nvPr/>
-        </p:nvSpPr>
-        <p:spPr>
-          <a:xfrm>
-            <a:off x="3840480" y="3008376"/>
-            <a:ext cx="2926080" cy="1298448"/>
-          </a:xfrm>
-          <a:prstGeom prst="roundRect">
-            <a:avLst>
-              <a:gd name="adj" fmla="val 5634"/>
-            </a:avLst>
-          </a:prstGeom>
-          <a:solidFill>
-            <a:srgbClr val="F3F1EA"/>
-          </a:solidFill>
-          <a:ln w="12700">
-            <a:solidFill>
-              <a:srgbClr val="E4E0D6"/>
-            </a:solidFill>
-            <a:prstDash val="solid"/>
-          </a:ln>
-          <a:effectLst>
-            <a:outerShdw sx="100000" sy="100000" kx="0" ky="0" algn="bl" rotWithShape="0" blurRad="63500" dist="25400" dir="5400000">
-              <a:srgbClr val="000000">
-                <a:alpha val="12000"/>
-              </a:srgbClr>
-            </a:outerShdw>
-          </a:effectLst>
-        </p:spPr>
-      </p:sp>
-      <p:sp>
-        <p:nvSpPr>
-          <p:cNvPr id="18" name="Shape 16"/>
-          <p:cNvSpPr/>
-          <p:nvPr/>
-        </p:nvSpPr>
-        <p:spPr>
-          <a:xfrm>
-            <a:off x="4096512" y="3246120"/>
-            <a:ext cx="128016" cy="128016"/>
-          </a:xfrm>
-          <a:prstGeom prst="ellipse">
-            <a:avLst/>
-          </a:prstGeom>
-          <a:solidFill>
-            <a:srgbClr val="C6A15B"/>
-          </a:solidFill>
-          <a:ln/>
-        </p:spPr>
-      </p:sp>
-      <p:sp>
-        <p:nvSpPr>
-          <p:cNvPr id="19" name="Text 17"/>
-          <p:cNvSpPr/>
-          <p:nvPr/>
-        </p:nvSpPr>
-        <p:spPr>
-          <a:xfrm>
-            <a:off x="4315968" y="3172968"/>
-            <a:ext cx="2286000" cy="320040"/>
-          </a:xfrm>
-          <a:prstGeom prst="rect">
-            <a:avLst/>
-          </a:prstGeom>
-          <a:noFill/>
-          <a:ln/>
-        </p:spPr>
-        <p:txBody>
-          <a:bodyPr wrap="square" lIns="0" tIns="0" rIns="0" bIns="0" rtlCol="0" anchor="ctr"/>
-          <a:lstStyle/>
-          <a:p>
-            <a:pPr indent="0" marL="0">
-              <a:buNone/>
-            </a:pPr>
-            <a:r>
-              <a:rPr lang="en-US" sz="1500" b="1" dirty="0">
-                <a:solidFill>
-                  <a:srgbClr val="1A1E24"/>
-                </a:solidFill>
-                <a:latin typeface="Cambria" pitchFamily="34" charset="0"/>
-                <a:ea typeface="Cambria" pitchFamily="34" charset="-122"/>
-                <a:cs typeface="Cambria" pitchFamily="34" charset="-120"/>
-              </a:rPr>
-              <a:t>Always Optimizing</a:t>
-            </a:r>
-            <a:endParaRPr lang="en-US" sz="1500" dirty="0"/>
-          </a:p>
-        </p:txBody>
-      </p:sp>
-      <p:sp>
-        <p:nvSpPr>
-          <p:cNvPr id="20" name="Text 18"/>
-          <p:cNvSpPr/>
-          <p:nvPr/>
-        </p:nvSpPr>
-        <p:spPr>
-          <a:xfrm>
-            <a:off x="4114800" y="3575304"/>
-            <a:ext cx="2423160" cy="640080"/>
-          </a:xfrm>
-          <a:prstGeom prst="rect">
-            <a:avLst/>
-          </a:prstGeom>
-          <a:noFill/>
-          <a:ln/>
-        </p:spPr>
-        <p:txBody>
-          <a:bodyPr wrap="square" lIns="0" tIns="0" rIns="0" bIns="0" rtlCol="0" anchor="t"/>
-          <a:lstStyle/>
-          <a:p>
-            <a:pPr indent="0" marL="0">
-              <a:lnSpc>
-                <a:spcPct val="108000"/>
-              </a:lnSpc>
-              <a:buNone/>
-            </a:pPr>
-            <a:r>
-              <a:rPr lang="en-US" sz="1100" dirty="0">
-                <a:solidFill>
-                  <a:srgbClr val="5C6470"/>
-                </a:solidFill>
-                <a:latin typeface="Calibri" pitchFamily="34" charset="0"/>
-                <a:ea typeface="Calibri" pitchFamily="34" charset="-122"/>
-                <a:cs typeface="Calibri" pitchFamily="34" charset="-120"/>
-              </a:rPr>
-              <a:t>Weekly tests — scale what works</a:t>
-            </a:r>
-            <a:endParaRPr lang="en-US" sz="1100" dirty="0"/>
-          </a:p>
-        </p:txBody>
-      </p:sp>
-      <p:sp>
-        <p:nvSpPr>
-          <p:cNvPr id="21" name="Shape 19"/>
-          <p:cNvSpPr/>
-          <p:nvPr/>
-        </p:nvSpPr>
-        <p:spPr>
-          <a:xfrm>
-            <a:off x="7132320" y="1508760"/>
-            <a:ext cx="4416552" cy="2999232"/>
-          </a:xfrm>
-          <a:prstGeom prst="roundRect">
-            <a:avLst>
-              <a:gd name="adj" fmla="val 2439"/>
-            </a:avLst>
-          </a:prstGeom>
-          <a:solidFill>
-            <a:srgbClr val="0E1116"/>
-          </a:solidFill>
-          <a:ln/>
           <a:effectLst>
             <a:outerShdw sx="100000" sy="100000" kx="0" ky="0" algn="bl" rotWithShape="0" blurRad="101600" dist="38100" dir="5400000">
               <a:srgbClr val="000000">
@@ -6268,14 +5861,34 @@
       </p:sp>
       <p:sp>
         <p:nvSpPr>
-          <p:cNvPr id="22" name="Text 20"/>
-          <p:cNvSpPr/>
-          <p:nvPr/>
-        </p:nvSpPr>
-        <p:spPr>
-          <a:xfrm>
-            <a:off x="7452360" y="1691640"/>
-            <a:ext cx="3776472" cy="274320"/>
+          <p:cNvPr id="7" name="Shape 5"/>
+          <p:cNvSpPr/>
+          <p:nvPr/>
+        </p:nvSpPr>
+        <p:spPr>
+          <a:xfrm>
+            <a:off x="1078992" y="1819656"/>
+            <a:ext cx="128016" cy="128016"/>
+          </a:xfrm>
+          <a:prstGeom prst="ellipse">
+            <a:avLst/>
+          </a:prstGeom>
+          <a:solidFill>
+            <a:srgbClr val="7FB77E"/>
+          </a:solidFill>
+          <a:ln/>
+        </p:spPr>
+      </p:sp>
+      <p:sp>
+        <p:nvSpPr>
+          <p:cNvPr id="8" name="Text 6"/>
+          <p:cNvSpPr/>
+          <p:nvPr/>
+        </p:nvSpPr>
+        <p:spPr>
+          <a:xfrm>
+            <a:off x="1280160" y="1746504"/>
+            <a:ext cx="3291840" cy="274320"/>
           </a:xfrm>
           <a:prstGeom prst="rect">
             <a:avLst/>
@@ -6291,15 +5904,29 @@
               <a:buNone/>
             </a:pPr>
             <a:r>
-              <a:rPr lang="en-US" sz="1100" b="1" spc="200" kern="0" dirty="0">
-                <a:solidFill>
-                  <a:srgbClr val="C6A15B"/>
-                </a:solidFill>
-                <a:latin typeface="Calibri" pitchFamily="34" charset="0"/>
-                <a:ea typeface="Calibri" pitchFamily="34" charset="-122"/>
-                <a:cs typeface="Calibri" pitchFamily="34" charset="-120"/>
-              </a:rPr>
-              <a:t>HOW WE DELIVER</a:t>
+              <a:rPr lang="en-US" sz="1100" b="1" dirty="0">
+                <a:solidFill>
+                  <a:srgbClr val="F5F2EA"/>
+                </a:solidFill>
+                <a:latin typeface="Calibri" pitchFamily="34" charset="0"/>
+                <a:ea typeface="Calibri" pitchFamily="34" charset="-122"/>
+                <a:cs typeface="Calibri" pitchFamily="34" charset="-120"/>
+              </a:rPr>
+              <a:t>Fab Luxe Assistant   </a:t>
+            </a:r>
+            <a:pPr indent="0" marL="0">
+              <a:buNone/>
+            </a:pPr>
+            <a:r>
+              <a:rPr lang="en-US" sz="950" dirty="0">
+                <a:solidFill>
+                  <a:srgbClr val="7FB77E"/>
+                </a:solidFill>
+                <a:latin typeface="Calibri" pitchFamily="34" charset="0"/>
+                <a:ea typeface="Calibri" pitchFamily="34" charset="-122"/>
+                <a:cs typeface="Calibri" pitchFamily="34" charset="-120"/>
+              </a:rPr>
+              <a:t>online</a:t>
             </a:r>
             <a:endParaRPr lang="en-US" sz="1100" dirty="0"/>
           </a:p>
@@ -6307,196 +5934,59 @@
       </p:sp>
       <p:sp>
         <p:nvSpPr>
-          <p:cNvPr id="23" name="Text 21"/>
-          <p:cNvSpPr/>
-          <p:nvPr/>
-        </p:nvSpPr>
-        <p:spPr>
-          <a:xfrm>
-            <a:off x="7498080" y="2103120"/>
-            <a:ext cx="3730752" cy="2286000"/>
-          </a:xfrm>
-          <a:prstGeom prst="rect">
-            <a:avLst/>
-          </a:prstGeom>
-          <a:noFill/>
-          <a:ln/>
-        </p:spPr>
-        <p:txBody>
-          <a:bodyPr wrap="square" lIns="0" tIns="0" rIns="0" bIns="0" rtlCol="0" anchor="t"/>
-          <a:lstStyle/>
-          <a:p>
-            <a:pPr marL="177800" indent="-177800">
-              <a:spcAft>
-                <a:spcPts val="800"/>
-              </a:spcAft>
-              <a:buSzPct val="100000"/>
-              <a:buChar char="•"/>
-            </a:pPr>
-            <a:r>
-              <a:rPr lang="en-US" sz="1250" dirty="0">
-                <a:solidFill>
-                  <a:srgbClr val="F5F2EA"/>
-                </a:solidFill>
-                <a:latin typeface="Calibri" pitchFamily="34" charset="0"/>
-                <a:ea typeface="Calibri" pitchFamily="34" charset="-122"/>
-                <a:cs typeface="Calibri" pitchFamily="34" charset="-120"/>
-              </a:rPr>
-              <a:t>Dedicated marketing pod</a:t>
-            </a:r>
-            <a:endParaRPr lang="en-US" sz="1250" dirty="0"/>
-          </a:p>
-          <a:p>
-            <a:pPr marL="177800" indent="-177800">
-              <a:spcAft>
-                <a:spcPts val="800"/>
-              </a:spcAft>
-              <a:buSzPct val="100000"/>
-              <a:buChar char="•"/>
-            </a:pPr>
-            <a:r>
-              <a:rPr lang="en-US" sz="1250" dirty="0">
-                <a:solidFill>
-                  <a:srgbClr val="F5F2EA"/>
-                </a:solidFill>
-                <a:latin typeface="Calibri" pitchFamily="34" charset="0"/>
-                <a:ea typeface="Calibri" pitchFamily="34" charset="-122"/>
-                <a:cs typeface="Calibri" pitchFamily="34" charset="-120"/>
-              </a:rPr>
-              <a:t>Agile weekly sprints</a:t>
-            </a:r>
-            <a:endParaRPr lang="en-US" sz="1250" dirty="0"/>
-          </a:p>
-          <a:p>
-            <a:pPr marL="177800" indent="-177800">
-              <a:spcAft>
-                <a:spcPts val="800"/>
-              </a:spcAft>
-              <a:buSzPct val="100000"/>
-              <a:buChar char="•"/>
-            </a:pPr>
-            <a:r>
-              <a:rPr lang="en-US" sz="1250" dirty="0">
-                <a:solidFill>
-                  <a:srgbClr val="F5F2EA"/>
-                </a:solidFill>
-                <a:latin typeface="Calibri" pitchFamily="34" charset="0"/>
-                <a:ea typeface="Calibri" pitchFamily="34" charset="-122"/>
-                <a:cs typeface="Calibri" pitchFamily="34" charset="-120"/>
-              </a:rPr>
-              <a:t>Transparent weekly reporting</a:t>
-            </a:r>
-            <a:endParaRPr lang="en-US" sz="1250" dirty="0"/>
-          </a:p>
-          <a:p>
-            <a:pPr marL="177800" indent="-177800">
-              <a:spcAft>
-                <a:spcPts val="800"/>
-              </a:spcAft>
-              <a:buSzPct val="100000"/>
-              <a:buChar char="•"/>
-            </a:pPr>
-            <a:r>
-              <a:rPr lang="en-US" sz="1250" dirty="0">
-                <a:solidFill>
-                  <a:srgbClr val="F5F2EA"/>
-                </a:solidFill>
-                <a:latin typeface="Calibri" pitchFamily="34" charset="0"/>
-                <a:ea typeface="Calibri" pitchFamily="34" charset="-122"/>
-                <a:cs typeface="Calibri" pitchFamily="34" charset="-120"/>
-              </a:rPr>
-              <a:t>Modern tools &amp; tracking</a:t>
-            </a:r>
-            <a:endParaRPr lang="en-US" sz="1250" dirty="0"/>
-          </a:p>
-          <a:p>
-            <a:pPr marL="177800" indent="-177800">
-              <a:spcAft>
-                <a:spcPts val="800"/>
-              </a:spcAft>
-              <a:buSzPct val="100000"/>
-              <a:buChar char="•"/>
-            </a:pPr>
-            <a:r>
-              <a:rPr lang="en-US" sz="1250" dirty="0">
-                <a:solidFill>
-                  <a:srgbClr val="F5F2EA"/>
-                </a:solidFill>
-                <a:latin typeface="Calibri" pitchFamily="34" charset="0"/>
-                <a:ea typeface="Calibri" pitchFamily="34" charset="-122"/>
-                <a:cs typeface="Calibri" pitchFamily="34" charset="-120"/>
-              </a:rPr>
-              <a:t>Single point of contact</a:t>
-            </a:r>
-            <a:endParaRPr lang="en-US" sz="1250" dirty="0"/>
-          </a:p>
-          <a:p>
-            <a:pPr marL="177800" indent="-177800">
-              <a:spcAft>
-                <a:spcPts val="800"/>
-              </a:spcAft>
-              <a:buSzPct val="100000"/>
-              <a:buChar char="•"/>
-            </a:pPr>
-            <a:r>
-              <a:rPr lang="en-US" sz="1250" dirty="0">
-                <a:solidFill>
-                  <a:srgbClr val="F5F2EA"/>
-                </a:solidFill>
-                <a:latin typeface="Calibri" pitchFamily="34" charset="0"/>
-                <a:ea typeface="Calibri" pitchFamily="34" charset="-122"/>
-                <a:cs typeface="Calibri" pitchFamily="34" charset="-120"/>
-              </a:rPr>
-              <a:t>Monthly performance review</a:t>
-            </a:r>
-            <a:endParaRPr lang="en-US" sz="1250" dirty="0"/>
-          </a:p>
-        </p:txBody>
-      </p:sp>
-      <p:sp>
-        <p:nvSpPr>
-          <p:cNvPr id="24" name="Shape 22"/>
-          <p:cNvSpPr/>
-          <p:nvPr/>
-        </p:nvSpPr>
-        <p:spPr>
-          <a:xfrm>
-            <a:off x="640080" y="4754880"/>
-            <a:ext cx="5271516" cy="1481328"/>
-          </a:xfrm>
-          <a:prstGeom prst="roundRect">
-            <a:avLst>
-              <a:gd name="adj" fmla="val 4938"/>
-            </a:avLst>
-          </a:prstGeom>
-          <a:solidFill>
-            <a:srgbClr val="F3F1EA"/>
-          </a:solidFill>
+          <p:cNvPr id="9" name="Shape 7"/>
+          <p:cNvSpPr/>
+          <p:nvPr/>
+        </p:nvSpPr>
+        <p:spPr>
+          <a:xfrm>
+            <a:off x="1005840" y="2148840"/>
+            <a:ext cx="3566160" cy="0"/>
+          </a:xfrm>
+          <a:prstGeom prst="line">
+            <a:avLst/>
+          </a:prstGeom>
+          <a:noFill/>
           <a:ln w="12700">
             <a:solidFill>
-              <a:srgbClr val="E4E0D6"/>
+              <a:srgbClr val="262E3A"/>
             </a:solidFill>
             <a:prstDash val="solid"/>
           </a:ln>
-          <a:effectLst>
-            <a:outerShdw sx="100000" sy="100000" kx="0" ky="0" algn="bl" rotWithShape="0" blurRad="63500" dist="25400" dir="5400000">
-              <a:srgbClr val="000000">
-                <a:alpha val="14000"/>
-              </a:srgbClr>
-            </a:outerShdw>
-          </a:effectLst>
-        </p:spPr>
-      </p:sp>
-      <p:sp>
-        <p:nvSpPr>
-          <p:cNvPr id="25" name="Text 23"/>
-          <p:cNvSpPr/>
-          <p:nvPr/>
-        </p:nvSpPr>
-        <p:spPr>
-          <a:xfrm>
-            <a:off x="914400" y="4919472"/>
-            <a:ext cx="4722876" cy="320040"/>
+        </p:spPr>
+      </p:sp>
+      <p:sp>
+        <p:nvSpPr>
+          <p:cNvPr id="10" name="Shape 8"/>
+          <p:cNvSpPr/>
+          <p:nvPr/>
+        </p:nvSpPr>
+        <p:spPr>
+          <a:xfrm>
+            <a:off x="1005840" y="2258568"/>
+            <a:ext cx="2743200" cy="402336"/>
+          </a:xfrm>
+          <a:prstGeom prst="roundRect">
+            <a:avLst>
+              <a:gd name="adj" fmla="val 18182"/>
+            </a:avLst>
+          </a:prstGeom>
+          <a:solidFill>
+            <a:srgbClr val="262E3A"/>
+          </a:solidFill>
+          <a:ln/>
+        </p:spPr>
+      </p:sp>
+      <p:sp>
+        <p:nvSpPr>
+          <p:cNvPr id="11" name="Text 9"/>
+          <p:cNvSpPr/>
+          <p:nvPr/>
+        </p:nvSpPr>
+        <p:spPr>
+          <a:xfrm>
+            <a:off x="1133856" y="2258568"/>
+            <a:ext cx="2487168" cy="402336"/>
           </a:xfrm>
           <a:prstGeom prst="rect">
             <a:avLst/>
@@ -6509,216 +5999,250 @@
           <a:lstStyle/>
           <a:p>
             <a:pPr indent="0" marL="0">
-              <a:buNone/>
-            </a:pPr>
-            <a:r>
-              <a:rPr lang="en-US" sz="1500" b="1" dirty="0">
-                <a:solidFill>
-                  <a:srgbClr val="1A1E24"/>
-                </a:solidFill>
-                <a:latin typeface="Cambria" pitchFamily="34" charset="0"/>
-                <a:ea typeface="Cambria" pitchFamily="34" charset="-122"/>
-                <a:cs typeface="Cambria" pitchFamily="34" charset="-120"/>
-              </a:rPr>
-              <a:t>You Provide   </a:t>
-            </a:r>
-            <a:pPr indent="0" marL="0">
-              <a:buNone/>
-            </a:pPr>
-            <a:r>
-              <a:rPr lang="en-US" sz="1050" i="1" dirty="0">
-                <a:solidFill>
-                  <a:srgbClr val="C6A15B"/>
-                </a:solidFill>
-                <a:latin typeface="Calibri" pitchFamily="34" charset="0"/>
-                <a:ea typeface="Calibri" pitchFamily="34" charset="-122"/>
-                <a:cs typeface="Calibri" pitchFamily="34" charset="-120"/>
-              </a:rPr>
-              <a:t>One Global · Fab Luxe</a:t>
-            </a:r>
-            <a:endParaRPr lang="en-US" sz="1500" dirty="0"/>
-          </a:p>
-        </p:txBody>
-      </p:sp>
-      <p:sp>
-        <p:nvSpPr>
-          <p:cNvPr id="26" name="Text 24"/>
-          <p:cNvSpPr/>
-          <p:nvPr/>
-        </p:nvSpPr>
-        <p:spPr>
-          <a:xfrm>
-            <a:off x="950976" y="5321808"/>
-            <a:ext cx="2544318" cy="868680"/>
-          </a:xfrm>
-          <a:prstGeom prst="rect">
-            <a:avLst/>
-          </a:prstGeom>
-          <a:noFill/>
-          <a:ln/>
-        </p:spPr>
-        <p:txBody>
-          <a:bodyPr wrap="square" lIns="0" tIns="0" rIns="0" bIns="0" rtlCol="0" anchor="t"/>
-          <a:lstStyle/>
-          <a:p>
-            <a:pPr marL="152400" indent="-152400">
               <a:lnSpc>
                 <a:spcPct val="100000"/>
               </a:lnSpc>
-              <a:spcAft>
-                <a:spcPts val="400"/>
-              </a:spcAft>
-              <a:buSzPct val="100000"/>
-              <a:buChar char="•"/>
-            </a:pPr>
-            <a:r>
-              <a:rPr lang="en-US" sz="1100" dirty="0">
-                <a:solidFill>
-                  <a:srgbClr val="1A1E24"/>
-                </a:solidFill>
-                <a:latin typeface="Calibri" pitchFamily="34" charset="0"/>
-                <a:ea typeface="Calibri" pitchFamily="34" charset="-122"/>
-                <a:cs typeface="Calibri" pitchFamily="34" charset="-120"/>
-              </a:rPr>
-              <a:t>Brand assets &amp; guidelines</a:t>
-            </a:r>
-            <a:endParaRPr lang="en-US" sz="1100" dirty="0"/>
-          </a:p>
-          <a:p>
-            <a:pPr marL="152400" indent="-152400">
+              <a:buNone/>
+            </a:pPr>
+            <a:r>
+              <a:rPr lang="en-US" sz="1050" dirty="0">
+                <a:solidFill>
+                  <a:srgbClr val="F5F2EA"/>
+                </a:solidFill>
+                <a:latin typeface="Calibri" pitchFamily="34" charset="0"/>
+                <a:ea typeface="Calibri" pitchFamily="34" charset="-122"/>
+                <a:cs typeface="Calibri" pitchFamily="34" charset="-120"/>
+              </a:rPr>
+              <a:t>Hi! 3 or 4 BHK — which suits you?</a:t>
+            </a:r>
+            <a:endParaRPr lang="en-US" sz="1050" dirty="0"/>
+          </a:p>
+        </p:txBody>
+      </p:sp>
+      <p:sp>
+        <p:nvSpPr>
+          <p:cNvPr id="12" name="Shape 10"/>
+          <p:cNvSpPr/>
+          <p:nvPr/>
+        </p:nvSpPr>
+        <p:spPr>
+          <a:xfrm>
+            <a:off x="2788920" y="2734056"/>
+            <a:ext cx="1783080" cy="365760"/>
+          </a:xfrm>
+          <a:prstGeom prst="roundRect">
+            <a:avLst>
+              <a:gd name="adj" fmla="val 20000"/>
+            </a:avLst>
+          </a:prstGeom>
+          <a:solidFill>
+            <a:srgbClr val="C6A15B"/>
+          </a:solidFill>
+          <a:ln/>
+        </p:spPr>
+      </p:sp>
+      <p:sp>
+        <p:nvSpPr>
+          <p:cNvPr id="13" name="Text 11"/>
+          <p:cNvSpPr/>
+          <p:nvPr/>
+        </p:nvSpPr>
+        <p:spPr>
+          <a:xfrm>
+            <a:off x="2916936" y="2734056"/>
+            <a:ext cx="1527048" cy="365760"/>
+          </a:xfrm>
+          <a:prstGeom prst="rect">
+            <a:avLst/>
+          </a:prstGeom>
+          <a:noFill/>
+          <a:ln/>
+        </p:spPr>
+        <p:txBody>
+          <a:bodyPr wrap="square" lIns="0" tIns="0" rIns="0" bIns="0" rtlCol="0" anchor="ctr"/>
+          <a:lstStyle/>
+          <a:p>
+            <a:pPr indent="0" marL="0">
               <a:lnSpc>
                 <a:spcPct val="100000"/>
               </a:lnSpc>
-              <a:spcAft>
-                <a:spcPts val="400"/>
-              </a:spcAft>
-              <a:buSzPct val="100000"/>
-              <a:buChar char="•"/>
-            </a:pPr>
-            <a:r>
-              <a:rPr lang="en-US" sz="1100" dirty="0">
-                <a:solidFill>
-                  <a:srgbClr val="1A1E24"/>
-                </a:solidFill>
-                <a:latin typeface="Calibri" pitchFamily="34" charset="0"/>
-                <a:ea typeface="Calibri" pitchFamily="34" charset="-122"/>
-                <a:cs typeface="Calibri" pitchFamily="34" charset="-120"/>
-              </a:rPr>
-              <a:t>Product info &amp; content</a:t>
-            </a:r>
-            <a:endParaRPr lang="en-US" sz="1100" dirty="0"/>
-          </a:p>
-        </p:txBody>
-      </p:sp>
-      <p:sp>
-        <p:nvSpPr>
-          <p:cNvPr id="27" name="Text 25"/>
-          <p:cNvSpPr/>
-          <p:nvPr/>
-        </p:nvSpPr>
-        <p:spPr>
-          <a:xfrm>
-            <a:off x="3412998" y="5321808"/>
-            <a:ext cx="2315718" cy="868680"/>
-          </a:xfrm>
-          <a:prstGeom prst="rect">
-            <a:avLst/>
-          </a:prstGeom>
-          <a:noFill/>
-          <a:ln/>
-        </p:spPr>
-        <p:txBody>
-          <a:bodyPr wrap="square" lIns="0" tIns="0" rIns="0" bIns="0" rtlCol="0" anchor="t"/>
-          <a:lstStyle/>
-          <a:p>
-            <a:pPr marL="152400" indent="-152400">
+              <a:buNone/>
+            </a:pPr>
+            <a:r>
+              <a:rPr lang="en-US" sz="1050" b="1" dirty="0">
+                <a:solidFill>
+                  <a:srgbClr val="0E1116"/>
+                </a:solidFill>
+                <a:latin typeface="Calibri" pitchFamily="34" charset="0"/>
+                <a:ea typeface="Calibri" pitchFamily="34" charset="-122"/>
+                <a:cs typeface="Calibri" pitchFamily="34" charset="-120"/>
+              </a:rPr>
+              <a:t>4 BHK, ready to move</a:t>
+            </a:r>
+            <a:endParaRPr lang="en-US" sz="1050" dirty="0"/>
+          </a:p>
+        </p:txBody>
+      </p:sp>
+      <p:sp>
+        <p:nvSpPr>
+          <p:cNvPr id="14" name="Shape 12"/>
+          <p:cNvSpPr/>
+          <p:nvPr/>
+        </p:nvSpPr>
+        <p:spPr>
+          <a:xfrm>
+            <a:off x="1005840" y="3172968"/>
+            <a:ext cx="2743200" cy="512064"/>
+          </a:xfrm>
+          <a:prstGeom prst="roundRect">
+            <a:avLst>
+              <a:gd name="adj" fmla="val 14286"/>
+            </a:avLst>
+          </a:prstGeom>
+          <a:solidFill>
+            <a:srgbClr val="262E3A"/>
+          </a:solidFill>
+          <a:ln/>
+        </p:spPr>
+      </p:sp>
+      <p:sp>
+        <p:nvSpPr>
+          <p:cNvPr id="15" name="Text 13"/>
+          <p:cNvSpPr/>
+          <p:nvPr/>
+        </p:nvSpPr>
+        <p:spPr>
+          <a:xfrm>
+            <a:off x="1133856" y="3172968"/>
+            <a:ext cx="2487168" cy="512064"/>
+          </a:xfrm>
+          <a:prstGeom prst="rect">
+            <a:avLst/>
+          </a:prstGeom>
+          <a:noFill/>
+          <a:ln/>
+        </p:spPr>
+        <p:txBody>
+          <a:bodyPr wrap="square" lIns="0" tIns="0" rIns="0" bIns="0" rtlCol="0" anchor="ctr"/>
+          <a:lstStyle/>
+          <a:p>
+            <a:pPr indent="0" marL="0">
               <a:lnSpc>
                 <a:spcPct val="100000"/>
               </a:lnSpc>
-              <a:spcAft>
-                <a:spcPts val="400"/>
-              </a:spcAft>
-              <a:buSzPct val="100000"/>
-              <a:buChar char="•"/>
-            </a:pPr>
-            <a:r>
-              <a:rPr lang="en-US" sz="1100" dirty="0">
-                <a:solidFill>
-                  <a:srgbClr val="1A1E24"/>
-                </a:solidFill>
-                <a:latin typeface="Calibri" pitchFamily="34" charset="0"/>
-                <a:ea typeface="Calibri" pitchFamily="34" charset="-122"/>
-                <a:cs typeface="Calibri" pitchFamily="34" charset="-120"/>
-              </a:rPr>
-              <a:t>Sales team to close leads</a:t>
-            </a:r>
-            <a:endParaRPr lang="en-US" sz="1100" dirty="0"/>
-          </a:p>
-          <a:p>
-            <a:pPr marL="152400" indent="-152400">
+              <a:buNone/>
+            </a:pPr>
+            <a:r>
+              <a:rPr lang="en-US" sz="1050" dirty="0">
+                <a:solidFill>
+                  <a:srgbClr val="F5F2EA"/>
+                </a:solidFill>
+                <a:latin typeface="Calibri" pitchFamily="34" charset="0"/>
+                <a:ea typeface="Calibri" pitchFamily="34" charset="-122"/>
+                <a:cs typeface="Calibri" pitchFamily="34" charset="-120"/>
+              </a:rPr>
+              <a:t>Great — your mobile for price &amp; options?</a:t>
+            </a:r>
+            <a:endParaRPr lang="en-US" sz="1050" dirty="0"/>
+          </a:p>
+        </p:txBody>
+      </p:sp>
+      <p:sp>
+        <p:nvSpPr>
+          <p:cNvPr id="16" name="Shape 14"/>
+          <p:cNvSpPr/>
+          <p:nvPr/>
+        </p:nvSpPr>
+        <p:spPr>
+          <a:xfrm>
+            <a:off x="2788920" y="3794760"/>
+            <a:ext cx="1783080" cy="365760"/>
+          </a:xfrm>
+          <a:prstGeom prst="roundRect">
+            <a:avLst>
+              <a:gd name="adj" fmla="val 20000"/>
+            </a:avLst>
+          </a:prstGeom>
+          <a:solidFill>
+            <a:srgbClr val="C6A15B"/>
+          </a:solidFill>
+          <a:ln/>
+        </p:spPr>
+      </p:sp>
+      <p:sp>
+        <p:nvSpPr>
+          <p:cNvPr id="17" name="Text 15"/>
+          <p:cNvSpPr/>
+          <p:nvPr/>
+        </p:nvSpPr>
+        <p:spPr>
+          <a:xfrm>
+            <a:off x="2916936" y="3794760"/>
+            <a:ext cx="1527048" cy="365760"/>
+          </a:xfrm>
+          <a:prstGeom prst="rect">
+            <a:avLst/>
+          </a:prstGeom>
+          <a:noFill/>
+          <a:ln/>
+        </p:spPr>
+        <p:txBody>
+          <a:bodyPr wrap="square" lIns="0" tIns="0" rIns="0" bIns="0" rtlCol="0" anchor="ctr"/>
+          <a:lstStyle/>
+          <a:p>
+            <a:pPr indent="0" marL="0">
               <a:lnSpc>
                 <a:spcPct val="100000"/>
               </a:lnSpc>
-              <a:spcAft>
-                <a:spcPts val="400"/>
-              </a:spcAft>
-              <a:buSzPct val="100000"/>
-              <a:buChar char="•"/>
-            </a:pPr>
-            <a:r>
-              <a:rPr lang="en-US" sz="1100" dirty="0">
-                <a:solidFill>
-                  <a:srgbClr val="1A1E24"/>
-                </a:solidFill>
-                <a:latin typeface="Calibri" pitchFamily="34" charset="0"/>
-                <a:ea typeface="Calibri" pitchFamily="34" charset="-122"/>
-                <a:cs typeface="Calibri" pitchFamily="34" charset="-120"/>
-              </a:rPr>
-              <a:t>Budget approvals</a:t>
-            </a:r>
-            <a:endParaRPr lang="en-US" sz="1100" dirty="0"/>
-          </a:p>
-        </p:txBody>
-      </p:sp>
-      <p:sp>
-        <p:nvSpPr>
-          <p:cNvPr id="28" name="Shape 26"/>
-          <p:cNvSpPr/>
-          <p:nvPr/>
-        </p:nvSpPr>
-        <p:spPr>
-          <a:xfrm>
-            <a:off x="6277356" y="4754880"/>
-            <a:ext cx="5271516" cy="1481328"/>
+              <a:buNone/>
+            </a:pPr>
+            <a:r>
+              <a:rPr lang="en-US" sz="1050" b="1" dirty="0">
+                <a:solidFill>
+                  <a:srgbClr val="0E1116"/>
+                </a:solidFill>
+                <a:latin typeface="Calibri" pitchFamily="34" charset="0"/>
+                <a:ea typeface="Calibri" pitchFamily="34" charset="-122"/>
+                <a:cs typeface="Calibri" pitchFamily="34" charset="-120"/>
+              </a:rPr>
+              <a:t>+91 98XXXX21</a:t>
+            </a:r>
+            <a:endParaRPr lang="en-US" sz="1050" dirty="0"/>
+          </a:p>
+        </p:txBody>
+      </p:sp>
+      <p:sp>
+        <p:nvSpPr>
+          <p:cNvPr id="18" name="Shape 16"/>
+          <p:cNvSpPr/>
+          <p:nvPr/>
+        </p:nvSpPr>
+        <p:spPr>
+          <a:xfrm>
+            <a:off x="1005840" y="4233672"/>
+            <a:ext cx="2743200" cy="384048"/>
           </a:xfrm>
           <a:prstGeom prst="roundRect">
             <a:avLst>
-              <a:gd name="adj" fmla="val 4938"/>
+              <a:gd name="adj" fmla="val 19048"/>
             </a:avLst>
           </a:prstGeom>
           <a:solidFill>
-            <a:srgbClr val="0E1116"/>
+            <a:srgbClr val="262E3A"/>
           </a:solidFill>
           <a:ln/>
-          <a:effectLst>
-            <a:outerShdw sx="100000" sy="100000" kx="0" ky="0" algn="bl" rotWithShape="0" blurRad="63500" dist="25400" dir="5400000">
-              <a:srgbClr val="000000">
-                <a:alpha val="14000"/>
-              </a:srgbClr>
-            </a:outerShdw>
-          </a:effectLst>
-        </p:spPr>
-      </p:sp>
-      <p:sp>
-        <p:nvSpPr>
-          <p:cNvPr id="29" name="Text 27"/>
-          <p:cNvSpPr/>
-          <p:nvPr/>
-        </p:nvSpPr>
-        <p:spPr>
-          <a:xfrm>
-            <a:off x="6551676" y="4919472"/>
-            <a:ext cx="4722876" cy="320040"/>
+        </p:spPr>
+      </p:sp>
+      <p:sp>
+        <p:nvSpPr>
+          <p:cNvPr id="19" name="Text 17"/>
+          <p:cNvSpPr/>
+          <p:nvPr/>
+        </p:nvSpPr>
+        <p:spPr>
+          <a:xfrm>
+            <a:off x="1133856" y="4233672"/>
+            <a:ext cx="2487168" cy="384048"/>
           </a:xfrm>
           <a:prstGeom prst="rect">
             <a:avLst/>
@@ -6731,70 +6255,13 @@
           <a:lstStyle/>
           <a:p>
             <a:pPr indent="0" marL="0">
-              <a:buNone/>
-            </a:pPr>
-            <a:r>
-              <a:rPr lang="en-US" sz="1500" b="1" dirty="0">
-                <a:solidFill>
-                  <a:srgbClr val="F5F2EA"/>
-                </a:solidFill>
-                <a:latin typeface="Cambria" pitchFamily="34" charset="0"/>
-                <a:ea typeface="Cambria" pitchFamily="34" charset="-122"/>
-                <a:cs typeface="Cambria" pitchFamily="34" charset="-120"/>
-              </a:rPr>
-              <a:t>We Deliver   </a:t>
-            </a:r>
-            <a:pPr indent="0" marL="0">
-              <a:buNone/>
-            </a:pPr>
-            <a:r>
-              <a:rPr lang="en-US" sz="1050" i="1" dirty="0">
-                <a:solidFill>
-                  <a:srgbClr val="C6A15B"/>
-                </a:solidFill>
-                <a:latin typeface="Calibri" pitchFamily="34" charset="0"/>
-                <a:ea typeface="Calibri" pitchFamily="34" charset="-122"/>
-                <a:cs typeface="Calibri" pitchFamily="34" charset="-120"/>
-              </a:rPr>
-              <a:t>Digital Marketing Team</a:t>
-            </a:r>
-            <a:endParaRPr lang="en-US" sz="1500" dirty="0"/>
-          </a:p>
-        </p:txBody>
-      </p:sp>
-      <p:sp>
-        <p:nvSpPr>
-          <p:cNvPr id="30" name="Text 28"/>
-          <p:cNvSpPr/>
-          <p:nvPr/>
-        </p:nvSpPr>
-        <p:spPr>
-          <a:xfrm>
-            <a:off x="6588252" y="5321808"/>
-            <a:ext cx="2544318" cy="868680"/>
-          </a:xfrm>
-          <a:prstGeom prst="rect">
-            <a:avLst/>
-          </a:prstGeom>
-          <a:noFill/>
-          <a:ln/>
-        </p:spPr>
-        <p:txBody>
-          <a:bodyPr wrap="square" lIns="0" tIns="0" rIns="0" bIns="0" rtlCol="0" anchor="t"/>
-          <a:lstStyle/>
-          <a:p>
-            <a:pPr marL="152400" indent="-152400">
               <a:lnSpc>
                 <a:spcPct val="100000"/>
               </a:lnSpc>
-              <a:spcAft>
-                <a:spcPts val="400"/>
-              </a:spcAft>
-              <a:buSzPct val="100000"/>
-              <a:buChar char="•"/>
-            </a:pPr>
-            <a:r>
-              <a:rPr lang="en-US" sz="1100" dirty="0">
+              <a:buNone/>
+            </a:pPr>
+            <a:r>
+              <a:rPr lang="en-US" sz="1050" dirty="0">
                 <a:solidFill>
                   <a:srgbClr val="F5F2EA"/>
                 </a:solidFill>
@@ -6802,31 +6269,107 @@
                 <a:ea typeface="Calibri" pitchFamily="34" charset="-122"/>
                 <a:cs typeface="Calibri" pitchFamily="34" charset="-120"/>
               </a:rPr>
-              <a:t>Strategy + full-channel execution</a:t>
+              <a:t>Enter the OTP to verify:</a:t>
+            </a:r>
+            <a:endParaRPr lang="en-US" sz="1050" dirty="0"/>
+          </a:p>
+        </p:txBody>
+      </p:sp>
+      <p:sp>
+        <p:nvSpPr>
+          <p:cNvPr id="20" name="Shape 18"/>
+          <p:cNvSpPr/>
+          <p:nvPr/>
+        </p:nvSpPr>
+        <p:spPr>
+          <a:xfrm>
+            <a:off x="1005840" y="4727448"/>
+            <a:ext cx="3566160" cy="420624"/>
+          </a:xfrm>
+          <a:prstGeom prst="roundRect">
+            <a:avLst>
+              <a:gd name="adj" fmla="val 21739"/>
+            </a:avLst>
+          </a:prstGeom>
+          <a:solidFill>
+            <a:srgbClr val="E3C892"/>
+          </a:solidFill>
+          <a:ln/>
+        </p:spPr>
+      </p:sp>
+      <p:sp>
+        <p:nvSpPr>
+          <p:cNvPr id="21" name="Text 19"/>
+          <p:cNvSpPr/>
+          <p:nvPr/>
+        </p:nvSpPr>
+        <p:spPr>
+          <a:xfrm>
+            <a:off x="1005840" y="4727448"/>
+            <a:ext cx="3566160" cy="420624"/>
+          </a:xfrm>
+          <a:prstGeom prst="rect">
+            <a:avLst/>
+          </a:prstGeom>
+          <a:noFill/>
+          <a:ln/>
+        </p:spPr>
+        <p:txBody>
+          <a:bodyPr wrap="square" lIns="0" tIns="0" rIns="0" bIns="0" rtlCol="0" anchor="ctr"/>
+          <a:lstStyle/>
+          <a:p>
+            <a:pPr algn="ctr" indent="0" marL="0">
+              <a:buNone/>
+            </a:pPr>
+            <a:r>
+              <a:rPr lang="en-US" sz="1100" b="1" dirty="0">
+                <a:solidFill>
+                  <a:srgbClr val="0E1116"/>
+                </a:solidFill>
+                <a:latin typeface="Calibri" pitchFamily="34" charset="0"/>
+                <a:ea typeface="Calibri" pitchFamily="34" charset="-122"/>
+                <a:cs typeface="Calibri" pitchFamily="34" charset="-120"/>
+              </a:rPr>
+              <a:t>✓  Verified real buyer  →  sales</a:t>
             </a:r>
             <a:endParaRPr lang="en-US" sz="1100" dirty="0"/>
           </a:p>
-          <a:p>
-            <a:pPr marL="152400" indent="-152400">
-              <a:lnSpc>
-                <a:spcPct val="100000"/>
-              </a:lnSpc>
-              <a:spcAft>
-                <a:spcPts val="400"/>
-              </a:spcAft>
-              <a:buSzPct val="100000"/>
-              <a:buChar char="•"/>
-            </a:pPr>
-            <a:r>
-              <a:rPr lang="en-US" sz="1100" dirty="0">
-                <a:solidFill>
-                  <a:srgbClr val="F5F2EA"/>
-                </a:solidFill>
-                <a:latin typeface="Calibri" pitchFamily="34" charset="0"/>
-                <a:ea typeface="Calibri" pitchFamily="34" charset="-122"/>
-                <a:cs typeface="Calibri" pitchFamily="34" charset="-120"/>
-              </a:rPr>
-              <a:t>Content, creative &amp; landing pages</a:t>
+        </p:txBody>
+      </p:sp>
+      <p:sp>
+        <p:nvSpPr>
+          <p:cNvPr id="22" name="Text 20"/>
+          <p:cNvSpPr/>
+          <p:nvPr/>
+        </p:nvSpPr>
+        <p:spPr>
+          <a:xfrm>
+            <a:off x="5166360" y="1645920"/>
+            <a:ext cx="6400800" cy="274320"/>
+          </a:xfrm>
+          <a:prstGeom prst="rect">
+            <a:avLst/>
+          </a:prstGeom>
+          <a:noFill/>
+          <a:ln/>
+        </p:spPr>
+        <p:txBody>
+          <a:bodyPr wrap="square" lIns="0" tIns="0" rIns="0" bIns="0" rtlCol="0" anchor="ctr"/>
+          <a:lstStyle/>
+          <a:p>
+            <a:pPr indent="0" marL="0">
+              <a:buNone/>
+            </a:pPr>
+            <a:r>
+              <a:rPr lang="en-US" sz="1100" b="1" spc="200" kern="0" dirty="0">
+                <a:solidFill>
+                  <a:srgbClr val="C6A15B"/>
+                </a:solidFill>
+                <a:latin typeface="Calibri" pitchFamily="34" charset="0"/>
+                <a:ea typeface="Calibri" pitchFamily="34" charset="-122"/>
+                <a:cs typeface="Calibri" pitchFamily="34" charset="-120"/>
+              </a:rPr>
+              <a:t>HOW IT WORKS</a:t>
             </a:r>
             <a:endParaRPr lang="en-US" sz="1100" dirty="0"/>
           </a:p>
@@ -6834,168 +6377,20 @@
       </p:sp>
       <p:sp>
         <p:nvSpPr>
-          <p:cNvPr id="31" name="Text 29"/>
-          <p:cNvSpPr/>
-          <p:nvPr/>
-        </p:nvSpPr>
-        <p:spPr>
-          <a:xfrm>
-            <a:off x="9050274" y="5321808"/>
-            <a:ext cx="2315718" cy="868680"/>
-          </a:xfrm>
-          <a:prstGeom prst="rect">
-            <a:avLst/>
-          </a:prstGeom>
-          <a:noFill/>
-          <a:ln/>
-        </p:spPr>
-        <p:txBody>
-          <a:bodyPr wrap="square" lIns="0" tIns="0" rIns="0" bIns="0" rtlCol="0" anchor="t"/>
-          <a:lstStyle/>
-          <a:p>
-            <a:pPr marL="152400" indent="-152400">
-              <a:lnSpc>
-                <a:spcPct val="100000"/>
-              </a:lnSpc>
-              <a:spcAft>
-                <a:spcPts val="400"/>
-              </a:spcAft>
-              <a:buSzPct val="100000"/>
-              <a:buChar char="•"/>
-            </a:pPr>
-            <a:r>
-              <a:rPr lang="en-US" sz="1100" dirty="0">
-                <a:solidFill>
-                  <a:srgbClr val="F5F2EA"/>
-                </a:solidFill>
-                <a:latin typeface="Calibri" pitchFamily="34" charset="0"/>
-                <a:ea typeface="Calibri" pitchFamily="34" charset="-122"/>
-                <a:cs typeface="Calibri" pitchFamily="34" charset="-120"/>
-              </a:rPr>
-              <a:t>Lead capture, routing &amp; CRM</a:t>
-            </a:r>
-            <a:endParaRPr lang="en-US" sz="1100" dirty="0"/>
-          </a:p>
-          <a:p>
-            <a:pPr marL="152400" indent="-152400">
-              <a:lnSpc>
-                <a:spcPct val="100000"/>
-              </a:lnSpc>
-              <a:spcAft>
-                <a:spcPts val="400"/>
-              </a:spcAft>
-              <a:buSzPct val="100000"/>
-              <a:buChar char="•"/>
-            </a:pPr>
-            <a:r>
-              <a:rPr lang="en-US" sz="1100" dirty="0">
-                <a:solidFill>
-                  <a:srgbClr val="F5F2EA"/>
-                </a:solidFill>
-                <a:latin typeface="Calibri" pitchFamily="34" charset="0"/>
-                <a:ea typeface="Calibri" pitchFamily="34" charset="-122"/>
-                <a:cs typeface="Calibri" pitchFamily="34" charset="-120"/>
-              </a:rPr>
-              <a:t>Analytics, optimization &amp; reporting</a:t>
-            </a:r>
-            <a:endParaRPr lang="en-US" sz="1100" dirty="0"/>
-          </a:p>
-        </p:txBody>
-      </p:sp>
-      <p:sp>
-        <p:nvSpPr>
-          <p:cNvPr id="32" name="Text 30"/>
-          <p:cNvSpPr/>
-          <p:nvPr/>
-        </p:nvSpPr>
-        <p:spPr>
-          <a:xfrm>
-            <a:off x="10908792" y="6400800"/>
-            <a:ext cx="640080" cy="274320"/>
-          </a:xfrm>
-          <a:prstGeom prst="rect">
-            <a:avLst/>
-          </a:prstGeom>
-          <a:noFill/>
-          <a:ln/>
-        </p:spPr>
-        <p:txBody>
-          <a:bodyPr wrap="square" lIns="0" tIns="0" rIns="0" bIns="0" rtlCol="0" anchor="ctr"/>
-          <a:lstStyle/>
-          <a:p>
-            <a:pPr algn="r" indent="0" marL="0">
-              <a:buNone/>
-            </a:pPr>
-            <a:r>
-              <a:rPr lang="en-US" sz="950" dirty="0">
-                <a:solidFill>
-                  <a:srgbClr val="5C6470"/>
-                </a:solidFill>
-                <a:latin typeface="Calibri" pitchFamily="34" charset="0"/>
-                <a:ea typeface="Calibri" pitchFamily="34" charset="-122"/>
-                <a:cs typeface="Calibri" pitchFamily="34" charset="-120"/>
-              </a:rPr>
-              <a:t>03</a:t>
-            </a:r>
-            <a:endParaRPr lang="en-US" sz="950" dirty="0"/>
-          </a:p>
-        </p:txBody>
-      </p:sp>
-      <p:sp>
-        <p:nvSpPr>
-          <p:cNvPr id="33" name="Text 31"/>
-          <p:cNvSpPr/>
-          <p:nvPr/>
-        </p:nvSpPr>
-        <p:spPr>
-          <a:xfrm>
-            <a:off x="640080" y="6400800"/>
-            <a:ext cx="6400800" cy="274320"/>
-          </a:xfrm>
-          <a:prstGeom prst="rect">
-            <a:avLst/>
-          </a:prstGeom>
-          <a:noFill/>
-          <a:ln/>
-        </p:spPr>
-        <p:txBody>
-          <a:bodyPr wrap="square" lIns="0" tIns="0" rIns="0" bIns="0" rtlCol="0" anchor="ctr"/>
-          <a:lstStyle/>
-          <a:p>
-            <a:pPr indent="0" marL="0">
-              <a:buNone/>
-            </a:pPr>
-            <a:r>
-              <a:rPr lang="en-US" sz="900" dirty="0">
-                <a:solidFill>
-                  <a:srgbClr val="5C6470"/>
-                </a:solidFill>
-                <a:latin typeface="Calibri" pitchFamily="34" charset="0"/>
-                <a:ea typeface="Calibri" pitchFamily="34" charset="-122"/>
-                <a:cs typeface="Calibri" pitchFamily="34" charset="-120"/>
-              </a:rPr>
-              <a:t>Fab Luxe · Digital Marketing &amp; Lead Generation</a:t>
-            </a:r>
-            <a:endParaRPr lang="en-US" sz="900" dirty="0"/>
-          </a:p>
-        </p:txBody>
-      </p:sp>
-      <p:sp>
-        <p:nvSpPr>
-          <p:cNvPr id="34" name="Shape 32"/>
-          <p:cNvSpPr/>
-          <p:nvPr/>
-        </p:nvSpPr>
-        <p:spPr>
-          <a:xfrm>
-            <a:off x="11091672" y="310896"/>
+          <p:cNvPr id="23" name="Shape 21"/>
+          <p:cNvSpPr/>
+          <p:nvPr/>
+        </p:nvSpPr>
+        <p:spPr>
+          <a:xfrm>
+            <a:off x="5166360" y="2029968"/>
             <a:ext cx="457200" cy="457200"/>
           </a:xfrm>
           <a:prstGeom prst="ellipse">
             <a:avLst/>
           </a:prstGeom>
           <a:solidFill>
-            <a:srgbClr val="FFFFFF"/>
+            <a:srgbClr val="141A22"/>
           </a:solidFill>
           <a:ln w="15875">
             <a:solidFill>
@@ -7007,13 +6402,13 @@
       </p:sp>
       <p:sp>
         <p:nvSpPr>
-          <p:cNvPr id="35" name="Text 33"/>
-          <p:cNvSpPr/>
-          <p:nvPr/>
-        </p:nvSpPr>
-        <p:spPr>
-          <a:xfrm>
-            <a:off x="11091672" y="310896"/>
+          <p:cNvPr id="24" name="Text 22"/>
+          <p:cNvSpPr/>
+          <p:nvPr/>
+        </p:nvSpPr>
+        <p:spPr>
+          <a:xfrm>
+            <a:off x="5166360" y="2029968"/>
             <a:ext cx="457200" cy="457200"/>
           </a:xfrm>
           <a:prstGeom prst="rect">
@@ -7030,14 +6425,1318 @@
               <a:buNone/>
             </a:pPr>
             <a:r>
-              <a:rPr lang="en-US" sz="1700" b="1" dirty="0">
-                <a:solidFill>
-                  <a:srgbClr val="C6A15B"/>
+              <a:rPr lang="en-US" sz="1500" b="1" dirty="0">
+                <a:solidFill>
+                  <a:srgbClr val="E3C892"/>
                 </a:solidFill>
                 <a:latin typeface="Cambria" pitchFamily="34" charset="0"/>
                 <a:ea typeface="Cambria" pitchFamily="34" charset="-122"/>
                 <a:cs typeface="Cambria" pitchFamily="34" charset="-120"/>
               </a:rPr>
+              <a:t>1</a:t>
+            </a:r>
+            <a:endParaRPr lang="en-US" sz="1500" dirty="0"/>
+          </a:p>
+        </p:txBody>
+      </p:sp>
+      <p:sp>
+        <p:nvSpPr>
+          <p:cNvPr id="25" name="Text 23"/>
+          <p:cNvSpPr/>
+          <p:nvPr/>
+        </p:nvSpPr>
+        <p:spPr>
+          <a:xfrm>
+            <a:off x="5788152" y="2029968"/>
+            <a:ext cx="5760720" cy="457200"/>
+          </a:xfrm>
+          <a:prstGeom prst="rect">
+            <a:avLst/>
+          </a:prstGeom>
+          <a:noFill/>
+          <a:ln/>
+        </p:spPr>
+        <p:txBody>
+          <a:bodyPr wrap="square" lIns="0" tIns="0" rIns="0" bIns="0" rtlCol="0" anchor="ctr"/>
+          <a:lstStyle/>
+          <a:p>
+            <a:pPr indent="0" marL="0">
+              <a:lnSpc>
+                <a:spcPct val="100000"/>
+              </a:lnSpc>
+              <a:buNone/>
+            </a:pPr>
+            <a:r>
+              <a:rPr lang="en-US" sz="1450" b="1" dirty="0">
+                <a:solidFill>
+                  <a:srgbClr val="F5F2EA"/>
+                </a:solidFill>
+                <a:latin typeface="Calibri" pitchFamily="34" charset="0"/>
+                <a:ea typeface="Calibri" pitchFamily="34" charset="-122"/>
+                <a:cs typeface="Calibri" pitchFamily="34" charset="-120"/>
+              </a:rPr>
+              <a:t>Engage   </a:t>
+            </a:r>
+            <a:pPr indent="0" marL="0">
+              <a:lnSpc>
+                <a:spcPct val="100000"/>
+              </a:lnSpc>
+              <a:buNone/>
+            </a:pPr>
+            <a:r>
+              <a:rPr lang="en-US" sz="1200" dirty="0">
+                <a:solidFill>
+                  <a:srgbClr val="9AA2AD"/>
+                </a:solidFill>
+                <a:latin typeface="Calibri" pitchFamily="34" charset="0"/>
+                <a:ea typeface="Calibri" pitchFamily="34" charset="-122"/>
+                <a:cs typeface="Calibri" pitchFamily="34" charset="-120"/>
+              </a:rPr>
+              <a:t>Chats with every website visitor, 24/7</a:t>
+            </a:r>
+            <a:endParaRPr lang="en-US" sz="1450" dirty="0"/>
+          </a:p>
+        </p:txBody>
+      </p:sp>
+      <p:sp>
+        <p:nvSpPr>
+          <p:cNvPr id="26" name="Shape 24"/>
+          <p:cNvSpPr/>
+          <p:nvPr/>
+        </p:nvSpPr>
+        <p:spPr>
+          <a:xfrm>
+            <a:off x="5166360" y="2651760"/>
+            <a:ext cx="457200" cy="457200"/>
+          </a:xfrm>
+          <a:prstGeom prst="ellipse">
+            <a:avLst/>
+          </a:prstGeom>
+          <a:solidFill>
+            <a:srgbClr val="141A22"/>
+          </a:solidFill>
+          <a:ln w="15875">
+            <a:solidFill>
+              <a:srgbClr val="C6A15B"/>
+            </a:solidFill>
+            <a:prstDash val="solid"/>
+          </a:ln>
+        </p:spPr>
+      </p:sp>
+      <p:sp>
+        <p:nvSpPr>
+          <p:cNvPr id="27" name="Text 25"/>
+          <p:cNvSpPr/>
+          <p:nvPr/>
+        </p:nvSpPr>
+        <p:spPr>
+          <a:xfrm>
+            <a:off x="5166360" y="2651760"/>
+            <a:ext cx="457200" cy="457200"/>
+          </a:xfrm>
+          <a:prstGeom prst="rect">
+            <a:avLst/>
+          </a:prstGeom>
+          <a:noFill/>
+          <a:ln/>
+        </p:spPr>
+        <p:txBody>
+          <a:bodyPr wrap="square" lIns="0" tIns="0" rIns="0" bIns="0" rtlCol="0" anchor="ctr"/>
+          <a:lstStyle/>
+          <a:p>
+            <a:pPr algn="ctr" indent="0" marL="0">
+              <a:buNone/>
+            </a:pPr>
+            <a:r>
+              <a:rPr lang="en-US" sz="1500" b="1" dirty="0">
+                <a:solidFill>
+                  <a:srgbClr val="E3C892"/>
+                </a:solidFill>
+                <a:latin typeface="Cambria" pitchFamily="34" charset="0"/>
+                <a:ea typeface="Cambria" pitchFamily="34" charset="-122"/>
+                <a:cs typeface="Cambria" pitchFamily="34" charset="-120"/>
+              </a:rPr>
+              <a:t>2</a:t>
+            </a:r>
+            <a:endParaRPr lang="en-US" sz="1500" dirty="0"/>
+          </a:p>
+        </p:txBody>
+      </p:sp>
+      <p:sp>
+        <p:nvSpPr>
+          <p:cNvPr id="28" name="Text 26"/>
+          <p:cNvSpPr/>
+          <p:nvPr/>
+        </p:nvSpPr>
+        <p:spPr>
+          <a:xfrm>
+            <a:off x="5788152" y="2651760"/>
+            <a:ext cx="5760720" cy="457200"/>
+          </a:xfrm>
+          <a:prstGeom prst="rect">
+            <a:avLst/>
+          </a:prstGeom>
+          <a:noFill/>
+          <a:ln/>
+        </p:spPr>
+        <p:txBody>
+          <a:bodyPr wrap="square" lIns="0" tIns="0" rIns="0" bIns="0" rtlCol="0" anchor="ctr"/>
+          <a:lstStyle/>
+          <a:p>
+            <a:pPr indent="0" marL="0">
+              <a:lnSpc>
+                <a:spcPct val="100000"/>
+              </a:lnSpc>
+              <a:buNone/>
+            </a:pPr>
+            <a:r>
+              <a:rPr lang="en-US" sz="1450" b="1" dirty="0">
+                <a:solidFill>
+                  <a:srgbClr val="F5F2EA"/>
+                </a:solidFill>
+                <a:latin typeface="Calibri" pitchFamily="34" charset="0"/>
+                <a:ea typeface="Calibri" pitchFamily="34" charset="-122"/>
+                <a:cs typeface="Calibri" pitchFamily="34" charset="-120"/>
+              </a:rPr>
+              <a:t>Qualify   </a:t>
+            </a:r>
+            <a:pPr indent="0" marL="0">
+              <a:lnSpc>
+                <a:spcPct val="100000"/>
+              </a:lnSpc>
+              <a:buNone/>
+            </a:pPr>
+            <a:r>
+              <a:rPr lang="en-US" sz="1200" dirty="0">
+                <a:solidFill>
+                  <a:srgbClr val="9AA2AD"/>
+                </a:solidFill>
+                <a:latin typeface="Calibri" pitchFamily="34" charset="0"/>
+                <a:ea typeface="Calibri" pitchFamily="34" charset="-122"/>
+                <a:cs typeface="Calibri" pitchFamily="34" charset="-120"/>
+              </a:rPr>
+              <a:t>Budget · BHK · timeline · location</a:t>
+            </a:r>
+            <a:endParaRPr lang="en-US" sz="1450" dirty="0"/>
+          </a:p>
+        </p:txBody>
+      </p:sp>
+      <p:sp>
+        <p:nvSpPr>
+          <p:cNvPr id="29" name="Shape 27"/>
+          <p:cNvSpPr/>
+          <p:nvPr/>
+        </p:nvSpPr>
+        <p:spPr>
+          <a:xfrm>
+            <a:off x="5166360" y="3273552"/>
+            <a:ext cx="457200" cy="457200"/>
+          </a:xfrm>
+          <a:prstGeom prst="ellipse">
+            <a:avLst/>
+          </a:prstGeom>
+          <a:solidFill>
+            <a:srgbClr val="141A22"/>
+          </a:solidFill>
+          <a:ln w="15875">
+            <a:solidFill>
+              <a:srgbClr val="C6A15B"/>
+            </a:solidFill>
+            <a:prstDash val="solid"/>
+          </a:ln>
+        </p:spPr>
+      </p:sp>
+      <p:sp>
+        <p:nvSpPr>
+          <p:cNvPr id="30" name="Text 28"/>
+          <p:cNvSpPr/>
+          <p:nvPr/>
+        </p:nvSpPr>
+        <p:spPr>
+          <a:xfrm>
+            <a:off x="5166360" y="3273552"/>
+            <a:ext cx="457200" cy="457200"/>
+          </a:xfrm>
+          <a:prstGeom prst="rect">
+            <a:avLst/>
+          </a:prstGeom>
+          <a:noFill/>
+          <a:ln/>
+        </p:spPr>
+        <p:txBody>
+          <a:bodyPr wrap="square" lIns="0" tIns="0" rIns="0" bIns="0" rtlCol="0" anchor="ctr"/>
+          <a:lstStyle/>
+          <a:p>
+            <a:pPr algn="ctr" indent="0" marL="0">
+              <a:buNone/>
+            </a:pPr>
+            <a:r>
+              <a:rPr lang="en-US" sz="1500" b="1" dirty="0">
+                <a:solidFill>
+                  <a:srgbClr val="E3C892"/>
+                </a:solidFill>
+                <a:latin typeface="Cambria" pitchFamily="34" charset="0"/>
+                <a:ea typeface="Cambria" pitchFamily="34" charset="-122"/>
+                <a:cs typeface="Cambria" pitchFamily="34" charset="-120"/>
+              </a:rPr>
+              <a:t>3</a:t>
+            </a:r>
+            <a:endParaRPr lang="en-US" sz="1500" dirty="0"/>
+          </a:p>
+        </p:txBody>
+      </p:sp>
+      <p:sp>
+        <p:nvSpPr>
+          <p:cNvPr id="31" name="Text 29"/>
+          <p:cNvSpPr/>
+          <p:nvPr/>
+        </p:nvSpPr>
+        <p:spPr>
+          <a:xfrm>
+            <a:off x="5788152" y="3273552"/>
+            <a:ext cx="5760720" cy="457200"/>
+          </a:xfrm>
+          <a:prstGeom prst="rect">
+            <a:avLst/>
+          </a:prstGeom>
+          <a:noFill/>
+          <a:ln/>
+        </p:spPr>
+        <p:txBody>
+          <a:bodyPr wrap="square" lIns="0" tIns="0" rIns="0" bIns="0" rtlCol="0" anchor="ctr"/>
+          <a:lstStyle/>
+          <a:p>
+            <a:pPr indent="0" marL="0">
+              <a:lnSpc>
+                <a:spcPct val="100000"/>
+              </a:lnSpc>
+              <a:buNone/>
+            </a:pPr>
+            <a:r>
+              <a:rPr lang="en-US" sz="1450" b="1" dirty="0">
+                <a:solidFill>
+                  <a:srgbClr val="F5F2EA"/>
+                </a:solidFill>
+                <a:latin typeface="Calibri" pitchFamily="34" charset="0"/>
+                <a:ea typeface="Calibri" pitchFamily="34" charset="-122"/>
+                <a:cs typeface="Calibri" pitchFamily="34" charset="-120"/>
+              </a:rPr>
+              <a:t>Verify   </a:t>
+            </a:r>
+            <a:pPr indent="0" marL="0">
+              <a:lnSpc>
+                <a:spcPct val="100000"/>
+              </a:lnSpc>
+              <a:buNone/>
+            </a:pPr>
+            <a:r>
+              <a:rPr lang="en-US" sz="1200" dirty="0">
+                <a:solidFill>
+                  <a:srgbClr val="9AA2AD"/>
+                </a:solidFill>
+                <a:latin typeface="Calibri" pitchFamily="34" charset="0"/>
+                <a:ea typeface="Calibri" pitchFamily="34" charset="-122"/>
+                <a:cs typeface="Calibri" pitchFamily="34" charset="-120"/>
+              </a:rPr>
+              <a:t>OTP or CAPTCHA confirms a real, reachable buyer</a:t>
+            </a:r>
+            <a:endParaRPr lang="en-US" sz="1450" dirty="0"/>
+          </a:p>
+        </p:txBody>
+      </p:sp>
+      <p:sp>
+        <p:nvSpPr>
+          <p:cNvPr id="32" name="Shape 30"/>
+          <p:cNvSpPr/>
+          <p:nvPr/>
+        </p:nvSpPr>
+        <p:spPr>
+          <a:xfrm>
+            <a:off x="5166360" y="3895344"/>
+            <a:ext cx="457200" cy="457200"/>
+          </a:xfrm>
+          <a:prstGeom prst="ellipse">
+            <a:avLst/>
+          </a:prstGeom>
+          <a:solidFill>
+            <a:srgbClr val="141A22"/>
+          </a:solidFill>
+          <a:ln w="15875">
+            <a:solidFill>
+              <a:srgbClr val="C6A15B"/>
+            </a:solidFill>
+            <a:prstDash val="solid"/>
+          </a:ln>
+        </p:spPr>
+      </p:sp>
+      <p:sp>
+        <p:nvSpPr>
+          <p:cNvPr id="33" name="Text 31"/>
+          <p:cNvSpPr/>
+          <p:nvPr/>
+        </p:nvSpPr>
+        <p:spPr>
+          <a:xfrm>
+            <a:off x="5166360" y="3895344"/>
+            <a:ext cx="457200" cy="457200"/>
+          </a:xfrm>
+          <a:prstGeom prst="rect">
+            <a:avLst/>
+          </a:prstGeom>
+          <a:noFill/>
+          <a:ln/>
+        </p:spPr>
+        <p:txBody>
+          <a:bodyPr wrap="square" lIns="0" tIns="0" rIns="0" bIns="0" rtlCol="0" anchor="ctr"/>
+          <a:lstStyle/>
+          <a:p>
+            <a:pPr algn="ctr" indent="0" marL="0">
+              <a:buNone/>
+            </a:pPr>
+            <a:r>
+              <a:rPr lang="en-US" sz="1500" b="1" dirty="0">
+                <a:solidFill>
+                  <a:srgbClr val="E3C892"/>
+                </a:solidFill>
+                <a:latin typeface="Cambria" pitchFamily="34" charset="0"/>
+                <a:ea typeface="Cambria" pitchFamily="34" charset="-122"/>
+                <a:cs typeface="Cambria" pitchFamily="34" charset="-120"/>
+              </a:rPr>
+              <a:t>4</a:t>
+            </a:r>
+            <a:endParaRPr lang="en-US" sz="1500" dirty="0"/>
+          </a:p>
+        </p:txBody>
+      </p:sp>
+      <p:sp>
+        <p:nvSpPr>
+          <p:cNvPr id="34" name="Text 32"/>
+          <p:cNvSpPr/>
+          <p:nvPr/>
+        </p:nvSpPr>
+        <p:spPr>
+          <a:xfrm>
+            <a:off x="5788152" y="3895344"/>
+            <a:ext cx="5760720" cy="457200"/>
+          </a:xfrm>
+          <a:prstGeom prst="rect">
+            <a:avLst/>
+          </a:prstGeom>
+          <a:noFill/>
+          <a:ln/>
+        </p:spPr>
+        <p:txBody>
+          <a:bodyPr wrap="square" lIns="0" tIns="0" rIns="0" bIns="0" rtlCol="0" anchor="ctr"/>
+          <a:lstStyle/>
+          <a:p>
+            <a:pPr indent="0" marL="0">
+              <a:lnSpc>
+                <a:spcPct val="100000"/>
+              </a:lnSpc>
+              <a:buNone/>
+            </a:pPr>
+            <a:r>
+              <a:rPr lang="en-US" sz="1450" b="1" dirty="0">
+                <a:solidFill>
+                  <a:srgbClr val="F5F2EA"/>
+                </a:solidFill>
+                <a:latin typeface="Calibri" pitchFamily="34" charset="0"/>
+                <a:ea typeface="Calibri" pitchFamily="34" charset="-122"/>
+                <a:cs typeface="Calibri" pitchFamily="34" charset="-120"/>
+              </a:rPr>
+              <a:t>Route   </a:t>
+            </a:r>
+            <a:pPr indent="0" marL="0">
+              <a:lnSpc>
+                <a:spcPct val="100000"/>
+              </a:lnSpc>
+              <a:buNone/>
+            </a:pPr>
+            <a:r>
+              <a:rPr lang="en-US" sz="1200" dirty="0">
+                <a:solidFill>
+                  <a:srgbClr val="9AA2AD"/>
+                </a:solidFill>
+                <a:latin typeface="Calibri" pitchFamily="34" charset="0"/>
+                <a:ea typeface="Calibri" pitchFamily="34" charset="-122"/>
+                <a:cs typeface="Calibri" pitchFamily="34" charset="-120"/>
+              </a:rPr>
+              <a:t>Verified lead → CRM · WhatsApp · sales</a:t>
+            </a:r>
+            <a:endParaRPr lang="en-US" sz="1450" dirty="0"/>
+          </a:p>
+        </p:txBody>
+      </p:sp>
+      <p:sp>
+        <p:nvSpPr>
+          <p:cNvPr id="35" name="Shape 33"/>
+          <p:cNvSpPr/>
+          <p:nvPr/>
+        </p:nvSpPr>
+        <p:spPr>
+          <a:xfrm>
+            <a:off x="5166360" y="4590288"/>
+            <a:ext cx="6382512" cy="621792"/>
+          </a:xfrm>
+          <a:prstGeom prst="roundRect">
+            <a:avLst>
+              <a:gd name="adj" fmla="val 11765"/>
+            </a:avLst>
+          </a:prstGeom>
+          <a:solidFill>
+            <a:srgbClr val="262E3A"/>
+          </a:solidFill>
+          <a:ln w="12700">
+            <a:solidFill>
+              <a:srgbClr val="C6A15B"/>
+            </a:solidFill>
+            <a:prstDash val="solid"/>
+          </a:ln>
+        </p:spPr>
+      </p:sp>
+      <p:sp>
+        <p:nvSpPr>
+          <p:cNvPr id="36" name="Text 34"/>
+          <p:cNvSpPr/>
+          <p:nvPr/>
+        </p:nvSpPr>
+        <p:spPr>
+          <a:xfrm>
+            <a:off x="5440680" y="4590288"/>
+            <a:ext cx="5833872" cy="621792"/>
+          </a:xfrm>
+          <a:prstGeom prst="rect">
+            <a:avLst/>
+          </a:prstGeom>
+          <a:noFill/>
+          <a:ln/>
+        </p:spPr>
+        <p:txBody>
+          <a:bodyPr wrap="square" lIns="0" tIns="0" rIns="0" bIns="0" rtlCol="0" anchor="ctr"/>
+          <a:lstStyle/>
+          <a:p>
+            <a:pPr indent="0" marL="0">
+              <a:buNone/>
+            </a:pPr>
+            <a:r>
+              <a:rPr lang="en-US" sz="1250" b="1" dirty="0">
+                <a:solidFill>
+                  <a:srgbClr val="E3C892"/>
+                </a:solidFill>
+                <a:latin typeface="Calibri" pitchFamily="34" charset="0"/>
+                <a:ea typeface="Calibri" pitchFamily="34" charset="-122"/>
+                <a:cs typeface="Calibri" pitchFamily="34" charset="-120"/>
+              </a:rPr>
+              <a:t>Result:  </a:t>
+            </a:r>
+            <a:pPr indent="0" marL="0">
+              <a:buNone/>
+            </a:pPr>
+            <a:r>
+              <a:rPr lang="en-US" sz="1250" dirty="0">
+                <a:solidFill>
+                  <a:srgbClr val="F5F2EA"/>
+                </a:solidFill>
+                <a:latin typeface="Calibri" pitchFamily="34" charset="0"/>
+                <a:ea typeface="Calibri" pitchFamily="34" charset="-122"/>
+                <a:cs typeface="Calibri" pitchFamily="34" charset="-120"/>
+              </a:rPr>
+              <a:t>only real, verified buyers — spam &amp; fake numbers filtered out.</a:t>
+            </a:r>
+            <a:endParaRPr lang="en-US" sz="1250" dirty="0"/>
+          </a:p>
+        </p:txBody>
+      </p:sp>
+      <p:sp>
+        <p:nvSpPr>
+          <p:cNvPr id="37" name="Text 35"/>
+          <p:cNvSpPr/>
+          <p:nvPr/>
+        </p:nvSpPr>
+        <p:spPr>
+          <a:xfrm>
+            <a:off x="640080" y="5486400"/>
+            <a:ext cx="10058400" cy="256032"/>
+          </a:xfrm>
+          <a:prstGeom prst="rect">
+            <a:avLst/>
+          </a:prstGeom>
+          <a:noFill/>
+          <a:ln/>
+        </p:spPr>
+        <p:txBody>
+          <a:bodyPr wrap="square" lIns="0" tIns="0" rIns="0" bIns="0" rtlCol="0" anchor="ctr"/>
+          <a:lstStyle/>
+          <a:p>
+            <a:pPr indent="0" marL="0">
+              <a:buNone/>
+            </a:pPr>
+            <a:r>
+              <a:rPr lang="en-US" sz="1000" b="1" spc="150" kern="0" dirty="0">
+                <a:solidFill>
+                  <a:srgbClr val="C6A15B"/>
+                </a:solidFill>
+                <a:latin typeface="Calibri" pitchFamily="34" charset="0"/>
+                <a:ea typeface="Calibri" pitchFamily="34" charset="-122"/>
+                <a:cs typeface="Calibri" pitchFamily="34" charset="-120"/>
+              </a:rPr>
+              <a:t>PLATFORMS TO EVALUATE  (live chat agents visible on each site)</a:t>
+            </a:r>
+            <a:endParaRPr lang="en-US" sz="1000" dirty="0"/>
+          </a:p>
+        </p:txBody>
+      </p:sp>
+      <p:sp>
+        <p:nvSpPr>
+          <p:cNvPr id="38" name="Shape 36"/>
+          <p:cNvSpPr/>
+          <p:nvPr/>
+        </p:nvSpPr>
+        <p:spPr>
+          <a:xfrm>
+            <a:off x="640080" y="5779008"/>
+            <a:ext cx="2020824" cy="457200"/>
+          </a:xfrm>
+          <a:prstGeom prst="roundRect">
+            <a:avLst>
+              <a:gd name="adj" fmla="val 20000"/>
+            </a:avLst>
+          </a:prstGeom>
+          <a:solidFill>
+            <a:srgbClr val="1E2530"/>
+          </a:solidFill>
+          <a:ln w="9525">
+            <a:solidFill>
+              <a:srgbClr val="C6A15B"/>
+            </a:solidFill>
+            <a:prstDash val="solid"/>
+          </a:ln>
+        </p:spPr>
+      </p:sp>
+      <p:sp>
+        <p:nvSpPr>
+          <p:cNvPr id="39" name="Text 37">
+            <a:hlinkClick r:id="rId1" tooltip=""/>
+          </p:cNvPr>
+          <p:cNvSpPr/>
+          <p:nvPr/>
+        </p:nvSpPr>
+        <p:spPr>
+          <a:xfrm>
+            <a:off x="640080" y="5797296"/>
+            <a:ext cx="2020824" cy="237744"/>
+          </a:xfrm>
+          <a:prstGeom prst="rect">
+            <a:avLst/>
+          </a:prstGeom>
+          <a:noFill/>
+          <a:ln/>
+        </p:spPr>
+        <p:txBody>
+          <a:bodyPr wrap="square" lIns="0" tIns="0" rIns="0" bIns="0" rtlCol="0" anchor="ctr"/>
+          <a:lstStyle/>
+          <a:p>
+            <a:pPr algn="ctr" indent="0" marL="0">
+              <a:buNone/>
+            </a:pPr>
+            <a:r>
+              <a:rPr lang="en-US" sz="1100" b="1" u="sng" dirty="0">
+                <a:solidFill>
+                  <a:srgbClr val="F5F2EA"/>
+                </a:solidFill>
+                <a:latin typeface="Calibri" pitchFamily="34" charset="0"/>
+                <a:ea typeface="Calibri" pitchFamily="34" charset="-122"/>
+                <a:cs typeface="Calibri" pitchFamily="34" charset="-120"/>
+                <a:hlinkClick r:id="rId1" invalidUrl="" action="" tgtFrame="" tooltip="" history="1" highlightClick="0" endSnd="0">
+                  <a:extLst>
+                    <a:ext uri="{A12FA001-AC4F-418D-AE19-62706E023703}">
+                      <ahyp:hlinkClr xmlns:ahyp="http://schemas.microsoft.com/office/drawing/2018/hyperlinkcolor" val="tx"/>
+                    </a:ext>
+                  </a:extLst>
+                </a:hlinkClick>
+              </a:rPr>
+              <a:t>Landbot</a:t>
+            </a:r>
+            <a:endParaRPr lang="en-US" sz="1100" dirty="0"/>
+          </a:p>
+        </p:txBody>
+      </p:sp>
+      <p:sp>
+        <p:nvSpPr>
+          <p:cNvPr id="40" name="Text 38">
+            <a:hlinkClick r:id="rId2" tooltip=""/>
+          </p:cNvPr>
+          <p:cNvSpPr/>
+          <p:nvPr/>
+        </p:nvSpPr>
+        <p:spPr>
+          <a:xfrm>
+            <a:off x="640080" y="6016752"/>
+            <a:ext cx="2020824" cy="182880"/>
+          </a:xfrm>
+          <a:prstGeom prst="rect">
+            <a:avLst/>
+          </a:prstGeom>
+          <a:noFill/>
+          <a:ln/>
+        </p:spPr>
+        <p:txBody>
+          <a:bodyPr wrap="square" lIns="0" tIns="0" rIns="0" bIns="0" rtlCol="0" anchor="ctr"/>
+          <a:lstStyle/>
+          <a:p>
+            <a:pPr algn="ctr" indent="0" marL="0">
+              <a:buNone/>
+            </a:pPr>
+            <a:r>
+              <a:rPr lang="en-US" sz="850" u="sng" dirty="0">
+                <a:solidFill>
+                  <a:srgbClr val="E3C892"/>
+                </a:solidFill>
+                <a:latin typeface="Calibri" pitchFamily="34" charset="0"/>
+                <a:ea typeface="Calibri" pitchFamily="34" charset="-122"/>
+                <a:cs typeface="Calibri" pitchFamily="34" charset="-120"/>
+                <a:hlinkClick r:id="rId2" invalidUrl="" action="" tgtFrame="" tooltip="" history="1" highlightClick="0" endSnd="0">
+                  <a:extLst>
+                    <a:ext uri="{A12FA001-AC4F-418D-AE19-62706E023703}">
+                      <ahyp:hlinkClr xmlns:ahyp="http://schemas.microsoft.com/office/drawing/2018/hyperlinkcolor" val="tx"/>
+                    </a:ext>
+                  </a:extLst>
+                </a:hlinkClick>
+              </a:rPr>
+              <a:t>landbot.io</a:t>
+            </a:r>
+            <a:endParaRPr lang="en-US" sz="850" dirty="0"/>
+          </a:p>
+        </p:txBody>
+      </p:sp>
+      <p:sp>
+        <p:nvSpPr>
+          <p:cNvPr id="41" name="Shape 39"/>
+          <p:cNvSpPr/>
+          <p:nvPr/>
+        </p:nvSpPr>
+        <p:spPr>
+          <a:xfrm>
+            <a:off x="2862072" y="5779008"/>
+            <a:ext cx="2020824" cy="457200"/>
+          </a:xfrm>
+          <a:prstGeom prst="roundRect">
+            <a:avLst>
+              <a:gd name="adj" fmla="val 20000"/>
+            </a:avLst>
+          </a:prstGeom>
+          <a:solidFill>
+            <a:srgbClr val="1E2530"/>
+          </a:solidFill>
+          <a:ln w="9525">
+            <a:solidFill>
+              <a:srgbClr val="C6A15B"/>
+            </a:solidFill>
+            <a:prstDash val="solid"/>
+          </a:ln>
+        </p:spPr>
+      </p:sp>
+      <p:sp>
+        <p:nvSpPr>
+          <p:cNvPr id="42" name="Text 40">
+            <a:hlinkClick r:id="rId3" tooltip=""/>
+          </p:cNvPr>
+          <p:cNvSpPr/>
+          <p:nvPr/>
+        </p:nvSpPr>
+        <p:spPr>
+          <a:xfrm>
+            <a:off x="2862072" y="5797296"/>
+            <a:ext cx="2020824" cy="237744"/>
+          </a:xfrm>
+          <a:prstGeom prst="rect">
+            <a:avLst/>
+          </a:prstGeom>
+          <a:noFill/>
+          <a:ln/>
+        </p:spPr>
+        <p:txBody>
+          <a:bodyPr wrap="square" lIns="0" tIns="0" rIns="0" bIns="0" rtlCol="0" anchor="ctr"/>
+          <a:lstStyle/>
+          <a:p>
+            <a:pPr algn="ctr" indent="0" marL="0">
+              <a:buNone/>
+            </a:pPr>
+            <a:r>
+              <a:rPr lang="en-US" sz="1100" b="1" u="sng" dirty="0">
+                <a:solidFill>
+                  <a:srgbClr val="F5F2EA"/>
+                </a:solidFill>
+                <a:latin typeface="Calibri" pitchFamily="34" charset="0"/>
+                <a:ea typeface="Calibri" pitchFamily="34" charset="-122"/>
+                <a:cs typeface="Calibri" pitchFamily="34" charset="-120"/>
+                <a:hlinkClick r:id="rId3" invalidUrl="" action="" tgtFrame="" tooltip="" history="1" highlightClick="0" endSnd="0">
+                  <a:extLst>
+                    <a:ext uri="{A12FA001-AC4F-418D-AE19-62706E023703}">
+                      <ahyp:hlinkClr xmlns:ahyp="http://schemas.microsoft.com/office/drawing/2018/hyperlinkcolor" val="tx"/>
+                    </a:ext>
+                  </a:extLst>
+                </a:hlinkClick>
+              </a:rPr>
+              <a:t>Tidio</a:t>
+            </a:r>
+            <a:endParaRPr lang="en-US" sz="1100" dirty="0"/>
+          </a:p>
+        </p:txBody>
+      </p:sp>
+      <p:sp>
+        <p:nvSpPr>
+          <p:cNvPr id="43" name="Text 41">
+            <a:hlinkClick r:id="rId4" tooltip=""/>
+          </p:cNvPr>
+          <p:cNvSpPr/>
+          <p:nvPr/>
+        </p:nvSpPr>
+        <p:spPr>
+          <a:xfrm>
+            <a:off x="2862072" y="6016752"/>
+            <a:ext cx="2020824" cy="182880"/>
+          </a:xfrm>
+          <a:prstGeom prst="rect">
+            <a:avLst/>
+          </a:prstGeom>
+          <a:noFill/>
+          <a:ln/>
+        </p:spPr>
+        <p:txBody>
+          <a:bodyPr wrap="square" lIns="0" tIns="0" rIns="0" bIns="0" rtlCol="0" anchor="ctr"/>
+          <a:lstStyle/>
+          <a:p>
+            <a:pPr algn="ctr" indent="0" marL="0">
+              <a:buNone/>
+            </a:pPr>
+            <a:r>
+              <a:rPr lang="en-US" sz="850" u="sng" dirty="0">
+                <a:solidFill>
+                  <a:srgbClr val="E3C892"/>
+                </a:solidFill>
+                <a:latin typeface="Calibri" pitchFamily="34" charset="0"/>
+                <a:ea typeface="Calibri" pitchFamily="34" charset="-122"/>
+                <a:cs typeface="Calibri" pitchFamily="34" charset="-120"/>
+                <a:hlinkClick r:id="rId4" invalidUrl="" action="" tgtFrame="" tooltip="" history="1" highlightClick="0" endSnd="0">
+                  <a:extLst>
+                    <a:ext uri="{A12FA001-AC4F-418D-AE19-62706E023703}">
+                      <ahyp:hlinkClr xmlns:ahyp="http://schemas.microsoft.com/office/drawing/2018/hyperlinkcolor" val="tx"/>
+                    </a:ext>
+                  </a:extLst>
+                </a:hlinkClick>
+              </a:rPr>
+              <a:t>tidio.com</a:t>
+            </a:r>
+            <a:endParaRPr lang="en-US" sz="850" dirty="0"/>
+          </a:p>
+        </p:txBody>
+      </p:sp>
+      <p:sp>
+        <p:nvSpPr>
+          <p:cNvPr id="44" name="Shape 42"/>
+          <p:cNvSpPr/>
+          <p:nvPr/>
+        </p:nvSpPr>
+        <p:spPr>
+          <a:xfrm>
+            <a:off x="5084064" y="5779008"/>
+            <a:ext cx="2020824" cy="457200"/>
+          </a:xfrm>
+          <a:prstGeom prst="roundRect">
+            <a:avLst>
+              <a:gd name="adj" fmla="val 20000"/>
+            </a:avLst>
+          </a:prstGeom>
+          <a:solidFill>
+            <a:srgbClr val="1E2530"/>
+          </a:solidFill>
+          <a:ln w="9525">
+            <a:solidFill>
+              <a:srgbClr val="C6A15B"/>
+            </a:solidFill>
+            <a:prstDash val="solid"/>
+          </a:ln>
+        </p:spPr>
+      </p:sp>
+      <p:sp>
+        <p:nvSpPr>
+          <p:cNvPr id="45" name="Text 43">
+            <a:hlinkClick r:id="rId5" tooltip=""/>
+          </p:cNvPr>
+          <p:cNvSpPr/>
+          <p:nvPr/>
+        </p:nvSpPr>
+        <p:spPr>
+          <a:xfrm>
+            <a:off x="5084064" y="5797296"/>
+            <a:ext cx="2020824" cy="237744"/>
+          </a:xfrm>
+          <a:prstGeom prst="rect">
+            <a:avLst/>
+          </a:prstGeom>
+          <a:noFill/>
+          <a:ln/>
+        </p:spPr>
+        <p:txBody>
+          <a:bodyPr wrap="square" lIns="0" tIns="0" rIns="0" bIns="0" rtlCol="0" anchor="ctr"/>
+          <a:lstStyle/>
+          <a:p>
+            <a:pPr algn="ctr" indent="0" marL="0">
+              <a:buNone/>
+            </a:pPr>
+            <a:r>
+              <a:rPr lang="en-US" sz="1100" b="1" u="sng" dirty="0">
+                <a:solidFill>
+                  <a:srgbClr val="F5F2EA"/>
+                </a:solidFill>
+                <a:latin typeface="Calibri" pitchFamily="34" charset="0"/>
+                <a:ea typeface="Calibri" pitchFamily="34" charset="-122"/>
+                <a:cs typeface="Calibri" pitchFamily="34" charset="-120"/>
+                <a:hlinkClick r:id="rId5" invalidUrl="" action="" tgtFrame="" tooltip="" history="1" highlightClick="0" endSnd="0">
+                  <a:extLst>
+                    <a:ext uri="{A12FA001-AC4F-418D-AE19-62706E023703}">
+                      <ahyp:hlinkClr xmlns:ahyp="http://schemas.microsoft.com/office/drawing/2018/hyperlinkcolor" val="tx"/>
+                    </a:ext>
+                  </a:extLst>
+                </a:hlinkClick>
+              </a:rPr>
+              <a:t>Intercom</a:t>
+            </a:r>
+            <a:endParaRPr lang="en-US" sz="1100" dirty="0"/>
+          </a:p>
+        </p:txBody>
+      </p:sp>
+      <p:sp>
+        <p:nvSpPr>
+          <p:cNvPr id="46" name="Text 44">
+            <a:hlinkClick r:id="rId6" tooltip=""/>
+          </p:cNvPr>
+          <p:cNvSpPr/>
+          <p:nvPr/>
+        </p:nvSpPr>
+        <p:spPr>
+          <a:xfrm>
+            <a:off x="5084064" y="6016752"/>
+            <a:ext cx="2020824" cy="182880"/>
+          </a:xfrm>
+          <a:prstGeom prst="rect">
+            <a:avLst/>
+          </a:prstGeom>
+          <a:noFill/>
+          <a:ln/>
+        </p:spPr>
+        <p:txBody>
+          <a:bodyPr wrap="square" lIns="0" tIns="0" rIns="0" bIns="0" rtlCol="0" anchor="ctr"/>
+          <a:lstStyle/>
+          <a:p>
+            <a:pPr algn="ctr" indent="0" marL="0">
+              <a:buNone/>
+            </a:pPr>
+            <a:r>
+              <a:rPr lang="en-US" sz="850" u="sng" dirty="0">
+                <a:solidFill>
+                  <a:srgbClr val="E3C892"/>
+                </a:solidFill>
+                <a:latin typeface="Calibri" pitchFamily="34" charset="0"/>
+                <a:ea typeface="Calibri" pitchFamily="34" charset="-122"/>
+                <a:cs typeface="Calibri" pitchFamily="34" charset="-120"/>
+                <a:hlinkClick r:id="rId6" invalidUrl="" action="" tgtFrame="" tooltip="" history="1" highlightClick="0" endSnd="0">
+                  <a:extLst>
+                    <a:ext uri="{A12FA001-AC4F-418D-AE19-62706E023703}">
+                      <ahyp:hlinkClr xmlns:ahyp="http://schemas.microsoft.com/office/drawing/2018/hyperlinkcolor" val="tx"/>
+                    </a:ext>
+                  </a:extLst>
+                </a:hlinkClick>
+              </a:rPr>
+              <a:t>intercom.com</a:t>
+            </a:r>
+            <a:endParaRPr lang="en-US" sz="850" dirty="0"/>
+          </a:p>
+        </p:txBody>
+      </p:sp>
+      <p:sp>
+        <p:nvSpPr>
+          <p:cNvPr id="47" name="Shape 45"/>
+          <p:cNvSpPr/>
+          <p:nvPr/>
+        </p:nvSpPr>
+        <p:spPr>
+          <a:xfrm>
+            <a:off x="7306056" y="5779008"/>
+            <a:ext cx="2020824" cy="457200"/>
+          </a:xfrm>
+          <a:prstGeom prst="roundRect">
+            <a:avLst>
+              <a:gd name="adj" fmla="val 20000"/>
+            </a:avLst>
+          </a:prstGeom>
+          <a:solidFill>
+            <a:srgbClr val="1E2530"/>
+          </a:solidFill>
+          <a:ln w="9525">
+            <a:solidFill>
+              <a:srgbClr val="C6A15B"/>
+            </a:solidFill>
+            <a:prstDash val="solid"/>
+          </a:ln>
+        </p:spPr>
+      </p:sp>
+      <p:sp>
+        <p:nvSpPr>
+          <p:cNvPr id="48" name="Text 46">
+            <a:hlinkClick r:id="rId7" tooltip=""/>
+          </p:cNvPr>
+          <p:cNvSpPr/>
+          <p:nvPr/>
+        </p:nvSpPr>
+        <p:spPr>
+          <a:xfrm>
+            <a:off x="7306056" y="5797296"/>
+            <a:ext cx="2020824" cy="237744"/>
+          </a:xfrm>
+          <a:prstGeom prst="rect">
+            <a:avLst/>
+          </a:prstGeom>
+          <a:noFill/>
+          <a:ln/>
+        </p:spPr>
+        <p:txBody>
+          <a:bodyPr wrap="square" lIns="0" tIns="0" rIns="0" bIns="0" rtlCol="0" anchor="ctr"/>
+          <a:lstStyle/>
+          <a:p>
+            <a:pPr algn="ctr" indent="0" marL="0">
+              <a:buNone/>
+            </a:pPr>
+            <a:r>
+              <a:rPr lang="en-US" sz="1100" b="1" u="sng" dirty="0">
+                <a:solidFill>
+                  <a:srgbClr val="F5F2EA"/>
+                </a:solidFill>
+                <a:latin typeface="Calibri" pitchFamily="34" charset="0"/>
+                <a:ea typeface="Calibri" pitchFamily="34" charset="-122"/>
+                <a:cs typeface="Calibri" pitchFamily="34" charset="-120"/>
+                <a:hlinkClick r:id="rId7" invalidUrl="" action="" tgtFrame="" tooltip="" history="1" highlightClick="0" endSnd="0">
+                  <a:extLst>
+                    <a:ext uri="{A12FA001-AC4F-418D-AE19-62706E023703}">
+                      <ahyp:hlinkClr xmlns:ahyp="http://schemas.microsoft.com/office/drawing/2018/hyperlinkcolor" val="tx"/>
+                    </a:ext>
+                  </a:extLst>
+                </a:hlinkClick>
+              </a:rPr>
+              <a:t>Verloop.io</a:t>
+            </a:r>
+            <a:endParaRPr lang="en-US" sz="1100" dirty="0"/>
+          </a:p>
+        </p:txBody>
+      </p:sp>
+      <p:sp>
+        <p:nvSpPr>
+          <p:cNvPr id="49" name="Text 47">
+            <a:hlinkClick r:id="rId8" tooltip=""/>
+          </p:cNvPr>
+          <p:cNvSpPr/>
+          <p:nvPr/>
+        </p:nvSpPr>
+        <p:spPr>
+          <a:xfrm>
+            <a:off x="7306056" y="6016752"/>
+            <a:ext cx="2020824" cy="182880"/>
+          </a:xfrm>
+          <a:prstGeom prst="rect">
+            <a:avLst/>
+          </a:prstGeom>
+          <a:noFill/>
+          <a:ln/>
+        </p:spPr>
+        <p:txBody>
+          <a:bodyPr wrap="square" lIns="0" tIns="0" rIns="0" bIns="0" rtlCol="0" anchor="ctr"/>
+          <a:lstStyle/>
+          <a:p>
+            <a:pPr algn="ctr" indent="0" marL="0">
+              <a:buNone/>
+            </a:pPr>
+            <a:r>
+              <a:rPr lang="en-US" sz="850" u="sng" dirty="0">
+                <a:solidFill>
+                  <a:srgbClr val="E3C892"/>
+                </a:solidFill>
+                <a:latin typeface="Calibri" pitchFamily="34" charset="0"/>
+                <a:ea typeface="Calibri" pitchFamily="34" charset="-122"/>
+                <a:cs typeface="Calibri" pitchFamily="34" charset="-120"/>
+                <a:hlinkClick r:id="rId8" invalidUrl="" action="" tgtFrame="" tooltip="" history="1" highlightClick="0" endSnd="0">
+                  <a:extLst>
+                    <a:ext uri="{A12FA001-AC4F-418D-AE19-62706E023703}">
+                      <ahyp:hlinkClr xmlns:ahyp="http://schemas.microsoft.com/office/drawing/2018/hyperlinkcolor" val="tx"/>
+                    </a:ext>
+                  </a:extLst>
+                </a:hlinkClick>
+              </a:rPr>
+              <a:t>verloop.io</a:t>
+            </a:r>
+            <a:endParaRPr lang="en-US" sz="850" dirty="0"/>
+          </a:p>
+        </p:txBody>
+      </p:sp>
+      <p:sp>
+        <p:nvSpPr>
+          <p:cNvPr id="50" name="Shape 48"/>
+          <p:cNvSpPr/>
+          <p:nvPr/>
+        </p:nvSpPr>
+        <p:spPr>
+          <a:xfrm>
+            <a:off x="9528048" y="5779008"/>
+            <a:ext cx="2020824" cy="457200"/>
+          </a:xfrm>
+          <a:prstGeom prst="roundRect">
+            <a:avLst>
+              <a:gd name="adj" fmla="val 20000"/>
+            </a:avLst>
+          </a:prstGeom>
+          <a:solidFill>
+            <a:srgbClr val="1E2530"/>
+          </a:solidFill>
+          <a:ln w="9525">
+            <a:solidFill>
+              <a:srgbClr val="C6A15B"/>
+            </a:solidFill>
+            <a:prstDash val="solid"/>
+          </a:ln>
+        </p:spPr>
+      </p:sp>
+      <p:sp>
+        <p:nvSpPr>
+          <p:cNvPr id="51" name="Text 49">
+            <a:hlinkClick r:id="rId9" tooltip=""/>
+          </p:cNvPr>
+          <p:cNvSpPr/>
+          <p:nvPr/>
+        </p:nvSpPr>
+        <p:spPr>
+          <a:xfrm>
+            <a:off x="9528048" y="5797296"/>
+            <a:ext cx="2020824" cy="237744"/>
+          </a:xfrm>
+          <a:prstGeom prst="rect">
+            <a:avLst/>
+          </a:prstGeom>
+          <a:noFill/>
+          <a:ln/>
+        </p:spPr>
+        <p:txBody>
+          <a:bodyPr wrap="square" lIns="0" tIns="0" rIns="0" bIns="0" rtlCol="0" anchor="ctr"/>
+          <a:lstStyle/>
+          <a:p>
+            <a:pPr algn="ctr" indent="0" marL="0">
+              <a:buNone/>
+            </a:pPr>
+            <a:r>
+              <a:rPr lang="en-US" sz="1100" b="1" u="sng" dirty="0">
+                <a:solidFill>
+                  <a:srgbClr val="F5F2EA"/>
+                </a:solidFill>
+                <a:latin typeface="Calibri" pitchFamily="34" charset="0"/>
+                <a:ea typeface="Calibri" pitchFamily="34" charset="-122"/>
+                <a:cs typeface="Calibri" pitchFamily="34" charset="-120"/>
+                <a:hlinkClick r:id="rId9" invalidUrl="" action="" tgtFrame="" tooltip="" history="1" highlightClick="0" endSnd="0">
+                  <a:extLst>
+                    <a:ext uri="{A12FA001-AC4F-418D-AE19-62706E023703}">
+                      <ahyp:hlinkClr xmlns:ahyp="http://schemas.microsoft.com/office/drawing/2018/hyperlinkcolor" val="tx"/>
+                    </a:ext>
+                  </a:extLst>
+                </a:hlinkClick>
+              </a:rPr>
+              <a:t>MSG91 · OTP</a:t>
+            </a:r>
+            <a:endParaRPr lang="en-US" sz="1100" dirty="0"/>
+          </a:p>
+        </p:txBody>
+      </p:sp>
+      <p:sp>
+        <p:nvSpPr>
+          <p:cNvPr id="52" name="Text 50">
+            <a:hlinkClick r:id="rId10" tooltip=""/>
+          </p:cNvPr>
+          <p:cNvSpPr/>
+          <p:nvPr/>
+        </p:nvSpPr>
+        <p:spPr>
+          <a:xfrm>
+            <a:off x="9528048" y="6016752"/>
+            <a:ext cx="2020824" cy="182880"/>
+          </a:xfrm>
+          <a:prstGeom prst="rect">
+            <a:avLst/>
+          </a:prstGeom>
+          <a:noFill/>
+          <a:ln/>
+        </p:spPr>
+        <p:txBody>
+          <a:bodyPr wrap="square" lIns="0" tIns="0" rIns="0" bIns="0" rtlCol="0" anchor="ctr"/>
+          <a:lstStyle/>
+          <a:p>
+            <a:pPr algn="ctr" indent="0" marL="0">
+              <a:buNone/>
+            </a:pPr>
+            <a:r>
+              <a:rPr lang="en-US" sz="850" u="sng" dirty="0">
+                <a:solidFill>
+                  <a:srgbClr val="E3C892"/>
+                </a:solidFill>
+                <a:latin typeface="Calibri" pitchFamily="34" charset="0"/>
+                <a:ea typeface="Calibri" pitchFamily="34" charset="-122"/>
+                <a:cs typeface="Calibri" pitchFamily="34" charset="-120"/>
+                <a:hlinkClick r:id="rId10" invalidUrl="" action="" tgtFrame="" tooltip="" history="1" highlightClick="0" endSnd="0">
+                  <a:extLst>
+                    <a:ext uri="{A12FA001-AC4F-418D-AE19-62706E023703}">
+                      <ahyp:hlinkClr xmlns:ahyp="http://schemas.microsoft.com/office/drawing/2018/hyperlinkcolor" val="tx"/>
+                    </a:ext>
+                  </a:extLst>
+                </a:hlinkClick>
+              </a:rPr>
+              <a:t>msg91.com</a:t>
+            </a:r>
+            <a:endParaRPr lang="en-US" sz="850" dirty="0"/>
+          </a:p>
+        </p:txBody>
+      </p:sp>
+      <p:sp>
+        <p:nvSpPr>
+          <p:cNvPr id="53" name="Text 51"/>
+          <p:cNvSpPr/>
+          <p:nvPr/>
+        </p:nvSpPr>
+        <p:spPr>
+          <a:xfrm>
+            <a:off x="10908792" y="6400800"/>
+            <a:ext cx="640080" cy="274320"/>
+          </a:xfrm>
+          <a:prstGeom prst="rect">
+            <a:avLst/>
+          </a:prstGeom>
+          <a:noFill/>
+          <a:ln/>
+        </p:spPr>
+        <p:txBody>
+          <a:bodyPr wrap="square" lIns="0" tIns="0" rIns="0" bIns="0" rtlCol="0" anchor="ctr"/>
+          <a:lstStyle/>
+          <a:p>
+            <a:pPr algn="r" indent="0" marL="0">
+              <a:buNone/>
+            </a:pPr>
+            <a:r>
+              <a:rPr lang="en-US" sz="950" dirty="0">
+                <a:solidFill>
+                  <a:srgbClr val="9AA2AD"/>
+                </a:solidFill>
+                <a:latin typeface="Calibri" pitchFamily="34" charset="0"/>
+                <a:ea typeface="Calibri" pitchFamily="34" charset="-122"/>
+                <a:cs typeface="Calibri" pitchFamily="34" charset="-120"/>
+              </a:rPr>
+              <a:t>03</a:t>
+            </a:r>
+            <a:endParaRPr lang="en-US" sz="950" dirty="0"/>
+          </a:p>
+        </p:txBody>
+      </p:sp>
+      <p:sp>
+        <p:nvSpPr>
+          <p:cNvPr id="54" name="Text 52"/>
+          <p:cNvSpPr/>
+          <p:nvPr/>
+        </p:nvSpPr>
+        <p:spPr>
+          <a:xfrm>
+            <a:off x="640080" y="6400800"/>
+            <a:ext cx="6400800" cy="274320"/>
+          </a:xfrm>
+          <a:prstGeom prst="rect">
+            <a:avLst/>
+          </a:prstGeom>
+          <a:noFill/>
+          <a:ln/>
+        </p:spPr>
+        <p:txBody>
+          <a:bodyPr wrap="square" lIns="0" tIns="0" rIns="0" bIns="0" rtlCol="0" anchor="ctr"/>
+          <a:lstStyle/>
+          <a:p>
+            <a:pPr indent="0" marL="0">
+              <a:buNone/>
+            </a:pPr>
+            <a:r>
+              <a:rPr lang="en-US" sz="900" dirty="0">
+                <a:solidFill>
+                  <a:srgbClr val="9AA2AD"/>
+                </a:solidFill>
+                <a:latin typeface="Calibri" pitchFamily="34" charset="0"/>
+                <a:ea typeface="Calibri" pitchFamily="34" charset="-122"/>
+                <a:cs typeface="Calibri" pitchFamily="34" charset="-120"/>
+              </a:rPr>
+              <a:t>Fab Luxe · Digital Marketing &amp; Lead Generation</a:t>
+            </a:r>
+            <a:endParaRPr lang="en-US" sz="900" dirty="0"/>
+          </a:p>
+        </p:txBody>
+      </p:sp>
+      <p:sp>
+        <p:nvSpPr>
+          <p:cNvPr id="55" name="Shape 53"/>
+          <p:cNvSpPr/>
+          <p:nvPr/>
+        </p:nvSpPr>
+        <p:spPr>
+          <a:xfrm>
+            <a:off x="11091672" y="310896"/>
+            <a:ext cx="457200" cy="457200"/>
+          </a:xfrm>
+          <a:prstGeom prst="ellipse">
+            <a:avLst/>
+          </a:prstGeom>
+          <a:solidFill>
+            <a:srgbClr val="1E2530"/>
+          </a:solidFill>
+          <a:ln w="15875">
+            <a:solidFill>
+              <a:srgbClr val="C6A15B"/>
+            </a:solidFill>
+            <a:prstDash val="solid"/>
+          </a:ln>
+        </p:spPr>
+      </p:sp>
+      <p:sp>
+        <p:nvSpPr>
+          <p:cNvPr id="56" name="Text 54"/>
+          <p:cNvSpPr/>
+          <p:nvPr/>
+        </p:nvSpPr>
+        <p:spPr>
+          <a:xfrm>
+            <a:off x="11091672" y="310896"/>
+            <a:ext cx="457200" cy="457200"/>
+          </a:xfrm>
+          <a:prstGeom prst="rect">
+            <a:avLst/>
+          </a:prstGeom>
+          <a:noFill/>
+          <a:ln/>
+        </p:spPr>
+        <p:txBody>
+          <a:bodyPr wrap="square" lIns="0" tIns="0" rIns="0" bIns="0" rtlCol="0" anchor="ctr"/>
+          <a:lstStyle/>
+          <a:p>
+            <a:pPr algn="ctr" indent="0" marL="0">
+              <a:buNone/>
+            </a:pPr>
+            <a:r>
+              <a:rPr lang="en-US" sz="1700" b="1" dirty="0">
+                <a:solidFill>
+                  <a:srgbClr val="C6A15B"/>
+                </a:solidFill>
+                <a:latin typeface="Cambria" pitchFamily="34" charset="0"/>
+                <a:ea typeface="Cambria" pitchFamily="34" charset="-122"/>
+                <a:cs typeface="Cambria" pitchFamily="34" charset="-120"/>
+              </a:rPr>
               <a:t>FL</a:t>
             </a:r>
             <a:endParaRPr lang="en-US" sz="1700" dirty="0"/>
@@ -7046,7 +7745,7 @@
       </p:sp>
       <p:sp>
         <p:nvSpPr>
-          <p:cNvPr id="36" name="Text 34"/>
+          <p:cNvPr id="57" name="Text 55"/>
           <p:cNvSpPr/>
           <p:nvPr/>
         </p:nvSpPr>
@@ -7071,7 +7770,7 @@
             <a:r>
               <a:rPr lang="en-US" sz="1100" b="1" spc="200" kern="0" dirty="0">
                 <a:solidFill>
-                  <a:srgbClr val="1A1E24"/>
+                  <a:srgbClr val="F5F2EA"/>
                 </a:solidFill>
                 <a:latin typeface="Calibri" pitchFamily="34" charset="0"/>
                 <a:ea typeface="Calibri" pitchFamily="34" charset="-122"/>
@@ -7148,7 +7847,7 @@
                 <a:ea typeface="Calibri" pitchFamily="34" charset="-122"/>
                 <a:cs typeface="Calibri" pitchFamily="34" charset="-120"/>
               </a:rPr>
-              <a:t>FAST-RAMP ROLLOUT</a:t>
+              <a:t>HOW WE WORK</a:t>
             </a:r>
             <a:endParaRPr lang="en-US" sz="1150" dirty="0"/>
           </a:p>
@@ -7207,7 +7906,7 @@
                 <a:ea typeface="Cambria" pitchFamily="34" charset="-122"/>
                 <a:cs typeface="Cambria" pitchFamily="34" charset="-120"/>
               </a:rPr>
-              <a:t>Timeline &amp; KPIs</a:t>
+              <a:t>Our Approach &amp; Delivery</a:t>
             </a:r>
             <a:endParaRPr lang="en-US" sz="3000" dirty="0"/>
           </a:p>
@@ -7221,99 +7920,12 @@
         </p:nvSpPr>
         <p:spPr>
           <a:xfrm>
-            <a:off x="1883664" y="1719072"/>
-            <a:ext cx="8421624" cy="0"/>
-          </a:xfrm>
-          <a:prstGeom prst="line">
-            <a:avLst/>
-          </a:prstGeom>
-          <a:noFill/>
-          <a:ln w="25400">
-            <a:solidFill>
-              <a:srgbClr val="E4E0D6"/>
-            </a:solidFill>
-            <a:prstDash val="solid"/>
-          </a:ln>
-        </p:spPr>
-      </p:sp>
-      <p:sp>
-        <p:nvSpPr>
-          <p:cNvPr id="6" name="Shape 4"/>
-          <p:cNvSpPr/>
-          <p:nvPr/>
-        </p:nvSpPr>
-        <p:spPr>
-          <a:xfrm>
-            <a:off x="1591056" y="1426464"/>
-            <a:ext cx="585216" cy="585216"/>
-          </a:xfrm>
-          <a:prstGeom prst="ellipse">
-            <a:avLst/>
-          </a:prstGeom>
-          <a:solidFill>
-            <a:srgbClr val="1A1E24"/>
-          </a:solidFill>
-          <a:ln w="25400">
-            <a:solidFill>
-              <a:srgbClr val="FFFFFF"/>
-            </a:solidFill>
-            <a:prstDash val="solid"/>
-          </a:ln>
-        </p:spPr>
-      </p:sp>
-      <p:sp>
-        <p:nvSpPr>
-          <p:cNvPr id="7" name="Text 5"/>
-          <p:cNvSpPr/>
-          <p:nvPr/>
-        </p:nvSpPr>
-        <p:spPr>
-          <a:xfrm>
-            <a:off x="1591056" y="1426464"/>
-            <a:ext cx="585216" cy="585216"/>
-          </a:xfrm>
-          <a:prstGeom prst="rect">
-            <a:avLst/>
-          </a:prstGeom>
-          <a:noFill/>
-          <a:ln/>
-        </p:spPr>
-        <p:txBody>
-          <a:bodyPr wrap="square" lIns="0" tIns="0" rIns="0" bIns="0" rtlCol="0" anchor="ctr"/>
-          <a:lstStyle/>
-          <a:p>
-            <a:pPr algn="ctr" indent="0" marL="0">
-              <a:buNone/>
-            </a:pPr>
-            <a:r>
-              <a:rPr lang="en-US" sz="2200" b="1" dirty="0">
-                <a:solidFill>
-                  <a:srgbClr val="E3C892"/>
-                </a:solidFill>
-                <a:latin typeface="Cambria" pitchFamily="34" charset="0"/>
-                <a:ea typeface="Cambria" pitchFamily="34" charset="-122"/>
-                <a:cs typeface="Cambria" pitchFamily="34" charset="-120"/>
-              </a:rPr>
-              <a:t>1</a:t>
-            </a:r>
-            <a:endParaRPr lang="en-US" sz="2200" dirty="0"/>
-          </a:p>
-        </p:txBody>
-      </p:sp>
-      <p:sp>
-        <p:nvSpPr>
-          <p:cNvPr id="8" name="Shape 6"/>
-          <p:cNvSpPr/>
-          <p:nvPr/>
-        </p:nvSpPr>
-        <p:spPr>
-          <a:xfrm>
-            <a:off x="640080" y="2212848"/>
-            <a:ext cx="2487168" cy="2971800"/>
+            <a:off x="640080" y="1508760"/>
+            <a:ext cx="2926080" cy="1298448"/>
           </a:xfrm>
           <a:prstGeom prst="roundRect">
             <a:avLst>
-              <a:gd name="adj" fmla="val 2941"/>
+              <a:gd name="adj" fmla="val 5634"/>
             </a:avLst>
           </a:prstGeom>
           <a:solidFill>
@@ -7336,14 +7948,34 @@
       </p:sp>
       <p:sp>
         <p:nvSpPr>
-          <p:cNvPr id="9" name="Text 7"/>
-          <p:cNvSpPr/>
-          <p:nvPr/>
-        </p:nvSpPr>
-        <p:spPr>
-          <a:xfrm>
-            <a:off x="868680" y="2377440"/>
-            <a:ext cx="2029968" cy="274320"/>
+          <p:cNvPr id="6" name="Shape 4"/>
+          <p:cNvSpPr/>
+          <p:nvPr/>
+        </p:nvSpPr>
+        <p:spPr>
+          <a:xfrm>
+            <a:off x="896112" y="1746504"/>
+            <a:ext cx="128016" cy="128016"/>
+          </a:xfrm>
+          <a:prstGeom prst="ellipse">
+            <a:avLst/>
+          </a:prstGeom>
+          <a:solidFill>
+            <a:srgbClr val="C6A15B"/>
+          </a:solidFill>
+          <a:ln/>
+        </p:spPr>
+      </p:sp>
+      <p:sp>
+        <p:nvSpPr>
+          <p:cNvPr id="7" name="Text 5"/>
+          <p:cNvSpPr/>
+          <p:nvPr/>
+        </p:nvSpPr>
+        <p:spPr>
+          <a:xfrm>
+            <a:off x="1115568" y="1673352"/>
+            <a:ext cx="2286000" cy="320040"/>
           </a:xfrm>
           <a:prstGeom prst="rect">
             <a:avLst/>
@@ -7359,46 +7991,7 @@
               <a:buNone/>
             </a:pPr>
             <a:r>
-              <a:rPr lang="en-US" sz="1000" b="1" spc="150" kern="0" dirty="0">
-                <a:solidFill>
-                  <a:srgbClr val="C6A15B"/>
-                </a:solidFill>
-                <a:latin typeface="Calibri" pitchFamily="34" charset="0"/>
-                <a:ea typeface="Calibri" pitchFamily="34" charset="-122"/>
-                <a:cs typeface="Calibri" pitchFamily="34" charset="-120"/>
-              </a:rPr>
-              <a:t>WEEK 1</a:t>
-            </a:r>
-            <a:endParaRPr lang="en-US" sz="1000" dirty="0"/>
-          </a:p>
-        </p:txBody>
-      </p:sp>
-      <p:sp>
-        <p:nvSpPr>
-          <p:cNvPr id="10" name="Text 8"/>
-          <p:cNvSpPr/>
-          <p:nvPr/>
-        </p:nvSpPr>
-        <p:spPr>
-          <a:xfrm>
-            <a:off x="868680" y="2633472"/>
-            <a:ext cx="2029968" cy="457200"/>
-          </a:xfrm>
-          <a:prstGeom prst="rect">
-            <a:avLst/>
-          </a:prstGeom>
-          <a:noFill/>
-          <a:ln/>
-        </p:spPr>
-        <p:txBody>
-          <a:bodyPr wrap="square" lIns="0" tIns="0" rIns="0" bIns="0" rtlCol="0" anchor="ctr"/>
-          <a:lstStyle/>
-          <a:p>
-            <a:pPr indent="0" marL="0">
-              <a:buNone/>
-            </a:pPr>
-            <a:r>
-              <a:rPr lang="en-US" sz="1650" b="1" dirty="0">
+              <a:rPr lang="en-US" sz="1500" b="1" dirty="0">
                 <a:solidFill>
                   <a:srgbClr val="1A1E24"/>
                 </a:solidFill>
@@ -7406,22 +7999,22 @@
                 <a:ea typeface="Cambria" pitchFamily="34" charset="-122"/>
                 <a:cs typeface="Cambria" pitchFamily="34" charset="-120"/>
               </a:rPr>
-              <a:t>Plan &amp; Foundation</a:t>
-            </a:r>
-            <a:endParaRPr lang="en-US" sz="1650" dirty="0"/>
-          </a:p>
-        </p:txBody>
-      </p:sp>
-      <p:sp>
-        <p:nvSpPr>
-          <p:cNvPr id="11" name="Text 9"/>
-          <p:cNvSpPr/>
-          <p:nvPr/>
-        </p:nvSpPr>
-        <p:spPr>
-          <a:xfrm>
-            <a:off x="896112" y="3182112"/>
-            <a:ext cx="2029968" cy="1920240"/>
+              <a:t>Full-Funnel</a:t>
+            </a:r>
+            <a:endParaRPr lang="en-US" sz="1500" dirty="0"/>
+          </a:p>
+        </p:txBody>
+      </p:sp>
+      <p:sp>
+        <p:nvSpPr>
+          <p:cNvPr id="8" name="Text 6"/>
+          <p:cNvSpPr/>
+          <p:nvPr/>
+        </p:nvSpPr>
+        <p:spPr>
+          <a:xfrm>
+            <a:off x="914400" y="2075688"/>
+            <a:ext cx="2423160" cy="640080"/>
           </a:xfrm>
           <a:prstGeom prst="rect">
             <a:avLst/>
@@ -7433,205 +8026,41 @@
           <a:bodyPr wrap="square" lIns="0" tIns="0" rIns="0" bIns="0" rtlCol="0" anchor="t"/>
           <a:lstStyle/>
           <a:p>
-            <a:pPr marL="152400" indent="-152400">
+            <a:pPr indent="0" marL="0">
               <a:lnSpc>
-                <a:spcPct val="100000"/>
+                <a:spcPct val="108000"/>
               </a:lnSpc>
-              <a:spcAft>
-                <a:spcPts val="600"/>
-              </a:spcAft>
-              <a:buSzPct val="100000"/>
-              <a:buChar char="•"/>
-            </a:pPr>
-            <a:r>
-              <a:rPr lang="en-US" sz="1050" dirty="0">
-                <a:solidFill>
-                  <a:srgbClr val="1A1E24"/>
-                </a:solidFill>
-                <a:latin typeface="Calibri" pitchFamily="34" charset="0"/>
-                <a:ea typeface="Calibri" pitchFamily="34" charset="-122"/>
-                <a:cs typeface="Calibri" pitchFamily="34" charset="-120"/>
-              </a:rPr>
-              <a:t>Requirement gathering &amp; audit</a:t>
-            </a:r>
-            <a:endParaRPr lang="en-US" sz="1050" dirty="0"/>
-          </a:p>
-          <a:p>
-            <a:pPr marL="152400" indent="-152400">
-              <a:lnSpc>
-                <a:spcPct val="100000"/>
-              </a:lnSpc>
-              <a:spcAft>
-                <a:spcPts val="600"/>
-              </a:spcAft>
-              <a:buSzPct val="100000"/>
-              <a:buChar char="•"/>
-            </a:pPr>
-            <a:r>
-              <a:rPr lang="en-US" sz="1050" dirty="0">
-                <a:solidFill>
-                  <a:srgbClr val="1A1E24"/>
-                </a:solidFill>
-                <a:latin typeface="Calibri" pitchFamily="34" charset="0"/>
-                <a:ea typeface="Calibri" pitchFamily="34" charset="-122"/>
-                <a:cs typeface="Calibri" pitchFamily="34" charset="-120"/>
-              </a:rPr>
-              <a:t>Competitor &amp; keyword research</a:t>
-            </a:r>
-            <a:endParaRPr lang="en-US" sz="1050" dirty="0"/>
-          </a:p>
-          <a:p>
-            <a:pPr marL="152400" indent="-152400">
-              <a:lnSpc>
-                <a:spcPct val="100000"/>
-              </a:lnSpc>
-              <a:spcAft>
-                <a:spcPts val="600"/>
-              </a:spcAft>
-              <a:buSzPct val="100000"/>
-              <a:buChar char="•"/>
-            </a:pPr>
-            <a:r>
-              <a:rPr lang="en-US" sz="1050" dirty="0">
-                <a:solidFill>
-                  <a:srgbClr val="1A1E24"/>
-                </a:solidFill>
-                <a:latin typeface="Calibri" pitchFamily="34" charset="0"/>
-                <a:ea typeface="Calibri" pitchFamily="34" charset="-122"/>
-                <a:cs typeface="Calibri" pitchFamily="34" charset="-120"/>
-              </a:rPr>
-              <a:t>Audience &amp; market mapping</a:t>
-            </a:r>
-            <a:endParaRPr lang="en-US" sz="1050" dirty="0"/>
-          </a:p>
-          <a:p>
-            <a:pPr marL="152400" indent="-152400">
-              <a:lnSpc>
-                <a:spcPct val="100000"/>
-              </a:lnSpc>
-              <a:spcAft>
-                <a:spcPts val="600"/>
-              </a:spcAft>
-              <a:buSzPct val="100000"/>
-              <a:buChar char="•"/>
-            </a:pPr>
-            <a:r>
-              <a:rPr lang="en-US" sz="1050" dirty="0">
-                <a:solidFill>
-                  <a:srgbClr val="1A1E24"/>
-                </a:solidFill>
-                <a:latin typeface="Calibri" pitchFamily="34" charset="0"/>
-                <a:ea typeface="Calibri" pitchFamily="34" charset="-122"/>
-                <a:cs typeface="Calibri" pitchFamily="34" charset="-120"/>
-              </a:rPr>
-              <a:t>Lead-routing design</a:t>
-            </a:r>
-            <a:endParaRPr lang="en-US" sz="1050" dirty="0"/>
-          </a:p>
-          <a:p>
-            <a:pPr marL="152400" indent="-152400">
-              <a:lnSpc>
-                <a:spcPct val="100000"/>
-              </a:lnSpc>
-              <a:spcAft>
-                <a:spcPts val="600"/>
-              </a:spcAft>
-              <a:buSzPct val="100000"/>
-              <a:buChar char="•"/>
-            </a:pPr>
-            <a:r>
-              <a:rPr lang="en-US" sz="1050" dirty="0">
-                <a:solidFill>
-                  <a:srgbClr val="1A1E24"/>
-                </a:solidFill>
-                <a:latin typeface="Calibri" pitchFamily="34" charset="0"/>
-                <a:ea typeface="Calibri" pitchFamily="34" charset="-122"/>
-                <a:cs typeface="Calibri" pitchFamily="34" charset="-120"/>
-              </a:rPr>
-              <a:t>Content strategy · MoU</a:t>
-            </a:r>
-            <a:endParaRPr lang="en-US" sz="1050" dirty="0"/>
-          </a:p>
-        </p:txBody>
-      </p:sp>
-      <p:sp>
-        <p:nvSpPr>
-          <p:cNvPr id="12" name="Shape 10"/>
-          <p:cNvSpPr/>
-          <p:nvPr/>
-        </p:nvSpPr>
-        <p:spPr>
-          <a:xfrm>
-            <a:off x="4398264" y="1426464"/>
-            <a:ext cx="585216" cy="585216"/>
-          </a:xfrm>
-          <a:prstGeom prst="ellipse">
-            <a:avLst/>
-          </a:prstGeom>
-          <a:solidFill>
-            <a:srgbClr val="1A1E24"/>
-          </a:solidFill>
-          <a:ln w="25400">
-            <a:solidFill>
-              <a:srgbClr val="FFFFFF"/>
-            </a:solidFill>
-            <a:prstDash val="solid"/>
-          </a:ln>
-        </p:spPr>
-      </p:sp>
-      <p:sp>
-        <p:nvSpPr>
-          <p:cNvPr id="13" name="Text 11"/>
-          <p:cNvSpPr/>
-          <p:nvPr/>
-        </p:nvSpPr>
-        <p:spPr>
-          <a:xfrm>
-            <a:off x="4398264" y="1426464"/>
-            <a:ext cx="585216" cy="585216"/>
-          </a:xfrm>
-          <a:prstGeom prst="rect">
-            <a:avLst/>
-          </a:prstGeom>
-          <a:noFill/>
-          <a:ln/>
-        </p:spPr>
-        <p:txBody>
-          <a:bodyPr wrap="square" lIns="0" tIns="0" rIns="0" bIns="0" rtlCol="0" anchor="ctr"/>
-          <a:lstStyle/>
-          <a:p>
-            <a:pPr algn="ctr" indent="0" marL="0">
-              <a:buNone/>
-            </a:pPr>
-            <a:r>
-              <a:rPr lang="en-US" sz="2200" b="1" dirty="0">
-                <a:solidFill>
-                  <a:srgbClr val="E3C892"/>
-                </a:solidFill>
-                <a:latin typeface="Cambria" pitchFamily="34" charset="0"/>
-                <a:ea typeface="Cambria" pitchFamily="34" charset="-122"/>
-                <a:cs typeface="Cambria" pitchFamily="34" charset="-120"/>
-              </a:rPr>
-              <a:t>2</a:t>
-            </a:r>
-            <a:endParaRPr lang="en-US" sz="2200" dirty="0"/>
-          </a:p>
-        </p:txBody>
-      </p:sp>
-      <p:sp>
-        <p:nvSpPr>
-          <p:cNvPr id="14" name="Shape 12"/>
-          <p:cNvSpPr/>
-          <p:nvPr/>
-        </p:nvSpPr>
-        <p:spPr>
-          <a:xfrm>
-            <a:off x="3447288" y="2212848"/>
-            <a:ext cx="2487168" cy="2971800"/>
+              <a:buNone/>
+            </a:pPr>
+            <a:r>
+              <a:rPr lang="en-US" sz="1100" dirty="0">
+                <a:solidFill>
+                  <a:srgbClr val="5C6470"/>
+                </a:solidFill>
+                <a:latin typeface="Calibri" pitchFamily="34" charset="0"/>
+                <a:ea typeface="Calibri" pitchFamily="34" charset="-122"/>
+                <a:cs typeface="Calibri" pitchFamily="34" charset="-120"/>
+              </a:rPr>
+              <a:t>One connected system from click to close</a:t>
+            </a:r>
+            <a:endParaRPr lang="en-US" sz="1100" dirty="0"/>
+          </a:p>
+        </p:txBody>
+      </p:sp>
+      <p:sp>
+        <p:nvSpPr>
+          <p:cNvPr id="9" name="Shape 7"/>
+          <p:cNvSpPr/>
+          <p:nvPr/>
+        </p:nvSpPr>
+        <p:spPr>
+          <a:xfrm>
+            <a:off x="3840480" y="1508760"/>
+            <a:ext cx="2926080" cy="1298448"/>
           </a:xfrm>
           <a:prstGeom prst="roundRect">
             <a:avLst>
-              <a:gd name="adj" fmla="val 2941"/>
+              <a:gd name="adj" fmla="val 5634"/>
             </a:avLst>
           </a:prstGeom>
           <a:solidFill>
@@ -7654,14 +8083,34 @@
       </p:sp>
       <p:sp>
         <p:nvSpPr>
-          <p:cNvPr id="15" name="Text 13"/>
-          <p:cNvSpPr/>
-          <p:nvPr/>
-        </p:nvSpPr>
-        <p:spPr>
-          <a:xfrm>
-            <a:off x="3675888" y="2377440"/>
-            <a:ext cx="2029968" cy="274320"/>
+          <p:cNvPr id="10" name="Shape 8"/>
+          <p:cNvSpPr/>
+          <p:nvPr/>
+        </p:nvSpPr>
+        <p:spPr>
+          <a:xfrm>
+            <a:off x="4096512" y="1746504"/>
+            <a:ext cx="128016" cy="128016"/>
+          </a:xfrm>
+          <a:prstGeom prst="ellipse">
+            <a:avLst/>
+          </a:prstGeom>
+          <a:solidFill>
+            <a:srgbClr val="C6A15B"/>
+          </a:solidFill>
+          <a:ln/>
+        </p:spPr>
+      </p:sp>
+      <p:sp>
+        <p:nvSpPr>
+          <p:cNvPr id="11" name="Text 9"/>
+          <p:cNvSpPr/>
+          <p:nvPr/>
+        </p:nvSpPr>
+        <p:spPr>
+          <a:xfrm>
+            <a:off x="4315968" y="1673352"/>
+            <a:ext cx="2286000" cy="320040"/>
           </a:xfrm>
           <a:prstGeom prst="rect">
             <a:avLst/>
@@ -7677,46 +8126,7 @@
               <a:buNone/>
             </a:pPr>
             <a:r>
-              <a:rPr lang="en-US" sz="1000" b="1" spc="150" kern="0" dirty="0">
-                <a:solidFill>
-                  <a:srgbClr val="C6A15B"/>
-                </a:solidFill>
-                <a:latin typeface="Calibri" pitchFamily="34" charset="0"/>
-                <a:ea typeface="Calibri" pitchFamily="34" charset="-122"/>
-                <a:cs typeface="Calibri" pitchFamily="34" charset="-120"/>
-              </a:rPr>
-              <a:t>WEEK 2</a:t>
-            </a:r>
-            <a:endParaRPr lang="en-US" sz="1000" dirty="0"/>
-          </a:p>
-        </p:txBody>
-      </p:sp>
-      <p:sp>
-        <p:nvSpPr>
-          <p:cNvPr id="16" name="Text 14"/>
-          <p:cNvSpPr/>
-          <p:nvPr/>
-        </p:nvSpPr>
-        <p:spPr>
-          <a:xfrm>
-            <a:off x="3675888" y="2633472"/>
-            <a:ext cx="2029968" cy="457200"/>
-          </a:xfrm>
-          <a:prstGeom prst="rect">
-            <a:avLst/>
-          </a:prstGeom>
-          <a:noFill/>
-          <a:ln/>
-        </p:spPr>
-        <p:txBody>
-          <a:bodyPr wrap="square" lIns="0" tIns="0" rIns="0" bIns="0" rtlCol="0" anchor="ctr"/>
-          <a:lstStyle/>
-          <a:p>
-            <a:pPr indent="0" marL="0">
-              <a:buNone/>
-            </a:pPr>
-            <a:r>
-              <a:rPr lang="en-US" sz="1650" b="1" dirty="0">
+              <a:rPr lang="en-US" sz="1500" b="1" dirty="0">
                 <a:solidFill>
                   <a:srgbClr val="1A1E24"/>
                 </a:solidFill>
@@ -7724,22 +8134,22 @@
                 <a:ea typeface="Cambria" pitchFamily="34" charset="-122"/>
                 <a:cs typeface="Cambria" pitchFamily="34" charset="-120"/>
               </a:rPr>
-              <a:t>Launch &amp; Scale</a:t>
-            </a:r>
-            <a:endParaRPr lang="en-US" sz="1650" dirty="0"/>
-          </a:p>
-        </p:txBody>
-      </p:sp>
-      <p:sp>
-        <p:nvSpPr>
-          <p:cNvPr id="17" name="Text 15"/>
-          <p:cNvSpPr/>
-          <p:nvPr/>
-        </p:nvSpPr>
-        <p:spPr>
-          <a:xfrm>
-            <a:off x="3703320" y="3182112"/>
-            <a:ext cx="2029968" cy="1920240"/>
+              <a:t>Data-Led</a:t>
+            </a:r>
+            <a:endParaRPr lang="en-US" sz="1500" dirty="0"/>
+          </a:p>
+        </p:txBody>
+      </p:sp>
+      <p:sp>
+        <p:nvSpPr>
+          <p:cNvPr id="12" name="Text 10"/>
+          <p:cNvSpPr/>
+          <p:nvPr/>
+        </p:nvSpPr>
+        <p:spPr>
+          <a:xfrm>
+            <a:off x="4114800" y="2075688"/>
+            <a:ext cx="2423160" cy="640080"/>
           </a:xfrm>
           <a:prstGeom prst="rect">
             <a:avLst/>
@@ -7751,205 +8161,41 @@
           <a:bodyPr wrap="square" lIns="0" tIns="0" rIns="0" bIns="0" rtlCol="0" anchor="t"/>
           <a:lstStyle/>
           <a:p>
-            <a:pPr marL="152400" indent="-152400">
+            <a:pPr indent="0" marL="0">
               <a:lnSpc>
-                <a:spcPct val="100000"/>
+                <a:spcPct val="108000"/>
               </a:lnSpc>
-              <a:spcAft>
-                <a:spcPts val="600"/>
-              </a:spcAft>
-              <a:buSzPct val="100000"/>
-              <a:buChar char="•"/>
-            </a:pPr>
-            <a:r>
-              <a:rPr lang="en-US" sz="1050" dirty="0">
-                <a:solidFill>
-                  <a:srgbClr val="1A1E24"/>
-                </a:solidFill>
-                <a:latin typeface="Calibri" pitchFamily="34" charset="0"/>
-                <a:ea typeface="Calibri" pitchFamily="34" charset="-122"/>
-                <a:cs typeface="Calibri" pitchFamily="34" charset="-120"/>
-              </a:rPr>
-              <a:t>Website &amp; landing pages</a:t>
-            </a:r>
-            <a:endParaRPr lang="en-US" sz="1050" dirty="0"/>
-          </a:p>
-          <a:p>
-            <a:pPr marL="152400" indent="-152400">
-              <a:lnSpc>
-                <a:spcPct val="100000"/>
-              </a:lnSpc>
-              <a:spcAft>
-                <a:spcPts val="600"/>
-              </a:spcAft>
-              <a:buSzPct val="100000"/>
-              <a:buChar char="•"/>
-            </a:pPr>
-            <a:r>
-              <a:rPr lang="en-US" sz="1050" dirty="0">
-                <a:solidFill>
-                  <a:srgbClr val="1A1E24"/>
-                </a:solidFill>
-                <a:latin typeface="Calibri" pitchFamily="34" charset="0"/>
-                <a:ea typeface="Calibri" pitchFamily="34" charset="-122"/>
-                <a:cs typeface="Calibri" pitchFamily="34" charset="-120"/>
-              </a:rPr>
-              <a:t>Analytics &amp; tracking</a:t>
-            </a:r>
-            <a:endParaRPr lang="en-US" sz="1050" dirty="0"/>
-          </a:p>
-          <a:p>
-            <a:pPr marL="152400" indent="-152400">
-              <a:lnSpc>
-                <a:spcPct val="100000"/>
-              </a:lnSpc>
-              <a:spcAft>
-                <a:spcPts val="600"/>
-              </a:spcAft>
-              <a:buSzPct val="100000"/>
-              <a:buChar char="•"/>
-            </a:pPr>
-            <a:r>
-              <a:rPr lang="en-US" sz="1050" dirty="0">
-                <a:solidFill>
-                  <a:srgbClr val="1A1E24"/>
-                </a:solidFill>
-                <a:latin typeface="Calibri" pitchFamily="34" charset="0"/>
-                <a:ea typeface="Calibri" pitchFamily="34" charset="-122"/>
-                <a:cs typeface="Calibri" pitchFamily="34" charset="-120"/>
-              </a:rPr>
-              <a:t>Campaigns live: SEO/SEM/SMM</a:t>
-            </a:r>
-            <a:endParaRPr lang="en-US" sz="1050" dirty="0"/>
-          </a:p>
-          <a:p>
-            <a:pPr marL="152400" indent="-152400">
-              <a:lnSpc>
-                <a:spcPct val="100000"/>
-              </a:lnSpc>
-              <a:spcAft>
-                <a:spcPts val="600"/>
-              </a:spcAft>
-              <a:buSzPct val="100000"/>
-              <a:buChar char="•"/>
-            </a:pPr>
-            <a:r>
-              <a:rPr lang="en-US" sz="1050" dirty="0">
-                <a:solidFill>
-                  <a:srgbClr val="1A1E24"/>
-                </a:solidFill>
-                <a:latin typeface="Calibri" pitchFamily="34" charset="0"/>
-                <a:ea typeface="Calibri" pitchFamily="34" charset="-122"/>
-                <a:cs typeface="Calibri" pitchFamily="34" charset="-120"/>
-              </a:rPr>
-              <a:t>Scale winning pages fast</a:t>
-            </a:r>
-            <a:endParaRPr lang="en-US" sz="1050" dirty="0"/>
-          </a:p>
-          <a:p>
-            <a:pPr marL="152400" indent="-152400">
-              <a:lnSpc>
-                <a:spcPct val="100000"/>
-              </a:lnSpc>
-              <a:spcAft>
-                <a:spcPts val="600"/>
-              </a:spcAft>
-              <a:buSzPct val="100000"/>
-              <a:buChar char="•"/>
-            </a:pPr>
-            <a:r>
-              <a:rPr lang="en-US" sz="1050" dirty="0">
-                <a:solidFill>
-                  <a:srgbClr val="1A1E24"/>
-                </a:solidFill>
-                <a:latin typeface="Calibri" pitchFamily="34" charset="0"/>
-                <a:ea typeface="Calibri" pitchFamily="34" charset="-122"/>
-                <a:cs typeface="Calibri" pitchFamily="34" charset="-120"/>
-              </a:rPr>
-              <a:t>Expand channels &amp; budgets</a:t>
-            </a:r>
-            <a:endParaRPr lang="en-US" sz="1050" dirty="0"/>
-          </a:p>
-        </p:txBody>
-      </p:sp>
-      <p:sp>
-        <p:nvSpPr>
-          <p:cNvPr id="18" name="Shape 16"/>
-          <p:cNvSpPr/>
-          <p:nvPr/>
-        </p:nvSpPr>
-        <p:spPr>
-          <a:xfrm>
-            <a:off x="7205472" y="1426464"/>
-            <a:ext cx="585216" cy="585216"/>
-          </a:xfrm>
-          <a:prstGeom prst="ellipse">
-            <a:avLst/>
-          </a:prstGeom>
-          <a:solidFill>
-            <a:srgbClr val="1A1E24"/>
-          </a:solidFill>
-          <a:ln w="25400">
-            <a:solidFill>
-              <a:srgbClr val="FFFFFF"/>
-            </a:solidFill>
-            <a:prstDash val="solid"/>
-          </a:ln>
-        </p:spPr>
-      </p:sp>
-      <p:sp>
-        <p:nvSpPr>
-          <p:cNvPr id="19" name="Text 17"/>
-          <p:cNvSpPr/>
-          <p:nvPr/>
-        </p:nvSpPr>
-        <p:spPr>
-          <a:xfrm>
-            <a:off x="7205472" y="1426464"/>
-            <a:ext cx="585216" cy="585216"/>
-          </a:xfrm>
-          <a:prstGeom prst="rect">
-            <a:avLst/>
-          </a:prstGeom>
-          <a:noFill/>
-          <a:ln/>
-        </p:spPr>
-        <p:txBody>
-          <a:bodyPr wrap="square" lIns="0" tIns="0" rIns="0" bIns="0" rtlCol="0" anchor="ctr"/>
-          <a:lstStyle/>
-          <a:p>
-            <a:pPr algn="ctr" indent="0" marL="0">
-              <a:buNone/>
-            </a:pPr>
-            <a:r>
-              <a:rPr lang="en-US" sz="2200" b="1" dirty="0">
-                <a:solidFill>
-                  <a:srgbClr val="E3C892"/>
-                </a:solidFill>
-                <a:latin typeface="Cambria" pitchFamily="34" charset="0"/>
-                <a:ea typeface="Cambria" pitchFamily="34" charset="-122"/>
-                <a:cs typeface="Cambria" pitchFamily="34" charset="-120"/>
-              </a:rPr>
-              <a:t>3</a:t>
-            </a:r>
-            <a:endParaRPr lang="en-US" sz="2200" dirty="0"/>
-          </a:p>
-        </p:txBody>
-      </p:sp>
-      <p:sp>
-        <p:nvSpPr>
-          <p:cNvPr id="20" name="Shape 18"/>
-          <p:cNvSpPr/>
-          <p:nvPr/>
-        </p:nvSpPr>
-        <p:spPr>
-          <a:xfrm>
-            <a:off x="6254496" y="2212848"/>
-            <a:ext cx="2487168" cy="2971800"/>
+              <a:buNone/>
+            </a:pPr>
+            <a:r>
+              <a:rPr lang="en-US" sz="1100" dirty="0">
+                <a:solidFill>
+                  <a:srgbClr val="5C6470"/>
+                </a:solidFill>
+                <a:latin typeface="Calibri" pitchFamily="34" charset="0"/>
+                <a:ea typeface="Calibri" pitchFamily="34" charset="-122"/>
+                <a:cs typeface="Calibri" pitchFamily="34" charset="-120"/>
+              </a:rPr>
+              <a:t>Every decision from analytics, tracking &amp; CPL</a:t>
+            </a:r>
+            <a:endParaRPr lang="en-US" sz="1100" dirty="0"/>
+          </a:p>
+        </p:txBody>
+      </p:sp>
+      <p:sp>
+        <p:nvSpPr>
+          <p:cNvPr id="13" name="Shape 11"/>
+          <p:cNvSpPr/>
+          <p:nvPr/>
+        </p:nvSpPr>
+        <p:spPr>
+          <a:xfrm>
+            <a:off x="640080" y="3008376"/>
+            <a:ext cx="2926080" cy="1298448"/>
           </a:xfrm>
           <a:prstGeom prst="roundRect">
             <a:avLst>
-              <a:gd name="adj" fmla="val 2941"/>
+              <a:gd name="adj" fmla="val 5634"/>
             </a:avLst>
           </a:prstGeom>
           <a:solidFill>
@@ -7972,14 +8218,34 @@
       </p:sp>
       <p:sp>
         <p:nvSpPr>
-          <p:cNvPr id="21" name="Text 19"/>
-          <p:cNvSpPr/>
-          <p:nvPr/>
-        </p:nvSpPr>
-        <p:spPr>
-          <a:xfrm>
-            <a:off x="6483096" y="2377440"/>
-            <a:ext cx="2029968" cy="274320"/>
+          <p:cNvPr id="14" name="Shape 12"/>
+          <p:cNvSpPr/>
+          <p:nvPr/>
+        </p:nvSpPr>
+        <p:spPr>
+          <a:xfrm>
+            <a:off x="896112" y="3246120"/>
+            <a:ext cx="128016" cy="128016"/>
+          </a:xfrm>
+          <a:prstGeom prst="ellipse">
+            <a:avLst/>
+          </a:prstGeom>
+          <a:solidFill>
+            <a:srgbClr val="C6A15B"/>
+          </a:solidFill>
+          <a:ln/>
+        </p:spPr>
+      </p:sp>
+      <p:sp>
+        <p:nvSpPr>
+          <p:cNvPr id="15" name="Text 13"/>
+          <p:cNvSpPr/>
+          <p:nvPr/>
+        </p:nvSpPr>
+        <p:spPr>
+          <a:xfrm>
+            <a:off x="1115568" y="3172968"/>
+            <a:ext cx="2286000" cy="320040"/>
           </a:xfrm>
           <a:prstGeom prst="rect">
             <a:avLst/>
@@ -7995,46 +8261,7 @@
               <a:buNone/>
             </a:pPr>
             <a:r>
-              <a:rPr lang="en-US" sz="1000" b="1" spc="150" kern="0" dirty="0">
-                <a:solidFill>
-                  <a:srgbClr val="C6A15B"/>
-                </a:solidFill>
-                <a:latin typeface="Calibri" pitchFamily="34" charset="0"/>
-                <a:ea typeface="Calibri" pitchFamily="34" charset="-122"/>
-                <a:cs typeface="Calibri" pitchFamily="34" charset="-120"/>
-              </a:rPr>
-              <a:t>WEEK 3+</a:t>
-            </a:r>
-            <a:endParaRPr lang="en-US" sz="1000" dirty="0"/>
-          </a:p>
-        </p:txBody>
-      </p:sp>
-      <p:sp>
-        <p:nvSpPr>
-          <p:cNvPr id="22" name="Text 20"/>
-          <p:cNvSpPr/>
-          <p:nvPr/>
-        </p:nvSpPr>
-        <p:spPr>
-          <a:xfrm>
-            <a:off x="6483096" y="2633472"/>
-            <a:ext cx="2029968" cy="457200"/>
-          </a:xfrm>
-          <a:prstGeom prst="rect">
-            <a:avLst/>
-          </a:prstGeom>
-          <a:noFill/>
-          <a:ln/>
-        </p:spPr>
-        <p:txBody>
-          <a:bodyPr wrap="square" lIns="0" tIns="0" rIns="0" bIns="0" rtlCol="0" anchor="ctr"/>
-          <a:lstStyle/>
-          <a:p>
-            <a:pPr indent="0" marL="0">
-              <a:buNone/>
-            </a:pPr>
-            <a:r>
-              <a:rPr lang="en-US" sz="1650" b="1" dirty="0">
+              <a:rPr lang="en-US" sz="1500" b="1" dirty="0">
                 <a:solidFill>
                   <a:srgbClr val="1A1E24"/>
                 </a:solidFill>
@@ -8042,22 +8269,22 @@
                 <a:ea typeface="Cambria" pitchFamily="34" charset="-122"/>
                 <a:cs typeface="Cambria" pitchFamily="34" charset="-120"/>
               </a:rPr>
-              <a:t>Generate &amp; Optimize</a:t>
-            </a:r>
-            <a:endParaRPr lang="en-US" sz="1650" dirty="0"/>
-          </a:p>
-        </p:txBody>
-      </p:sp>
-      <p:sp>
-        <p:nvSpPr>
-          <p:cNvPr id="23" name="Text 21"/>
-          <p:cNvSpPr/>
-          <p:nvPr/>
-        </p:nvSpPr>
-        <p:spPr>
-          <a:xfrm>
-            <a:off x="6510528" y="3182112"/>
-            <a:ext cx="2029968" cy="1920240"/>
+              <a:t>Conversion-Focused</a:t>
+            </a:r>
+            <a:endParaRPr lang="en-US" sz="1500" dirty="0"/>
+          </a:p>
+        </p:txBody>
+      </p:sp>
+      <p:sp>
+        <p:nvSpPr>
+          <p:cNvPr id="16" name="Text 14"/>
+          <p:cNvSpPr/>
+          <p:nvPr/>
+        </p:nvSpPr>
+        <p:spPr>
+          <a:xfrm>
+            <a:off x="914400" y="3575304"/>
+            <a:ext cx="2423160" cy="640080"/>
           </a:xfrm>
           <a:prstGeom prst="rect">
             <a:avLst/>
@@ -8069,181 +8296,41 @@
           <a:bodyPr wrap="square" lIns="0" tIns="0" rIns="0" bIns="0" rtlCol="0" anchor="t"/>
           <a:lstStyle/>
           <a:p>
-            <a:pPr marL="152400" indent="-152400">
+            <a:pPr indent="0" marL="0">
               <a:lnSpc>
-                <a:spcPct val="100000"/>
+                <a:spcPct val="108000"/>
               </a:lnSpc>
-              <a:spcAft>
-                <a:spcPts val="600"/>
-              </a:spcAft>
-              <a:buSzPct val="100000"/>
-              <a:buChar char="•"/>
-            </a:pPr>
-            <a:r>
-              <a:rPr lang="en-US" sz="1050" dirty="0">
-                <a:solidFill>
-                  <a:srgbClr val="1A1E24"/>
-                </a:solidFill>
-                <a:latin typeface="Calibri" pitchFamily="34" charset="0"/>
-                <a:ea typeface="Calibri" pitchFamily="34" charset="-122"/>
-                <a:cs typeface="Calibri" pitchFamily="34" charset="-120"/>
-              </a:rPr>
-              <a:t>Continuous lead generation</a:t>
-            </a:r>
-            <a:endParaRPr lang="en-US" sz="1050" dirty="0"/>
-          </a:p>
-          <a:p>
-            <a:pPr marL="152400" indent="-152400">
-              <a:lnSpc>
-                <a:spcPct val="100000"/>
-              </a:lnSpc>
-              <a:spcAft>
-                <a:spcPts val="600"/>
-              </a:spcAft>
-              <a:buSzPct val="100000"/>
-              <a:buChar char="•"/>
-            </a:pPr>
-            <a:r>
-              <a:rPr lang="en-US" sz="1050" dirty="0">
-                <a:solidFill>
-                  <a:srgbClr val="1A1E24"/>
-                </a:solidFill>
-                <a:latin typeface="Calibri" pitchFamily="34" charset="0"/>
-                <a:ea typeface="Calibri" pitchFamily="34" charset="-122"/>
-                <a:cs typeface="Calibri" pitchFamily="34" charset="-120"/>
-              </a:rPr>
-              <a:t>Qualify &amp; assign leads</a:t>
-            </a:r>
-            <a:endParaRPr lang="en-US" sz="1050" dirty="0"/>
-          </a:p>
-          <a:p>
-            <a:pPr marL="152400" indent="-152400">
-              <a:lnSpc>
-                <a:spcPct val="100000"/>
-              </a:lnSpc>
-              <a:spcAft>
-                <a:spcPts val="600"/>
-              </a:spcAft>
-              <a:buSzPct val="100000"/>
-              <a:buChar char="•"/>
-            </a:pPr>
-            <a:r>
-              <a:rPr lang="en-US" sz="1050" dirty="0">
-                <a:solidFill>
-                  <a:srgbClr val="1A1E24"/>
-                </a:solidFill>
-                <a:latin typeface="Calibri" pitchFamily="34" charset="0"/>
-                <a:ea typeface="Calibri" pitchFamily="34" charset="-122"/>
-                <a:cs typeface="Calibri" pitchFamily="34" charset="-120"/>
-              </a:rPr>
-              <a:t>Weekly optimization &amp; A/B tests</a:t>
-            </a:r>
-            <a:endParaRPr lang="en-US" sz="1050" dirty="0"/>
-          </a:p>
-          <a:p>
-            <a:pPr marL="152400" indent="-152400">
-              <a:lnSpc>
-                <a:spcPct val="100000"/>
-              </a:lnSpc>
-              <a:spcAft>
-                <a:spcPts val="600"/>
-              </a:spcAft>
-              <a:buSzPct val="100000"/>
-              <a:buChar char="•"/>
-            </a:pPr>
-            <a:r>
-              <a:rPr lang="en-US" sz="1050" dirty="0">
-                <a:solidFill>
-                  <a:srgbClr val="1A1E24"/>
-                </a:solidFill>
-                <a:latin typeface="Calibri" pitchFamily="34" charset="0"/>
-                <a:ea typeface="Calibri" pitchFamily="34" charset="-122"/>
-                <a:cs typeface="Calibri" pitchFamily="34" charset="-120"/>
-              </a:rPr>
-              <a:t>Track CPL, QL &amp; ROI</a:t>
-            </a:r>
-            <a:endParaRPr lang="en-US" sz="1050" dirty="0"/>
-          </a:p>
-        </p:txBody>
-      </p:sp>
-      <p:sp>
-        <p:nvSpPr>
-          <p:cNvPr id="24" name="Shape 22"/>
-          <p:cNvSpPr/>
-          <p:nvPr/>
-        </p:nvSpPr>
-        <p:spPr>
-          <a:xfrm>
-            <a:off x="10012680" y="1426464"/>
-            <a:ext cx="585216" cy="585216"/>
-          </a:xfrm>
-          <a:prstGeom prst="ellipse">
-            <a:avLst/>
-          </a:prstGeom>
-          <a:solidFill>
-            <a:srgbClr val="C6A15B"/>
-          </a:solidFill>
-          <a:ln w="25400">
-            <a:solidFill>
-              <a:srgbClr val="FFFFFF"/>
-            </a:solidFill>
-            <a:prstDash val="solid"/>
-          </a:ln>
-        </p:spPr>
-      </p:sp>
-      <p:sp>
-        <p:nvSpPr>
-          <p:cNvPr id="25" name="Text 23"/>
-          <p:cNvSpPr/>
-          <p:nvPr/>
-        </p:nvSpPr>
-        <p:spPr>
-          <a:xfrm>
-            <a:off x="10012680" y="1426464"/>
-            <a:ext cx="585216" cy="585216"/>
-          </a:xfrm>
-          <a:prstGeom prst="rect">
-            <a:avLst/>
-          </a:prstGeom>
-          <a:noFill/>
-          <a:ln/>
-        </p:spPr>
-        <p:txBody>
-          <a:bodyPr wrap="square" lIns="0" tIns="0" rIns="0" bIns="0" rtlCol="0" anchor="ctr"/>
-          <a:lstStyle/>
-          <a:p>
-            <a:pPr algn="ctr" indent="0" marL="0">
-              <a:buNone/>
-            </a:pPr>
-            <a:r>
-              <a:rPr lang="en-US" sz="2200" b="1" dirty="0">
-                <a:solidFill>
-                  <a:srgbClr val="0E1116"/>
-                </a:solidFill>
-                <a:latin typeface="Cambria" pitchFamily="34" charset="0"/>
-                <a:ea typeface="Cambria" pitchFamily="34" charset="-122"/>
-                <a:cs typeface="Cambria" pitchFamily="34" charset="-120"/>
-              </a:rPr>
-              <a:t>4</a:t>
-            </a:r>
-            <a:endParaRPr lang="en-US" sz="2200" dirty="0"/>
-          </a:p>
-        </p:txBody>
-      </p:sp>
-      <p:sp>
-        <p:nvSpPr>
-          <p:cNvPr id="26" name="Shape 24"/>
-          <p:cNvSpPr/>
-          <p:nvPr/>
-        </p:nvSpPr>
-        <p:spPr>
-          <a:xfrm>
-            <a:off x="9061704" y="2212848"/>
-            <a:ext cx="2487168" cy="2971800"/>
+              <a:buNone/>
+            </a:pPr>
+            <a:r>
+              <a:rPr lang="en-US" sz="1100" dirty="0">
+                <a:solidFill>
+                  <a:srgbClr val="5C6470"/>
+                </a:solidFill>
+                <a:latin typeface="Calibri" pitchFamily="34" charset="0"/>
+                <a:ea typeface="Calibri" pitchFamily="34" charset="-122"/>
+                <a:cs typeface="Calibri" pitchFamily="34" charset="-120"/>
+              </a:rPr>
+              <a:t>Landing pages &amp; CTAs built to convert</a:t>
+            </a:r>
+            <a:endParaRPr lang="en-US" sz="1100" dirty="0"/>
+          </a:p>
+        </p:txBody>
+      </p:sp>
+      <p:sp>
+        <p:nvSpPr>
+          <p:cNvPr id="17" name="Shape 15"/>
+          <p:cNvSpPr/>
+          <p:nvPr/>
+        </p:nvSpPr>
+        <p:spPr>
+          <a:xfrm>
+            <a:off x="3840480" y="3008376"/>
+            <a:ext cx="2926080" cy="1298448"/>
           </a:xfrm>
           <a:prstGeom prst="roundRect">
             <a:avLst>
-              <a:gd name="adj" fmla="val 2941"/>
+              <a:gd name="adj" fmla="val 5634"/>
             </a:avLst>
           </a:prstGeom>
           <a:solidFill>
@@ -8266,14 +8353,34 @@
       </p:sp>
       <p:sp>
         <p:nvSpPr>
-          <p:cNvPr id="27" name="Text 25"/>
-          <p:cNvSpPr/>
-          <p:nvPr/>
-        </p:nvSpPr>
-        <p:spPr>
-          <a:xfrm>
-            <a:off x="9290304" y="2377440"/>
-            <a:ext cx="2029968" cy="274320"/>
+          <p:cNvPr id="18" name="Shape 16"/>
+          <p:cNvSpPr/>
+          <p:nvPr/>
+        </p:nvSpPr>
+        <p:spPr>
+          <a:xfrm>
+            <a:off x="4096512" y="3246120"/>
+            <a:ext cx="128016" cy="128016"/>
+          </a:xfrm>
+          <a:prstGeom prst="ellipse">
+            <a:avLst/>
+          </a:prstGeom>
+          <a:solidFill>
+            <a:srgbClr val="C6A15B"/>
+          </a:solidFill>
+          <a:ln/>
+        </p:spPr>
+      </p:sp>
+      <p:sp>
+        <p:nvSpPr>
+          <p:cNvPr id="19" name="Text 17"/>
+          <p:cNvSpPr/>
+          <p:nvPr/>
+        </p:nvSpPr>
+        <p:spPr>
+          <a:xfrm>
+            <a:off x="4315968" y="3172968"/>
+            <a:ext cx="2286000" cy="320040"/>
           </a:xfrm>
           <a:prstGeom prst="rect">
             <a:avLst/>
@@ -8289,46 +8396,7 @@
               <a:buNone/>
             </a:pPr>
             <a:r>
-              <a:rPr lang="en-US" sz="1000" b="1" spc="150" kern="0" dirty="0">
-                <a:solidFill>
-                  <a:srgbClr val="C6A15B"/>
-                </a:solidFill>
-                <a:latin typeface="Calibri" pitchFamily="34" charset="0"/>
-                <a:ea typeface="Calibri" pitchFamily="34" charset="-122"/>
-                <a:cs typeface="Calibri" pitchFamily="34" charset="-120"/>
-              </a:rPr>
-              <a:t>ONGOING</a:t>
-            </a:r>
-            <a:endParaRPr lang="en-US" sz="1000" dirty="0"/>
-          </a:p>
-        </p:txBody>
-      </p:sp>
-      <p:sp>
-        <p:nvSpPr>
-          <p:cNvPr id="28" name="Text 26"/>
-          <p:cNvSpPr/>
-          <p:nvPr/>
-        </p:nvSpPr>
-        <p:spPr>
-          <a:xfrm>
-            <a:off x="9290304" y="2633472"/>
-            <a:ext cx="2029968" cy="457200"/>
-          </a:xfrm>
-          <a:prstGeom prst="rect">
-            <a:avLst/>
-          </a:prstGeom>
-          <a:noFill/>
-          <a:ln/>
-        </p:spPr>
-        <p:txBody>
-          <a:bodyPr wrap="square" lIns="0" tIns="0" rIns="0" bIns="0" rtlCol="0" anchor="ctr"/>
-          <a:lstStyle/>
-          <a:p>
-            <a:pPr indent="0" marL="0">
-              <a:buNone/>
-            </a:pPr>
-            <a:r>
-              <a:rPr lang="en-US" sz="1650" b="1" dirty="0">
+              <a:rPr lang="en-US" sz="1500" b="1" dirty="0">
                 <a:solidFill>
                   <a:srgbClr val="1A1E24"/>
                 </a:solidFill>
@@ -8336,7 +8404,1224 @@
                 <a:ea typeface="Cambria" pitchFamily="34" charset="-122"/>
                 <a:cs typeface="Cambria" pitchFamily="34" charset="-120"/>
               </a:rPr>
-              <a:t>Stay Market-Ready</a:t>
+              <a:t>Always Optimizing</a:t>
+            </a:r>
+            <a:endParaRPr lang="en-US" sz="1500" dirty="0"/>
+          </a:p>
+        </p:txBody>
+      </p:sp>
+      <p:sp>
+        <p:nvSpPr>
+          <p:cNvPr id="20" name="Text 18"/>
+          <p:cNvSpPr/>
+          <p:nvPr/>
+        </p:nvSpPr>
+        <p:spPr>
+          <a:xfrm>
+            <a:off x="4114800" y="3575304"/>
+            <a:ext cx="2423160" cy="640080"/>
+          </a:xfrm>
+          <a:prstGeom prst="rect">
+            <a:avLst/>
+          </a:prstGeom>
+          <a:noFill/>
+          <a:ln/>
+        </p:spPr>
+        <p:txBody>
+          <a:bodyPr wrap="square" lIns="0" tIns="0" rIns="0" bIns="0" rtlCol="0" anchor="t"/>
+          <a:lstStyle/>
+          <a:p>
+            <a:pPr indent="0" marL="0">
+              <a:lnSpc>
+                <a:spcPct val="108000"/>
+              </a:lnSpc>
+              <a:buNone/>
+            </a:pPr>
+            <a:r>
+              <a:rPr lang="en-US" sz="1100" dirty="0">
+                <a:solidFill>
+                  <a:srgbClr val="5C6470"/>
+                </a:solidFill>
+                <a:latin typeface="Calibri" pitchFamily="34" charset="0"/>
+                <a:ea typeface="Calibri" pitchFamily="34" charset="-122"/>
+                <a:cs typeface="Calibri" pitchFamily="34" charset="-120"/>
+              </a:rPr>
+              <a:t>Weekly tests — scale what works</a:t>
+            </a:r>
+            <a:endParaRPr lang="en-US" sz="1100" dirty="0"/>
+          </a:p>
+        </p:txBody>
+      </p:sp>
+      <p:sp>
+        <p:nvSpPr>
+          <p:cNvPr id="21" name="Shape 19"/>
+          <p:cNvSpPr/>
+          <p:nvPr/>
+        </p:nvSpPr>
+        <p:spPr>
+          <a:xfrm>
+            <a:off x="7132320" y="1508760"/>
+            <a:ext cx="4416552" cy="2999232"/>
+          </a:xfrm>
+          <a:prstGeom prst="roundRect">
+            <a:avLst>
+              <a:gd name="adj" fmla="val 2439"/>
+            </a:avLst>
+          </a:prstGeom>
+          <a:solidFill>
+            <a:srgbClr val="0E1116"/>
+          </a:solidFill>
+          <a:ln/>
+          <a:effectLst>
+            <a:outerShdw sx="100000" sy="100000" kx="0" ky="0" algn="bl" rotWithShape="0" blurRad="101600" dist="38100" dir="5400000">
+              <a:srgbClr val="000000">
+                <a:alpha val="22000"/>
+              </a:srgbClr>
+            </a:outerShdw>
+          </a:effectLst>
+        </p:spPr>
+      </p:sp>
+      <p:sp>
+        <p:nvSpPr>
+          <p:cNvPr id="22" name="Text 20"/>
+          <p:cNvSpPr/>
+          <p:nvPr/>
+        </p:nvSpPr>
+        <p:spPr>
+          <a:xfrm>
+            <a:off x="7452360" y="1691640"/>
+            <a:ext cx="3776472" cy="274320"/>
+          </a:xfrm>
+          <a:prstGeom prst="rect">
+            <a:avLst/>
+          </a:prstGeom>
+          <a:noFill/>
+          <a:ln/>
+        </p:spPr>
+        <p:txBody>
+          <a:bodyPr wrap="square" lIns="0" tIns="0" rIns="0" bIns="0" rtlCol="0" anchor="ctr"/>
+          <a:lstStyle/>
+          <a:p>
+            <a:pPr indent="0" marL="0">
+              <a:buNone/>
+            </a:pPr>
+            <a:r>
+              <a:rPr lang="en-US" sz="1100" b="1" spc="200" kern="0" dirty="0">
+                <a:solidFill>
+                  <a:srgbClr val="C6A15B"/>
+                </a:solidFill>
+                <a:latin typeface="Calibri" pitchFamily="34" charset="0"/>
+                <a:ea typeface="Calibri" pitchFamily="34" charset="-122"/>
+                <a:cs typeface="Calibri" pitchFamily="34" charset="-120"/>
+              </a:rPr>
+              <a:t>HOW WE DELIVER</a:t>
+            </a:r>
+            <a:endParaRPr lang="en-US" sz="1100" dirty="0"/>
+          </a:p>
+        </p:txBody>
+      </p:sp>
+      <p:sp>
+        <p:nvSpPr>
+          <p:cNvPr id="23" name="Text 21"/>
+          <p:cNvSpPr/>
+          <p:nvPr/>
+        </p:nvSpPr>
+        <p:spPr>
+          <a:xfrm>
+            <a:off x="7498080" y="2103120"/>
+            <a:ext cx="3730752" cy="2286000"/>
+          </a:xfrm>
+          <a:prstGeom prst="rect">
+            <a:avLst/>
+          </a:prstGeom>
+          <a:noFill/>
+          <a:ln/>
+        </p:spPr>
+        <p:txBody>
+          <a:bodyPr wrap="square" lIns="0" tIns="0" rIns="0" bIns="0" rtlCol="0" anchor="t"/>
+          <a:lstStyle/>
+          <a:p>
+            <a:pPr marL="177800" indent="-177800">
+              <a:spcAft>
+                <a:spcPts val="800"/>
+              </a:spcAft>
+              <a:buSzPct val="100000"/>
+              <a:buChar char="•"/>
+            </a:pPr>
+            <a:r>
+              <a:rPr lang="en-US" sz="1250" dirty="0">
+                <a:solidFill>
+                  <a:srgbClr val="F5F2EA"/>
+                </a:solidFill>
+                <a:latin typeface="Calibri" pitchFamily="34" charset="0"/>
+                <a:ea typeface="Calibri" pitchFamily="34" charset="-122"/>
+                <a:cs typeface="Calibri" pitchFamily="34" charset="-120"/>
+              </a:rPr>
+              <a:t>Dedicated marketing pod</a:t>
+            </a:r>
+            <a:endParaRPr lang="en-US" sz="1250" dirty="0"/>
+          </a:p>
+          <a:p>
+            <a:pPr marL="177800" indent="-177800">
+              <a:spcAft>
+                <a:spcPts val="800"/>
+              </a:spcAft>
+              <a:buSzPct val="100000"/>
+              <a:buChar char="•"/>
+            </a:pPr>
+            <a:r>
+              <a:rPr lang="en-US" sz="1250" dirty="0">
+                <a:solidFill>
+                  <a:srgbClr val="F5F2EA"/>
+                </a:solidFill>
+                <a:latin typeface="Calibri" pitchFamily="34" charset="0"/>
+                <a:ea typeface="Calibri" pitchFamily="34" charset="-122"/>
+                <a:cs typeface="Calibri" pitchFamily="34" charset="-120"/>
+              </a:rPr>
+              <a:t>Agile weekly sprints</a:t>
+            </a:r>
+            <a:endParaRPr lang="en-US" sz="1250" dirty="0"/>
+          </a:p>
+          <a:p>
+            <a:pPr marL="177800" indent="-177800">
+              <a:spcAft>
+                <a:spcPts val="800"/>
+              </a:spcAft>
+              <a:buSzPct val="100000"/>
+              <a:buChar char="•"/>
+            </a:pPr>
+            <a:r>
+              <a:rPr lang="en-US" sz="1250" dirty="0">
+                <a:solidFill>
+                  <a:srgbClr val="F5F2EA"/>
+                </a:solidFill>
+                <a:latin typeface="Calibri" pitchFamily="34" charset="0"/>
+                <a:ea typeface="Calibri" pitchFamily="34" charset="-122"/>
+                <a:cs typeface="Calibri" pitchFamily="34" charset="-120"/>
+              </a:rPr>
+              <a:t>Transparent weekly reporting</a:t>
+            </a:r>
+            <a:endParaRPr lang="en-US" sz="1250" dirty="0"/>
+          </a:p>
+          <a:p>
+            <a:pPr marL="177800" indent="-177800">
+              <a:spcAft>
+                <a:spcPts val="800"/>
+              </a:spcAft>
+              <a:buSzPct val="100000"/>
+              <a:buChar char="•"/>
+            </a:pPr>
+            <a:r>
+              <a:rPr lang="en-US" sz="1250" dirty="0">
+                <a:solidFill>
+                  <a:srgbClr val="F5F2EA"/>
+                </a:solidFill>
+                <a:latin typeface="Calibri" pitchFamily="34" charset="0"/>
+                <a:ea typeface="Calibri" pitchFamily="34" charset="-122"/>
+                <a:cs typeface="Calibri" pitchFamily="34" charset="-120"/>
+              </a:rPr>
+              <a:t>Modern tools &amp; tracking</a:t>
+            </a:r>
+            <a:endParaRPr lang="en-US" sz="1250" dirty="0"/>
+          </a:p>
+          <a:p>
+            <a:pPr marL="177800" indent="-177800">
+              <a:spcAft>
+                <a:spcPts val="800"/>
+              </a:spcAft>
+              <a:buSzPct val="100000"/>
+              <a:buChar char="•"/>
+            </a:pPr>
+            <a:r>
+              <a:rPr lang="en-US" sz="1250" dirty="0">
+                <a:solidFill>
+                  <a:srgbClr val="F5F2EA"/>
+                </a:solidFill>
+                <a:latin typeface="Calibri" pitchFamily="34" charset="0"/>
+                <a:ea typeface="Calibri" pitchFamily="34" charset="-122"/>
+                <a:cs typeface="Calibri" pitchFamily="34" charset="-120"/>
+              </a:rPr>
+              <a:t>Single point of contact</a:t>
+            </a:r>
+            <a:endParaRPr lang="en-US" sz="1250" dirty="0"/>
+          </a:p>
+          <a:p>
+            <a:pPr marL="177800" indent="-177800">
+              <a:spcAft>
+                <a:spcPts val="800"/>
+              </a:spcAft>
+              <a:buSzPct val="100000"/>
+              <a:buChar char="•"/>
+            </a:pPr>
+            <a:r>
+              <a:rPr lang="en-US" sz="1250" dirty="0">
+                <a:solidFill>
+                  <a:srgbClr val="F5F2EA"/>
+                </a:solidFill>
+                <a:latin typeface="Calibri" pitchFamily="34" charset="0"/>
+                <a:ea typeface="Calibri" pitchFamily="34" charset="-122"/>
+                <a:cs typeface="Calibri" pitchFamily="34" charset="-120"/>
+              </a:rPr>
+              <a:t>Monthly performance review</a:t>
+            </a:r>
+            <a:endParaRPr lang="en-US" sz="1250" dirty="0"/>
+          </a:p>
+        </p:txBody>
+      </p:sp>
+      <p:sp>
+        <p:nvSpPr>
+          <p:cNvPr id="24" name="Shape 22"/>
+          <p:cNvSpPr/>
+          <p:nvPr/>
+        </p:nvSpPr>
+        <p:spPr>
+          <a:xfrm>
+            <a:off x="640080" y="4754880"/>
+            <a:ext cx="5271516" cy="1481328"/>
+          </a:xfrm>
+          <a:prstGeom prst="roundRect">
+            <a:avLst>
+              <a:gd name="adj" fmla="val 4938"/>
+            </a:avLst>
+          </a:prstGeom>
+          <a:solidFill>
+            <a:srgbClr val="F3F1EA"/>
+          </a:solidFill>
+          <a:ln w="12700">
+            <a:solidFill>
+              <a:srgbClr val="E4E0D6"/>
+            </a:solidFill>
+            <a:prstDash val="solid"/>
+          </a:ln>
+          <a:effectLst>
+            <a:outerShdw sx="100000" sy="100000" kx="0" ky="0" algn="bl" rotWithShape="0" blurRad="63500" dist="25400" dir="5400000">
+              <a:srgbClr val="000000">
+                <a:alpha val="14000"/>
+              </a:srgbClr>
+            </a:outerShdw>
+          </a:effectLst>
+        </p:spPr>
+      </p:sp>
+      <p:sp>
+        <p:nvSpPr>
+          <p:cNvPr id="25" name="Text 23"/>
+          <p:cNvSpPr/>
+          <p:nvPr/>
+        </p:nvSpPr>
+        <p:spPr>
+          <a:xfrm>
+            <a:off x="914400" y="4919472"/>
+            <a:ext cx="4722876" cy="320040"/>
+          </a:xfrm>
+          <a:prstGeom prst="rect">
+            <a:avLst/>
+          </a:prstGeom>
+          <a:noFill/>
+          <a:ln/>
+        </p:spPr>
+        <p:txBody>
+          <a:bodyPr wrap="square" lIns="0" tIns="0" rIns="0" bIns="0" rtlCol="0" anchor="ctr"/>
+          <a:lstStyle/>
+          <a:p>
+            <a:pPr indent="0" marL="0">
+              <a:buNone/>
+            </a:pPr>
+            <a:r>
+              <a:rPr lang="en-US" sz="1500" b="1" dirty="0">
+                <a:solidFill>
+                  <a:srgbClr val="1A1E24"/>
+                </a:solidFill>
+                <a:latin typeface="Cambria" pitchFamily="34" charset="0"/>
+                <a:ea typeface="Cambria" pitchFamily="34" charset="-122"/>
+                <a:cs typeface="Cambria" pitchFamily="34" charset="-120"/>
+              </a:rPr>
+              <a:t>You Provide   </a:t>
+            </a:r>
+            <a:pPr indent="0" marL="0">
+              <a:buNone/>
+            </a:pPr>
+            <a:r>
+              <a:rPr lang="en-US" sz="1050" i="1" dirty="0">
+                <a:solidFill>
+                  <a:srgbClr val="C6A15B"/>
+                </a:solidFill>
+                <a:latin typeface="Calibri" pitchFamily="34" charset="0"/>
+                <a:ea typeface="Calibri" pitchFamily="34" charset="-122"/>
+                <a:cs typeface="Calibri" pitchFamily="34" charset="-120"/>
+              </a:rPr>
+              <a:t>One Global · Fab Luxe</a:t>
+            </a:r>
+            <a:endParaRPr lang="en-US" sz="1500" dirty="0"/>
+          </a:p>
+        </p:txBody>
+      </p:sp>
+      <p:sp>
+        <p:nvSpPr>
+          <p:cNvPr id="26" name="Text 24"/>
+          <p:cNvSpPr/>
+          <p:nvPr/>
+        </p:nvSpPr>
+        <p:spPr>
+          <a:xfrm>
+            <a:off x="950976" y="5321808"/>
+            <a:ext cx="2544318" cy="868680"/>
+          </a:xfrm>
+          <a:prstGeom prst="rect">
+            <a:avLst/>
+          </a:prstGeom>
+          <a:noFill/>
+          <a:ln/>
+        </p:spPr>
+        <p:txBody>
+          <a:bodyPr wrap="square" lIns="0" tIns="0" rIns="0" bIns="0" rtlCol="0" anchor="t"/>
+          <a:lstStyle/>
+          <a:p>
+            <a:pPr marL="152400" indent="-152400">
+              <a:lnSpc>
+                <a:spcPct val="100000"/>
+              </a:lnSpc>
+              <a:spcAft>
+                <a:spcPts val="400"/>
+              </a:spcAft>
+              <a:buSzPct val="100000"/>
+              <a:buChar char="•"/>
+            </a:pPr>
+            <a:r>
+              <a:rPr lang="en-US" sz="1100" dirty="0">
+                <a:solidFill>
+                  <a:srgbClr val="1A1E24"/>
+                </a:solidFill>
+                <a:latin typeface="Calibri" pitchFamily="34" charset="0"/>
+                <a:ea typeface="Calibri" pitchFamily="34" charset="-122"/>
+                <a:cs typeface="Calibri" pitchFamily="34" charset="-120"/>
+              </a:rPr>
+              <a:t>Brand assets &amp; guidelines</a:t>
+            </a:r>
+            <a:endParaRPr lang="en-US" sz="1100" dirty="0"/>
+          </a:p>
+          <a:p>
+            <a:pPr marL="152400" indent="-152400">
+              <a:lnSpc>
+                <a:spcPct val="100000"/>
+              </a:lnSpc>
+              <a:spcAft>
+                <a:spcPts val="400"/>
+              </a:spcAft>
+              <a:buSzPct val="100000"/>
+              <a:buChar char="•"/>
+            </a:pPr>
+            <a:r>
+              <a:rPr lang="en-US" sz="1100" dirty="0">
+                <a:solidFill>
+                  <a:srgbClr val="1A1E24"/>
+                </a:solidFill>
+                <a:latin typeface="Calibri" pitchFamily="34" charset="0"/>
+                <a:ea typeface="Calibri" pitchFamily="34" charset="-122"/>
+                <a:cs typeface="Calibri" pitchFamily="34" charset="-120"/>
+              </a:rPr>
+              <a:t>Product info &amp; content</a:t>
+            </a:r>
+            <a:endParaRPr lang="en-US" sz="1100" dirty="0"/>
+          </a:p>
+        </p:txBody>
+      </p:sp>
+      <p:sp>
+        <p:nvSpPr>
+          <p:cNvPr id="27" name="Text 25"/>
+          <p:cNvSpPr/>
+          <p:nvPr/>
+        </p:nvSpPr>
+        <p:spPr>
+          <a:xfrm>
+            <a:off x="3412998" y="5321808"/>
+            <a:ext cx="2315718" cy="868680"/>
+          </a:xfrm>
+          <a:prstGeom prst="rect">
+            <a:avLst/>
+          </a:prstGeom>
+          <a:noFill/>
+          <a:ln/>
+        </p:spPr>
+        <p:txBody>
+          <a:bodyPr wrap="square" lIns="0" tIns="0" rIns="0" bIns="0" rtlCol="0" anchor="t"/>
+          <a:lstStyle/>
+          <a:p>
+            <a:pPr marL="152400" indent="-152400">
+              <a:lnSpc>
+                <a:spcPct val="100000"/>
+              </a:lnSpc>
+              <a:spcAft>
+                <a:spcPts val="400"/>
+              </a:spcAft>
+              <a:buSzPct val="100000"/>
+              <a:buChar char="•"/>
+            </a:pPr>
+            <a:r>
+              <a:rPr lang="en-US" sz="1100" dirty="0">
+                <a:solidFill>
+                  <a:srgbClr val="1A1E24"/>
+                </a:solidFill>
+                <a:latin typeface="Calibri" pitchFamily="34" charset="0"/>
+                <a:ea typeface="Calibri" pitchFamily="34" charset="-122"/>
+                <a:cs typeface="Calibri" pitchFamily="34" charset="-120"/>
+              </a:rPr>
+              <a:t>Sales team to close leads</a:t>
+            </a:r>
+            <a:endParaRPr lang="en-US" sz="1100" dirty="0"/>
+          </a:p>
+          <a:p>
+            <a:pPr marL="152400" indent="-152400">
+              <a:lnSpc>
+                <a:spcPct val="100000"/>
+              </a:lnSpc>
+              <a:spcAft>
+                <a:spcPts val="400"/>
+              </a:spcAft>
+              <a:buSzPct val="100000"/>
+              <a:buChar char="•"/>
+            </a:pPr>
+            <a:r>
+              <a:rPr lang="en-US" sz="1100" dirty="0">
+                <a:solidFill>
+                  <a:srgbClr val="1A1E24"/>
+                </a:solidFill>
+                <a:latin typeface="Calibri" pitchFamily="34" charset="0"/>
+                <a:ea typeface="Calibri" pitchFamily="34" charset="-122"/>
+                <a:cs typeface="Calibri" pitchFamily="34" charset="-120"/>
+              </a:rPr>
+              <a:t>Budget approvals</a:t>
+            </a:r>
+            <a:endParaRPr lang="en-US" sz="1100" dirty="0"/>
+          </a:p>
+        </p:txBody>
+      </p:sp>
+      <p:sp>
+        <p:nvSpPr>
+          <p:cNvPr id="28" name="Shape 26"/>
+          <p:cNvSpPr/>
+          <p:nvPr/>
+        </p:nvSpPr>
+        <p:spPr>
+          <a:xfrm>
+            <a:off x="6277356" y="4754880"/>
+            <a:ext cx="5271516" cy="1481328"/>
+          </a:xfrm>
+          <a:prstGeom prst="roundRect">
+            <a:avLst>
+              <a:gd name="adj" fmla="val 4938"/>
+            </a:avLst>
+          </a:prstGeom>
+          <a:solidFill>
+            <a:srgbClr val="0E1116"/>
+          </a:solidFill>
+          <a:ln/>
+          <a:effectLst>
+            <a:outerShdw sx="100000" sy="100000" kx="0" ky="0" algn="bl" rotWithShape="0" blurRad="63500" dist="25400" dir="5400000">
+              <a:srgbClr val="000000">
+                <a:alpha val="14000"/>
+              </a:srgbClr>
+            </a:outerShdw>
+          </a:effectLst>
+        </p:spPr>
+      </p:sp>
+      <p:sp>
+        <p:nvSpPr>
+          <p:cNvPr id="29" name="Text 27"/>
+          <p:cNvSpPr/>
+          <p:nvPr/>
+        </p:nvSpPr>
+        <p:spPr>
+          <a:xfrm>
+            <a:off x="6551676" y="4919472"/>
+            <a:ext cx="4722876" cy="320040"/>
+          </a:xfrm>
+          <a:prstGeom prst="rect">
+            <a:avLst/>
+          </a:prstGeom>
+          <a:noFill/>
+          <a:ln/>
+        </p:spPr>
+        <p:txBody>
+          <a:bodyPr wrap="square" lIns="0" tIns="0" rIns="0" bIns="0" rtlCol="0" anchor="ctr"/>
+          <a:lstStyle/>
+          <a:p>
+            <a:pPr indent="0" marL="0">
+              <a:buNone/>
+            </a:pPr>
+            <a:r>
+              <a:rPr lang="en-US" sz="1500" b="1" dirty="0">
+                <a:solidFill>
+                  <a:srgbClr val="F5F2EA"/>
+                </a:solidFill>
+                <a:latin typeface="Cambria" pitchFamily="34" charset="0"/>
+                <a:ea typeface="Cambria" pitchFamily="34" charset="-122"/>
+                <a:cs typeface="Cambria" pitchFamily="34" charset="-120"/>
+              </a:rPr>
+              <a:t>We Deliver   </a:t>
+            </a:r>
+            <a:pPr indent="0" marL="0">
+              <a:buNone/>
+            </a:pPr>
+            <a:r>
+              <a:rPr lang="en-US" sz="1050" i="1" dirty="0">
+                <a:solidFill>
+                  <a:srgbClr val="C6A15B"/>
+                </a:solidFill>
+                <a:latin typeface="Calibri" pitchFamily="34" charset="0"/>
+                <a:ea typeface="Calibri" pitchFamily="34" charset="-122"/>
+                <a:cs typeface="Calibri" pitchFamily="34" charset="-120"/>
+              </a:rPr>
+              <a:t>Digital Marketing Team</a:t>
+            </a:r>
+            <a:endParaRPr lang="en-US" sz="1500" dirty="0"/>
+          </a:p>
+        </p:txBody>
+      </p:sp>
+      <p:sp>
+        <p:nvSpPr>
+          <p:cNvPr id="30" name="Text 28"/>
+          <p:cNvSpPr/>
+          <p:nvPr/>
+        </p:nvSpPr>
+        <p:spPr>
+          <a:xfrm>
+            <a:off x="6588252" y="5321808"/>
+            <a:ext cx="2544318" cy="868680"/>
+          </a:xfrm>
+          <a:prstGeom prst="rect">
+            <a:avLst/>
+          </a:prstGeom>
+          <a:noFill/>
+          <a:ln/>
+        </p:spPr>
+        <p:txBody>
+          <a:bodyPr wrap="square" lIns="0" tIns="0" rIns="0" bIns="0" rtlCol="0" anchor="t"/>
+          <a:lstStyle/>
+          <a:p>
+            <a:pPr marL="152400" indent="-152400">
+              <a:lnSpc>
+                <a:spcPct val="100000"/>
+              </a:lnSpc>
+              <a:spcAft>
+                <a:spcPts val="400"/>
+              </a:spcAft>
+              <a:buSzPct val="100000"/>
+              <a:buChar char="•"/>
+            </a:pPr>
+            <a:r>
+              <a:rPr lang="en-US" sz="1100" dirty="0">
+                <a:solidFill>
+                  <a:srgbClr val="F5F2EA"/>
+                </a:solidFill>
+                <a:latin typeface="Calibri" pitchFamily="34" charset="0"/>
+                <a:ea typeface="Calibri" pitchFamily="34" charset="-122"/>
+                <a:cs typeface="Calibri" pitchFamily="34" charset="-120"/>
+              </a:rPr>
+              <a:t>Strategy + full-channel execution</a:t>
+            </a:r>
+            <a:endParaRPr lang="en-US" sz="1100" dirty="0"/>
+          </a:p>
+          <a:p>
+            <a:pPr marL="152400" indent="-152400">
+              <a:lnSpc>
+                <a:spcPct val="100000"/>
+              </a:lnSpc>
+              <a:spcAft>
+                <a:spcPts val="400"/>
+              </a:spcAft>
+              <a:buSzPct val="100000"/>
+              <a:buChar char="•"/>
+            </a:pPr>
+            <a:r>
+              <a:rPr lang="en-US" sz="1100" dirty="0">
+                <a:solidFill>
+                  <a:srgbClr val="F5F2EA"/>
+                </a:solidFill>
+                <a:latin typeface="Calibri" pitchFamily="34" charset="0"/>
+                <a:ea typeface="Calibri" pitchFamily="34" charset="-122"/>
+                <a:cs typeface="Calibri" pitchFamily="34" charset="-120"/>
+              </a:rPr>
+              <a:t>Content, creative &amp; landing pages</a:t>
+            </a:r>
+            <a:endParaRPr lang="en-US" sz="1100" dirty="0"/>
+          </a:p>
+        </p:txBody>
+      </p:sp>
+      <p:sp>
+        <p:nvSpPr>
+          <p:cNvPr id="31" name="Text 29"/>
+          <p:cNvSpPr/>
+          <p:nvPr/>
+        </p:nvSpPr>
+        <p:spPr>
+          <a:xfrm>
+            <a:off x="9050274" y="5321808"/>
+            <a:ext cx="2315718" cy="868680"/>
+          </a:xfrm>
+          <a:prstGeom prst="rect">
+            <a:avLst/>
+          </a:prstGeom>
+          <a:noFill/>
+          <a:ln/>
+        </p:spPr>
+        <p:txBody>
+          <a:bodyPr wrap="square" lIns="0" tIns="0" rIns="0" bIns="0" rtlCol="0" anchor="t"/>
+          <a:lstStyle/>
+          <a:p>
+            <a:pPr marL="152400" indent="-152400">
+              <a:lnSpc>
+                <a:spcPct val="100000"/>
+              </a:lnSpc>
+              <a:spcAft>
+                <a:spcPts val="400"/>
+              </a:spcAft>
+              <a:buSzPct val="100000"/>
+              <a:buChar char="•"/>
+            </a:pPr>
+            <a:r>
+              <a:rPr lang="en-US" sz="1100" dirty="0">
+                <a:solidFill>
+                  <a:srgbClr val="F5F2EA"/>
+                </a:solidFill>
+                <a:latin typeface="Calibri" pitchFamily="34" charset="0"/>
+                <a:ea typeface="Calibri" pitchFamily="34" charset="-122"/>
+                <a:cs typeface="Calibri" pitchFamily="34" charset="-120"/>
+              </a:rPr>
+              <a:t>Lead capture, routing &amp; CRM</a:t>
+            </a:r>
+            <a:endParaRPr lang="en-US" sz="1100" dirty="0"/>
+          </a:p>
+          <a:p>
+            <a:pPr marL="152400" indent="-152400">
+              <a:lnSpc>
+                <a:spcPct val="100000"/>
+              </a:lnSpc>
+              <a:spcAft>
+                <a:spcPts val="400"/>
+              </a:spcAft>
+              <a:buSzPct val="100000"/>
+              <a:buChar char="•"/>
+            </a:pPr>
+            <a:r>
+              <a:rPr lang="en-US" sz="1100" dirty="0">
+                <a:solidFill>
+                  <a:srgbClr val="F5F2EA"/>
+                </a:solidFill>
+                <a:latin typeface="Calibri" pitchFamily="34" charset="0"/>
+                <a:ea typeface="Calibri" pitchFamily="34" charset="-122"/>
+                <a:cs typeface="Calibri" pitchFamily="34" charset="-120"/>
+              </a:rPr>
+              <a:t>Analytics, optimization &amp; reporting</a:t>
+            </a:r>
+            <a:endParaRPr lang="en-US" sz="1100" dirty="0"/>
+          </a:p>
+        </p:txBody>
+      </p:sp>
+      <p:sp>
+        <p:nvSpPr>
+          <p:cNvPr id="32" name="Text 30"/>
+          <p:cNvSpPr/>
+          <p:nvPr/>
+        </p:nvSpPr>
+        <p:spPr>
+          <a:xfrm>
+            <a:off x="10908792" y="6400800"/>
+            <a:ext cx="640080" cy="274320"/>
+          </a:xfrm>
+          <a:prstGeom prst="rect">
+            <a:avLst/>
+          </a:prstGeom>
+          <a:noFill/>
+          <a:ln/>
+        </p:spPr>
+        <p:txBody>
+          <a:bodyPr wrap="square" lIns="0" tIns="0" rIns="0" bIns="0" rtlCol="0" anchor="ctr"/>
+          <a:lstStyle/>
+          <a:p>
+            <a:pPr algn="r" indent="0" marL="0">
+              <a:buNone/>
+            </a:pPr>
+            <a:r>
+              <a:rPr lang="en-US" sz="950" dirty="0">
+                <a:solidFill>
+                  <a:srgbClr val="5C6470"/>
+                </a:solidFill>
+                <a:latin typeface="Calibri" pitchFamily="34" charset="0"/>
+                <a:ea typeface="Calibri" pitchFamily="34" charset="-122"/>
+                <a:cs typeface="Calibri" pitchFamily="34" charset="-120"/>
+              </a:rPr>
+              <a:t>04</a:t>
+            </a:r>
+            <a:endParaRPr lang="en-US" sz="950" dirty="0"/>
+          </a:p>
+        </p:txBody>
+      </p:sp>
+      <p:sp>
+        <p:nvSpPr>
+          <p:cNvPr id="33" name="Text 31"/>
+          <p:cNvSpPr/>
+          <p:nvPr/>
+        </p:nvSpPr>
+        <p:spPr>
+          <a:xfrm>
+            <a:off x="640080" y="6400800"/>
+            <a:ext cx="6400800" cy="274320"/>
+          </a:xfrm>
+          <a:prstGeom prst="rect">
+            <a:avLst/>
+          </a:prstGeom>
+          <a:noFill/>
+          <a:ln/>
+        </p:spPr>
+        <p:txBody>
+          <a:bodyPr wrap="square" lIns="0" tIns="0" rIns="0" bIns="0" rtlCol="0" anchor="ctr"/>
+          <a:lstStyle/>
+          <a:p>
+            <a:pPr indent="0" marL="0">
+              <a:buNone/>
+            </a:pPr>
+            <a:r>
+              <a:rPr lang="en-US" sz="900" dirty="0">
+                <a:solidFill>
+                  <a:srgbClr val="5C6470"/>
+                </a:solidFill>
+                <a:latin typeface="Calibri" pitchFamily="34" charset="0"/>
+                <a:ea typeface="Calibri" pitchFamily="34" charset="-122"/>
+                <a:cs typeface="Calibri" pitchFamily="34" charset="-120"/>
+              </a:rPr>
+              <a:t>Fab Luxe · Digital Marketing &amp; Lead Generation</a:t>
+            </a:r>
+            <a:endParaRPr lang="en-US" sz="900" dirty="0"/>
+          </a:p>
+        </p:txBody>
+      </p:sp>
+      <p:sp>
+        <p:nvSpPr>
+          <p:cNvPr id="34" name="Shape 32"/>
+          <p:cNvSpPr/>
+          <p:nvPr/>
+        </p:nvSpPr>
+        <p:spPr>
+          <a:xfrm>
+            <a:off x="11091672" y="310896"/>
+            <a:ext cx="457200" cy="457200"/>
+          </a:xfrm>
+          <a:prstGeom prst="ellipse">
+            <a:avLst/>
+          </a:prstGeom>
+          <a:solidFill>
+            <a:srgbClr val="FFFFFF"/>
+          </a:solidFill>
+          <a:ln w="15875">
+            <a:solidFill>
+              <a:srgbClr val="C6A15B"/>
+            </a:solidFill>
+            <a:prstDash val="solid"/>
+          </a:ln>
+        </p:spPr>
+      </p:sp>
+      <p:sp>
+        <p:nvSpPr>
+          <p:cNvPr id="35" name="Text 33"/>
+          <p:cNvSpPr/>
+          <p:nvPr/>
+        </p:nvSpPr>
+        <p:spPr>
+          <a:xfrm>
+            <a:off x="11091672" y="310896"/>
+            <a:ext cx="457200" cy="457200"/>
+          </a:xfrm>
+          <a:prstGeom prst="rect">
+            <a:avLst/>
+          </a:prstGeom>
+          <a:noFill/>
+          <a:ln/>
+        </p:spPr>
+        <p:txBody>
+          <a:bodyPr wrap="square" lIns="0" tIns="0" rIns="0" bIns="0" rtlCol="0" anchor="ctr"/>
+          <a:lstStyle/>
+          <a:p>
+            <a:pPr algn="ctr" indent="0" marL="0">
+              <a:buNone/>
+            </a:pPr>
+            <a:r>
+              <a:rPr lang="en-US" sz="1700" b="1" dirty="0">
+                <a:solidFill>
+                  <a:srgbClr val="C6A15B"/>
+                </a:solidFill>
+                <a:latin typeface="Cambria" pitchFamily="34" charset="0"/>
+                <a:ea typeface="Cambria" pitchFamily="34" charset="-122"/>
+                <a:cs typeface="Cambria" pitchFamily="34" charset="-120"/>
+              </a:rPr>
+              <a:t>FL</a:t>
+            </a:r>
+            <a:endParaRPr lang="en-US" sz="1700" dirty="0"/>
+          </a:p>
+        </p:txBody>
+      </p:sp>
+      <p:sp>
+        <p:nvSpPr>
+          <p:cNvPr id="36" name="Text 34"/>
+          <p:cNvSpPr/>
+          <p:nvPr/>
+        </p:nvSpPr>
+        <p:spPr>
+          <a:xfrm>
+            <a:off x="9171432" y="310896"/>
+            <a:ext cx="1783080" cy="457200"/>
+          </a:xfrm>
+          <a:prstGeom prst="rect">
+            <a:avLst/>
+          </a:prstGeom>
+          <a:noFill/>
+          <a:ln/>
+        </p:spPr>
+        <p:txBody>
+          <a:bodyPr wrap="square" lIns="0" tIns="0" rIns="0" bIns="0" rtlCol="0" anchor="ctr"/>
+          <a:lstStyle/>
+          <a:p>
+            <a:pPr algn="r" indent="0" marL="0">
+              <a:buNone/>
+            </a:pPr>
+            <a:r>
+              <a:rPr lang="en-US" sz="1100" b="1" spc="200" kern="0" dirty="0">
+                <a:solidFill>
+                  <a:srgbClr val="1A1E24"/>
+                </a:solidFill>
+                <a:latin typeface="Calibri" pitchFamily="34" charset="0"/>
+                <a:ea typeface="Calibri" pitchFamily="34" charset="-122"/>
+                <a:cs typeface="Calibri" pitchFamily="34" charset="-120"/>
+              </a:rPr>
+              <a:t>FAB LUXE</a:t>
+            </a:r>
+            <a:endParaRPr lang="en-US" sz="1100" dirty="0"/>
+          </a:p>
+        </p:txBody>
+      </p:sp>
+    </p:spTree>
+  </p:cSld>
+  <p:clrMapOvr>
+    <a:masterClrMapping/>
+  </p:clrMapOvr>
+</p:sld>
+</file>
+
+<file path=ppt/slides/slide6.xml><?xml version="1.0" encoding="utf-8"?>
+<p:sld xmlns:a="http://schemas.openxmlformats.org/drawingml/2006/main" xmlns:r="http://schemas.openxmlformats.org/officeDocument/2006/relationships" xmlns:p="http://schemas.openxmlformats.org/presentationml/2006/main">
+  <p:cSld name="Slide 6">
+    <p:bg>
+      <p:bgPr>
+        <a:solidFill>
+          <a:srgbClr val="FFFFFF"/>
+        </a:solidFill>
+      </p:bgPr>
+    </p:bg>
+    <p:spTree>
+      <p:nvGrpSpPr>
+        <p:cNvPr id="1" name=""/>
+        <p:cNvGrpSpPr/>
+        <p:nvPr/>
+      </p:nvGrpSpPr>
+      <p:grpSpPr>
+        <a:xfrm>
+          <a:off x="0" y="0"/>
+          <a:ext cx="0" cy="0"/>
+          <a:chOff x="0" y="0"/>
+          <a:chExt cx="0" cy="0"/>
+        </a:xfrm>
+      </p:grpSpPr>
+      <p:sp>
+        <p:nvSpPr>
+          <p:cNvPr id="2" name="Text 0"/>
+          <p:cNvSpPr/>
+          <p:nvPr/>
+        </p:nvSpPr>
+        <p:spPr>
+          <a:xfrm>
+            <a:off x="932688" y="210312"/>
+            <a:ext cx="8622792" cy="274320"/>
+          </a:xfrm>
+          <a:prstGeom prst="rect">
+            <a:avLst/>
+          </a:prstGeom>
+          <a:noFill/>
+          <a:ln/>
+        </p:spPr>
+        <p:txBody>
+          <a:bodyPr wrap="square" lIns="0" tIns="0" rIns="0" bIns="0" rtlCol="0" anchor="ctr"/>
+          <a:lstStyle/>
+          <a:p>
+            <a:pPr indent="0" marL="0">
+              <a:buNone/>
+            </a:pPr>
+            <a:r>
+              <a:rPr lang="en-US" sz="1150" b="1" spc="300" kern="0" dirty="0">
+                <a:solidFill>
+                  <a:srgbClr val="C6A15B"/>
+                </a:solidFill>
+                <a:latin typeface="Calibri" pitchFamily="34" charset="0"/>
+                <a:ea typeface="Calibri" pitchFamily="34" charset="-122"/>
+                <a:cs typeface="Calibri" pitchFamily="34" charset="-120"/>
+              </a:rPr>
+              <a:t>FAST-RAMP ROLLOUT</a:t>
+            </a:r>
+            <a:endParaRPr lang="en-US" sz="1150" dirty="0"/>
+          </a:p>
+        </p:txBody>
+      </p:sp>
+      <p:sp>
+        <p:nvSpPr>
+          <p:cNvPr id="3" name="Shape 1"/>
+          <p:cNvSpPr/>
+          <p:nvPr/>
+        </p:nvSpPr>
+        <p:spPr>
+          <a:xfrm>
+            <a:off x="640080" y="649224"/>
+            <a:ext cx="146304" cy="146304"/>
+          </a:xfrm>
+          <a:prstGeom prst="ellipse">
+            <a:avLst/>
+          </a:prstGeom>
+          <a:solidFill>
+            <a:srgbClr val="C6A15B"/>
+          </a:solidFill>
+          <a:ln/>
+        </p:spPr>
+      </p:sp>
+      <p:sp>
+        <p:nvSpPr>
+          <p:cNvPr id="4" name="Text 2"/>
+          <p:cNvSpPr/>
+          <p:nvPr/>
+        </p:nvSpPr>
+        <p:spPr>
+          <a:xfrm>
+            <a:off x="932688" y="502920"/>
+            <a:ext cx="8897112" cy="640080"/>
+          </a:xfrm>
+          <a:prstGeom prst="rect">
+            <a:avLst/>
+          </a:prstGeom>
+          <a:noFill/>
+          <a:ln/>
+        </p:spPr>
+        <p:txBody>
+          <a:bodyPr wrap="square" lIns="0" tIns="0" rIns="0" bIns="0" rtlCol="0" anchor="ctr"/>
+          <a:lstStyle/>
+          <a:p>
+            <a:pPr indent="0" marL="0">
+              <a:buNone/>
+            </a:pPr>
+            <a:r>
+              <a:rPr lang="en-US" sz="3000" b="1" dirty="0">
+                <a:solidFill>
+                  <a:srgbClr val="1A1E24"/>
+                </a:solidFill>
+                <a:latin typeface="Cambria" pitchFamily="34" charset="0"/>
+                <a:ea typeface="Cambria" pitchFamily="34" charset="-122"/>
+                <a:cs typeface="Cambria" pitchFamily="34" charset="-120"/>
+              </a:rPr>
+              <a:t>Timeline &amp; KPIs</a:t>
+            </a:r>
+            <a:endParaRPr lang="en-US" sz="3000" dirty="0"/>
+          </a:p>
+        </p:txBody>
+      </p:sp>
+      <p:sp>
+        <p:nvSpPr>
+          <p:cNvPr id="5" name="Shape 3"/>
+          <p:cNvSpPr/>
+          <p:nvPr/>
+        </p:nvSpPr>
+        <p:spPr>
+          <a:xfrm>
+            <a:off x="1883664" y="1719072"/>
+            <a:ext cx="8421624" cy="0"/>
+          </a:xfrm>
+          <a:prstGeom prst="line">
+            <a:avLst/>
+          </a:prstGeom>
+          <a:noFill/>
+          <a:ln w="25400">
+            <a:solidFill>
+              <a:srgbClr val="E4E0D6"/>
+            </a:solidFill>
+            <a:prstDash val="solid"/>
+          </a:ln>
+        </p:spPr>
+      </p:sp>
+      <p:sp>
+        <p:nvSpPr>
+          <p:cNvPr id="6" name="Shape 4"/>
+          <p:cNvSpPr/>
+          <p:nvPr/>
+        </p:nvSpPr>
+        <p:spPr>
+          <a:xfrm>
+            <a:off x="1591056" y="1426464"/>
+            <a:ext cx="585216" cy="585216"/>
+          </a:xfrm>
+          <a:prstGeom prst="ellipse">
+            <a:avLst/>
+          </a:prstGeom>
+          <a:solidFill>
+            <a:srgbClr val="1A1E24"/>
+          </a:solidFill>
+          <a:ln w="25400">
+            <a:solidFill>
+              <a:srgbClr val="FFFFFF"/>
+            </a:solidFill>
+            <a:prstDash val="solid"/>
+          </a:ln>
+        </p:spPr>
+      </p:sp>
+      <p:sp>
+        <p:nvSpPr>
+          <p:cNvPr id="7" name="Text 5"/>
+          <p:cNvSpPr/>
+          <p:nvPr/>
+        </p:nvSpPr>
+        <p:spPr>
+          <a:xfrm>
+            <a:off x="1591056" y="1426464"/>
+            <a:ext cx="585216" cy="585216"/>
+          </a:xfrm>
+          <a:prstGeom prst="rect">
+            <a:avLst/>
+          </a:prstGeom>
+          <a:noFill/>
+          <a:ln/>
+        </p:spPr>
+        <p:txBody>
+          <a:bodyPr wrap="square" lIns="0" tIns="0" rIns="0" bIns="0" rtlCol="0" anchor="ctr"/>
+          <a:lstStyle/>
+          <a:p>
+            <a:pPr algn="ctr" indent="0" marL="0">
+              <a:buNone/>
+            </a:pPr>
+            <a:r>
+              <a:rPr lang="en-US" sz="2200" b="1" dirty="0">
+                <a:solidFill>
+                  <a:srgbClr val="E3C892"/>
+                </a:solidFill>
+                <a:latin typeface="Cambria" pitchFamily="34" charset="0"/>
+                <a:ea typeface="Cambria" pitchFamily="34" charset="-122"/>
+                <a:cs typeface="Cambria" pitchFamily="34" charset="-120"/>
+              </a:rPr>
+              <a:t>1</a:t>
+            </a:r>
+            <a:endParaRPr lang="en-US" sz="2200" dirty="0"/>
+          </a:p>
+        </p:txBody>
+      </p:sp>
+      <p:sp>
+        <p:nvSpPr>
+          <p:cNvPr id="8" name="Shape 6"/>
+          <p:cNvSpPr/>
+          <p:nvPr/>
+        </p:nvSpPr>
+        <p:spPr>
+          <a:xfrm>
+            <a:off x="640080" y="2212848"/>
+            <a:ext cx="2487168" cy="2971800"/>
+          </a:xfrm>
+          <a:prstGeom prst="roundRect">
+            <a:avLst>
+              <a:gd name="adj" fmla="val 2941"/>
+            </a:avLst>
+          </a:prstGeom>
+          <a:solidFill>
+            <a:srgbClr val="F3F1EA"/>
+          </a:solidFill>
+          <a:ln w="12700">
+            <a:solidFill>
+              <a:srgbClr val="E4E0D6"/>
+            </a:solidFill>
+            <a:prstDash val="solid"/>
+          </a:ln>
+          <a:effectLst>
+            <a:outerShdw sx="100000" sy="100000" kx="0" ky="0" algn="bl" rotWithShape="0" blurRad="63500" dist="25400" dir="5400000">
+              <a:srgbClr val="000000">
+                <a:alpha val="12000"/>
+              </a:srgbClr>
+            </a:outerShdw>
+          </a:effectLst>
+        </p:spPr>
+      </p:sp>
+      <p:sp>
+        <p:nvSpPr>
+          <p:cNvPr id="9" name="Text 7"/>
+          <p:cNvSpPr/>
+          <p:nvPr/>
+        </p:nvSpPr>
+        <p:spPr>
+          <a:xfrm>
+            <a:off x="868680" y="2377440"/>
+            <a:ext cx="2029968" cy="274320"/>
+          </a:xfrm>
+          <a:prstGeom prst="rect">
+            <a:avLst/>
+          </a:prstGeom>
+          <a:noFill/>
+          <a:ln/>
+        </p:spPr>
+        <p:txBody>
+          <a:bodyPr wrap="square" lIns="0" tIns="0" rIns="0" bIns="0" rtlCol="0" anchor="ctr"/>
+          <a:lstStyle/>
+          <a:p>
+            <a:pPr indent="0" marL="0">
+              <a:buNone/>
+            </a:pPr>
+            <a:r>
+              <a:rPr lang="en-US" sz="1000" b="1" spc="150" kern="0" dirty="0">
+                <a:solidFill>
+                  <a:srgbClr val="C6A15B"/>
+                </a:solidFill>
+                <a:latin typeface="Calibri" pitchFamily="34" charset="0"/>
+                <a:ea typeface="Calibri" pitchFamily="34" charset="-122"/>
+                <a:cs typeface="Calibri" pitchFamily="34" charset="-120"/>
+              </a:rPr>
+              <a:t>WEEK 1</a:t>
+            </a:r>
+            <a:endParaRPr lang="en-US" sz="1000" dirty="0"/>
+          </a:p>
+        </p:txBody>
+      </p:sp>
+      <p:sp>
+        <p:nvSpPr>
+          <p:cNvPr id="10" name="Text 8"/>
+          <p:cNvSpPr/>
+          <p:nvPr/>
+        </p:nvSpPr>
+        <p:spPr>
+          <a:xfrm>
+            <a:off x="868680" y="2633472"/>
+            <a:ext cx="2029968" cy="457200"/>
+          </a:xfrm>
+          <a:prstGeom prst="rect">
+            <a:avLst/>
+          </a:prstGeom>
+          <a:noFill/>
+          <a:ln/>
+        </p:spPr>
+        <p:txBody>
+          <a:bodyPr wrap="square" lIns="0" tIns="0" rIns="0" bIns="0" rtlCol="0" anchor="ctr"/>
+          <a:lstStyle/>
+          <a:p>
+            <a:pPr indent="0" marL="0">
+              <a:buNone/>
+            </a:pPr>
+            <a:r>
+              <a:rPr lang="en-US" sz="1650" b="1" dirty="0">
+                <a:solidFill>
+                  <a:srgbClr val="1A1E24"/>
+                </a:solidFill>
+                <a:latin typeface="Cambria" pitchFamily="34" charset="0"/>
+                <a:ea typeface="Cambria" pitchFamily="34" charset="-122"/>
+                <a:cs typeface="Cambria" pitchFamily="34" charset="-120"/>
+              </a:rPr>
+              <a:t>Plan &amp; Foundation</a:t>
             </a:r>
             <a:endParaRPr lang="en-US" sz="1650" dirty="0"/>
           </a:p>
@@ -8344,13 +9629,13 @@
       </p:sp>
       <p:sp>
         <p:nvSpPr>
-          <p:cNvPr id="29" name="Text 27"/>
-          <p:cNvSpPr/>
-          <p:nvPr/>
-        </p:nvSpPr>
-        <p:spPr>
-          <a:xfrm>
-            <a:off x="9317736" y="3182112"/>
+          <p:cNvPr id="11" name="Text 9"/>
+          <p:cNvSpPr/>
+          <p:nvPr/>
+        </p:nvSpPr>
+        <p:spPr>
+          <a:xfrm>
+            <a:off x="896112" y="3182112"/>
             <a:ext cx="2029968" cy="1920240"/>
           </a:xfrm>
           <a:prstGeom prst="rect">
@@ -8382,7 +9667,7 @@
                 <a:ea typeface="Calibri" pitchFamily="34" charset="-122"/>
                 <a:cs typeface="Calibri" pitchFamily="34" charset="-120"/>
               </a:rPr>
-              <a:t>Adjust to real-estate cost shifts</a:t>
+              <a:t>Requirement gathering &amp; audit</a:t>
             </a:r>
             <a:endParaRPr lang="en-US" sz="1050" dirty="0"/>
           </a:p>
@@ -8406,7 +9691,7 @@
                 <a:ea typeface="Calibri" pitchFamily="34" charset="-122"/>
                 <a:cs typeface="Calibri" pitchFamily="34" charset="-120"/>
               </a:rPr>
-              <a:t>Keep CPL efficient</a:t>
+              <a:t>Competitor &amp; keyword research</a:t>
             </a:r>
             <a:endParaRPr lang="en-US" sz="1050" dirty="0"/>
           </a:p>
@@ -8430,7 +9715,7 @@
                 <a:ea typeface="Calibri" pitchFamily="34" charset="-122"/>
                 <a:cs typeface="Calibri" pitchFamily="34" charset="-120"/>
               </a:rPr>
-              <a:t>Attract customers consistently</a:t>
+              <a:t>Audience &amp; market mapping</a:t>
             </a:r>
             <a:endParaRPr lang="en-US" sz="1050" dirty="0"/>
           </a:p>
@@ -8454,6 +9739,936 @@
                 <a:ea typeface="Calibri" pitchFamily="34" charset="-122"/>
                 <a:cs typeface="Calibri" pitchFamily="34" charset="-120"/>
               </a:rPr>
+              <a:t>Lead-routing design</a:t>
+            </a:r>
+            <a:endParaRPr lang="en-US" sz="1050" dirty="0"/>
+          </a:p>
+          <a:p>
+            <a:pPr marL="152400" indent="-152400">
+              <a:lnSpc>
+                <a:spcPct val="100000"/>
+              </a:lnSpc>
+              <a:spcAft>
+                <a:spcPts val="600"/>
+              </a:spcAft>
+              <a:buSzPct val="100000"/>
+              <a:buChar char="•"/>
+            </a:pPr>
+            <a:r>
+              <a:rPr lang="en-US" sz="1050" dirty="0">
+                <a:solidFill>
+                  <a:srgbClr val="1A1E24"/>
+                </a:solidFill>
+                <a:latin typeface="Calibri" pitchFamily="34" charset="0"/>
+                <a:ea typeface="Calibri" pitchFamily="34" charset="-122"/>
+                <a:cs typeface="Calibri" pitchFamily="34" charset="-120"/>
+              </a:rPr>
+              <a:t>Content strategy · MoU</a:t>
+            </a:r>
+            <a:endParaRPr lang="en-US" sz="1050" dirty="0"/>
+          </a:p>
+        </p:txBody>
+      </p:sp>
+      <p:sp>
+        <p:nvSpPr>
+          <p:cNvPr id="12" name="Shape 10"/>
+          <p:cNvSpPr/>
+          <p:nvPr/>
+        </p:nvSpPr>
+        <p:spPr>
+          <a:xfrm>
+            <a:off x="4398264" y="1426464"/>
+            <a:ext cx="585216" cy="585216"/>
+          </a:xfrm>
+          <a:prstGeom prst="ellipse">
+            <a:avLst/>
+          </a:prstGeom>
+          <a:solidFill>
+            <a:srgbClr val="1A1E24"/>
+          </a:solidFill>
+          <a:ln w="25400">
+            <a:solidFill>
+              <a:srgbClr val="FFFFFF"/>
+            </a:solidFill>
+            <a:prstDash val="solid"/>
+          </a:ln>
+        </p:spPr>
+      </p:sp>
+      <p:sp>
+        <p:nvSpPr>
+          <p:cNvPr id="13" name="Text 11"/>
+          <p:cNvSpPr/>
+          <p:nvPr/>
+        </p:nvSpPr>
+        <p:spPr>
+          <a:xfrm>
+            <a:off x="4398264" y="1426464"/>
+            <a:ext cx="585216" cy="585216"/>
+          </a:xfrm>
+          <a:prstGeom prst="rect">
+            <a:avLst/>
+          </a:prstGeom>
+          <a:noFill/>
+          <a:ln/>
+        </p:spPr>
+        <p:txBody>
+          <a:bodyPr wrap="square" lIns="0" tIns="0" rIns="0" bIns="0" rtlCol="0" anchor="ctr"/>
+          <a:lstStyle/>
+          <a:p>
+            <a:pPr algn="ctr" indent="0" marL="0">
+              <a:buNone/>
+            </a:pPr>
+            <a:r>
+              <a:rPr lang="en-US" sz="2200" b="1" dirty="0">
+                <a:solidFill>
+                  <a:srgbClr val="E3C892"/>
+                </a:solidFill>
+                <a:latin typeface="Cambria" pitchFamily="34" charset="0"/>
+                <a:ea typeface="Cambria" pitchFamily="34" charset="-122"/>
+                <a:cs typeface="Cambria" pitchFamily="34" charset="-120"/>
+              </a:rPr>
+              <a:t>2</a:t>
+            </a:r>
+            <a:endParaRPr lang="en-US" sz="2200" dirty="0"/>
+          </a:p>
+        </p:txBody>
+      </p:sp>
+      <p:sp>
+        <p:nvSpPr>
+          <p:cNvPr id="14" name="Shape 12"/>
+          <p:cNvSpPr/>
+          <p:nvPr/>
+        </p:nvSpPr>
+        <p:spPr>
+          <a:xfrm>
+            <a:off x="3447288" y="2212848"/>
+            <a:ext cx="2487168" cy="2971800"/>
+          </a:xfrm>
+          <a:prstGeom prst="roundRect">
+            <a:avLst>
+              <a:gd name="adj" fmla="val 2941"/>
+            </a:avLst>
+          </a:prstGeom>
+          <a:solidFill>
+            <a:srgbClr val="F3F1EA"/>
+          </a:solidFill>
+          <a:ln w="12700">
+            <a:solidFill>
+              <a:srgbClr val="E4E0D6"/>
+            </a:solidFill>
+            <a:prstDash val="solid"/>
+          </a:ln>
+          <a:effectLst>
+            <a:outerShdw sx="100000" sy="100000" kx="0" ky="0" algn="bl" rotWithShape="0" blurRad="63500" dist="25400" dir="5400000">
+              <a:srgbClr val="000000">
+                <a:alpha val="12000"/>
+              </a:srgbClr>
+            </a:outerShdw>
+          </a:effectLst>
+        </p:spPr>
+      </p:sp>
+      <p:sp>
+        <p:nvSpPr>
+          <p:cNvPr id="15" name="Text 13"/>
+          <p:cNvSpPr/>
+          <p:nvPr/>
+        </p:nvSpPr>
+        <p:spPr>
+          <a:xfrm>
+            <a:off x="3675888" y="2377440"/>
+            <a:ext cx="2029968" cy="274320"/>
+          </a:xfrm>
+          <a:prstGeom prst="rect">
+            <a:avLst/>
+          </a:prstGeom>
+          <a:noFill/>
+          <a:ln/>
+        </p:spPr>
+        <p:txBody>
+          <a:bodyPr wrap="square" lIns="0" tIns="0" rIns="0" bIns="0" rtlCol="0" anchor="ctr"/>
+          <a:lstStyle/>
+          <a:p>
+            <a:pPr indent="0" marL="0">
+              <a:buNone/>
+            </a:pPr>
+            <a:r>
+              <a:rPr lang="en-US" sz="1000" b="1" spc="150" kern="0" dirty="0">
+                <a:solidFill>
+                  <a:srgbClr val="C6A15B"/>
+                </a:solidFill>
+                <a:latin typeface="Calibri" pitchFamily="34" charset="0"/>
+                <a:ea typeface="Calibri" pitchFamily="34" charset="-122"/>
+                <a:cs typeface="Calibri" pitchFamily="34" charset="-120"/>
+              </a:rPr>
+              <a:t>WEEK 2</a:t>
+            </a:r>
+            <a:endParaRPr lang="en-US" sz="1000" dirty="0"/>
+          </a:p>
+        </p:txBody>
+      </p:sp>
+      <p:sp>
+        <p:nvSpPr>
+          <p:cNvPr id="16" name="Text 14"/>
+          <p:cNvSpPr/>
+          <p:nvPr/>
+        </p:nvSpPr>
+        <p:spPr>
+          <a:xfrm>
+            <a:off x="3675888" y="2633472"/>
+            <a:ext cx="2029968" cy="457200"/>
+          </a:xfrm>
+          <a:prstGeom prst="rect">
+            <a:avLst/>
+          </a:prstGeom>
+          <a:noFill/>
+          <a:ln/>
+        </p:spPr>
+        <p:txBody>
+          <a:bodyPr wrap="square" lIns="0" tIns="0" rIns="0" bIns="0" rtlCol="0" anchor="ctr"/>
+          <a:lstStyle/>
+          <a:p>
+            <a:pPr indent="0" marL="0">
+              <a:buNone/>
+            </a:pPr>
+            <a:r>
+              <a:rPr lang="en-US" sz="1650" b="1" dirty="0">
+                <a:solidFill>
+                  <a:srgbClr val="1A1E24"/>
+                </a:solidFill>
+                <a:latin typeface="Cambria" pitchFamily="34" charset="0"/>
+                <a:ea typeface="Cambria" pitchFamily="34" charset="-122"/>
+                <a:cs typeface="Cambria" pitchFamily="34" charset="-120"/>
+              </a:rPr>
+              <a:t>Launch &amp; Scale</a:t>
+            </a:r>
+            <a:endParaRPr lang="en-US" sz="1650" dirty="0"/>
+          </a:p>
+        </p:txBody>
+      </p:sp>
+      <p:sp>
+        <p:nvSpPr>
+          <p:cNvPr id="17" name="Text 15"/>
+          <p:cNvSpPr/>
+          <p:nvPr/>
+        </p:nvSpPr>
+        <p:spPr>
+          <a:xfrm>
+            <a:off x="3703320" y="3182112"/>
+            <a:ext cx="2029968" cy="1920240"/>
+          </a:xfrm>
+          <a:prstGeom prst="rect">
+            <a:avLst/>
+          </a:prstGeom>
+          <a:noFill/>
+          <a:ln/>
+        </p:spPr>
+        <p:txBody>
+          <a:bodyPr wrap="square" lIns="0" tIns="0" rIns="0" bIns="0" rtlCol="0" anchor="t"/>
+          <a:lstStyle/>
+          <a:p>
+            <a:pPr marL="152400" indent="-152400">
+              <a:lnSpc>
+                <a:spcPct val="100000"/>
+              </a:lnSpc>
+              <a:spcAft>
+                <a:spcPts val="600"/>
+              </a:spcAft>
+              <a:buSzPct val="100000"/>
+              <a:buChar char="•"/>
+            </a:pPr>
+            <a:r>
+              <a:rPr lang="en-US" sz="1050" dirty="0">
+                <a:solidFill>
+                  <a:srgbClr val="1A1E24"/>
+                </a:solidFill>
+                <a:latin typeface="Calibri" pitchFamily="34" charset="0"/>
+                <a:ea typeface="Calibri" pitchFamily="34" charset="-122"/>
+                <a:cs typeface="Calibri" pitchFamily="34" charset="-120"/>
+              </a:rPr>
+              <a:t>Website &amp; landing pages</a:t>
+            </a:r>
+            <a:endParaRPr lang="en-US" sz="1050" dirty="0"/>
+          </a:p>
+          <a:p>
+            <a:pPr marL="152400" indent="-152400">
+              <a:lnSpc>
+                <a:spcPct val="100000"/>
+              </a:lnSpc>
+              <a:spcAft>
+                <a:spcPts val="600"/>
+              </a:spcAft>
+              <a:buSzPct val="100000"/>
+              <a:buChar char="•"/>
+            </a:pPr>
+            <a:r>
+              <a:rPr lang="en-US" sz="1050" dirty="0">
+                <a:solidFill>
+                  <a:srgbClr val="1A1E24"/>
+                </a:solidFill>
+                <a:latin typeface="Calibri" pitchFamily="34" charset="0"/>
+                <a:ea typeface="Calibri" pitchFamily="34" charset="-122"/>
+                <a:cs typeface="Calibri" pitchFamily="34" charset="-120"/>
+              </a:rPr>
+              <a:t>Analytics &amp; tracking</a:t>
+            </a:r>
+            <a:endParaRPr lang="en-US" sz="1050" dirty="0"/>
+          </a:p>
+          <a:p>
+            <a:pPr marL="152400" indent="-152400">
+              <a:lnSpc>
+                <a:spcPct val="100000"/>
+              </a:lnSpc>
+              <a:spcAft>
+                <a:spcPts val="600"/>
+              </a:spcAft>
+              <a:buSzPct val="100000"/>
+              <a:buChar char="•"/>
+            </a:pPr>
+            <a:r>
+              <a:rPr lang="en-US" sz="1050" dirty="0">
+                <a:solidFill>
+                  <a:srgbClr val="1A1E24"/>
+                </a:solidFill>
+                <a:latin typeface="Calibri" pitchFamily="34" charset="0"/>
+                <a:ea typeface="Calibri" pitchFamily="34" charset="-122"/>
+                <a:cs typeface="Calibri" pitchFamily="34" charset="-120"/>
+              </a:rPr>
+              <a:t>Campaigns live: SEO/SEM/SMM</a:t>
+            </a:r>
+            <a:endParaRPr lang="en-US" sz="1050" dirty="0"/>
+          </a:p>
+          <a:p>
+            <a:pPr marL="152400" indent="-152400">
+              <a:lnSpc>
+                <a:spcPct val="100000"/>
+              </a:lnSpc>
+              <a:spcAft>
+                <a:spcPts val="600"/>
+              </a:spcAft>
+              <a:buSzPct val="100000"/>
+              <a:buChar char="•"/>
+            </a:pPr>
+            <a:r>
+              <a:rPr lang="en-US" sz="1050" dirty="0">
+                <a:solidFill>
+                  <a:srgbClr val="1A1E24"/>
+                </a:solidFill>
+                <a:latin typeface="Calibri" pitchFamily="34" charset="0"/>
+                <a:ea typeface="Calibri" pitchFamily="34" charset="-122"/>
+                <a:cs typeface="Calibri" pitchFamily="34" charset="-120"/>
+              </a:rPr>
+              <a:t>Scale winning pages fast</a:t>
+            </a:r>
+            <a:endParaRPr lang="en-US" sz="1050" dirty="0"/>
+          </a:p>
+          <a:p>
+            <a:pPr marL="152400" indent="-152400">
+              <a:lnSpc>
+                <a:spcPct val="100000"/>
+              </a:lnSpc>
+              <a:spcAft>
+                <a:spcPts val="600"/>
+              </a:spcAft>
+              <a:buSzPct val="100000"/>
+              <a:buChar char="•"/>
+            </a:pPr>
+            <a:r>
+              <a:rPr lang="en-US" sz="1050" dirty="0">
+                <a:solidFill>
+                  <a:srgbClr val="1A1E24"/>
+                </a:solidFill>
+                <a:latin typeface="Calibri" pitchFamily="34" charset="0"/>
+                <a:ea typeface="Calibri" pitchFamily="34" charset="-122"/>
+                <a:cs typeface="Calibri" pitchFamily="34" charset="-120"/>
+              </a:rPr>
+              <a:t>Expand channels &amp; budgets</a:t>
+            </a:r>
+            <a:endParaRPr lang="en-US" sz="1050" dirty="0"/>
+          </a:p>
+        </p:txBody>
+      </p:sp>
+      <p:sp>
+        <p:nvSpPr>
+          <p:cNvPr id="18" name="Shape 16"/>
+          <p:cNvSpPr/>
+          <p:nvPr/>
+        </p:nvSpPr>
+        <p:spPr>
+          <a:xfrm>
+            <a:off x="7205472" y="1426464"/>
+            <a:ext cx="585216" cy="585216"/>
+          </a:xfrm>
+          <a:prstGeom prst="ellipse">
+            <a:avLst/>
+          </a:prstGeom>
+          <a:solidFill>
+            <a:srgbClr val="1A1E24"/>
+          </a:solidFill>
+          <a:ln w="25400">
+            <a:solidFill>
+              <a:srgbClr val="FFFFFF"/>
+            </a:solidFill>
+            <a:prstDash val="solid"/>
+          </a:ln>
+        </p:spPr>
+      </p:sp>
+      <p:sp>
+        <p:nvSpPr>
+          <p:cNvPr id="19" name="Text 17"/>
+          <p:cNvSpPr/>
+          <p:nvPr/>
+        </p:nvSpPr>
+        <p:spPr>
+          <a:xfrm>
+            <a:off x="7205472" y="1426464"/>
+            <a:ext cx="585216" cy="585216"/>
+          </a:xfrm>
+          <a:prstGeom prst="rect">
+            <a:avLst/>
+          </a:prstGeom>
+          <a:noFill/>
+          <a:ln/>
+        </p:spPr>
+        <p:txBody>
+          <a:bodyPr wrap="square" lIns="0" tIns="0" rIns="0" bIns="0" rtlCol="0" anchor="ctr"/>
+          <a:lstStyle/>
+          <a:p>
+            <a:pPr algn="ctr" indent="0" marL="0">
+              <a:buNone/>
+            </a:pPr>
+            <a:r>
+              <a:rPr lang="en-US" sz="2200" b="1" dirty="0">
+                <a:solidFill>
+                  <a:srgbClr val="E3C892"/>
+                </a:solidFill>
+                <a:latin typeface="Cambria" pitchFamily="34" charset="0"/>
+                <a:ea typeface="Cambria" pitchFamily="34" charset="-122"/>
+                <a:cs typeface="Cambria" pitchFamily="34" charset="-120"/>
+              </a:rPr>
+              <a:t>3</a:t>
+            </a:r>
+            <a:endParaRPr lang="en-US" sz="2200" dirty="0"/>
+          </a:p>
+        </p:txBody>
+      </p:sp>
+      <p:sp>
+        <p:nvSpPr>
+          <p:cNvPr id="20" name="Shape 18"/>
+          <p:cNvSpPr/>
+          <p:nvPr/>
+        </p:nvSpPr>
+        <p:spPr>
+          <a:xfrm>
+            <a:off x="6254496" y="2212848"/>
+            <a:ext cx="2487168" cy="2971800"/>
+          </a:xfrm>
+          <a:prstGeom prst="roundRect">
+            <a:avLst>
+              <a:gd name="adj" fmla="val 2941"/>
+            </a:avLst>
+          </a:prstGeom>
+          <a:solidFill>
+            <a:srgbClr val="F3F1EA"/>
+          </a:solidFill>
+          <a:ln w="12700">
+            <a:solidFill>
+              <a:srgbClr val="E4E0D6"/>
+            </a:solidFill>
+            <a:prstDash val="solid"/>
+          </a:ln>
+          <a:effectLst>
+            <a:outerShdw sx="100000" sy="100000" kx="0" ky="0" algn="bl" rotWithShape="0" blurRad="63500" dist="25400" dir="5400000">
+              <a:srgbClr val="000000">
+                <a:alpha val="12000"/>
+              </a:srgbClr>
+            </a:outerShdw>
+          </a:effectLst>
+        </p:spPr>
+      </p:sp>
+      <p:sp>
+        <p:nvSpPr>
+          <p:cNvPr id="21" name="Text 19"/>
+          <p:cNvSpPr/>
+          <p:nvPr/>
+        </p:nvSpPr>
+        <p:spPr>
+          <a:xfrm>
+            <a:off x="6483096" y="2377440"/>
+            <a:ext cx="2029968" cy="274320"/>
+          </a:xfrm>
+          <a:prstGeom prst="rect">
+            <a:avLst/>
+          </a:prstGeom>
+          <a:noFill/>
+          <a:ln/>
+        </p:spPr>
+        <p:txBody>
+          <a:bodyPr wrap="square" lIns="0" tIns="0" rIns="0" bIns="0" rtlCol="0" anchor="ctr"/>
+          <a:lstStyle/>
+          <a:p>
+            <a:pPr indent="0" marL="0">
+              <a:buNone/>
+            </a:pPr>
+            <a:r>
+              <a:rPr lang="en-US" sz="1000" b="1" spc="150" kern="0" dirty="0">
+                <a:solidFill>
+                  <a:srgbClr val="C6A15B"/>
+                </a:solidFill>
+                <a:latin typeface="Calibri" pitchFamily="34" charset="0"/>
+                <a:ea typeface="Calibri" pitchFamily="34" charset="-122"/>
+                <a:cs typeface="Calibri" pitchFamily="34" charset="-120"/>
+              </a:rPr>
+              <a:t>WEEK 3+</a:t>
+            </a:r>
+            <a:endParaRPr lang="en-US" sz="1000" dirty="0"/>
+          </a:p>
+        </p:txBody>
+      </p:sp>
+      <p:sp>
+        <p:nvSpPr>
+          <p:cNvPr id="22" name="Text 20"/>
+          <p:cNvSpPr/>
+          <p:nvPr/>
+        </p:nvSpPr>
+        <p:spPr>
+          <a:xfrm>
+            <a:off x="6483096" y="2633472"/>
+            <a:ext cx="2029968" cy="457200"/>
+          </a:xfrm>
+          <a:prstGeom prst="rect">
+            <a:avLst/>
+          </a:prstGeom>
+          <a:noFill/>
+          <a:ln/>
+        </p:spPr>
+        <p:txBody>
+          <a:bodyPr wrap="square" lIns="0" tIns="0" rIns="0" bIns="0" rtlCol="0" anchor="ctr"/>
+          <a:lstStyle/>
+          <a:p>
+            <a:pPr indent="0" marL="0">
+              <a:buNone/>
+            </a:pPr>
+            <a:r>
+              <a:rPr lang="en-US" sz="1650" b="1" dirty="0">
+                <a:solidFill>
+                  <a:srgbClr val="1A1E24"/>
+                </a:solidFill>
+                <a:latin typeface="Cambria" pitchFamily="34" charset="0"/>
+                <a:ea typeface="Cambria" pitchFamily="34" charset="-122"/>
+                <a:cs typeface="Cambria" pitchFamily="34" charset="-120"/>
+              </a:rPr>
+              <a:t>Generate &amp; Optimize</a:t>
+            </a:r>
+            <a:endParaRPr lang="en-US" sz="1650" dirty="0"/>
+          </a:p>
+        </p:txBody>
+      </p:sp>
+      <p:sp>
+        <p:nvSpPr>
+          <p:cNvPr id="23" name="Text 21"/>
+          <p:cNvSpPr/>
+          <p:nvPr/>
+        </p:nvSpPr>
+        <p:spPr>
+          <a:xfrm>
+            <a:off x="6510528" y="3182112"/>
+            <a:ext cx="2029968" cy="1920240"/>
+          </a:xfrm>
+          <a:prstGeom prst="rect">
+            <a:avLst/>
+          </a:prstGeom>
+          <a:noFill/>
+          <a:ln/>
+        </p:spPr>
+        <p:txBody>
+          <a:bodyPr wrap="square" lIns="0" tIns="0" rIns="0" bIns="0" rtlCol="0" anchor="t"/>
+          <a:lstStyle/>
+          <a:p>
+            <a:pPr marL="152400" indent="-152400">
+              <a:lnSpc>
+                <a:spcPct val="100000"/>
+              </a:lnSpc>
+              <a:spcAft>
+                <a:spcPts val="600"/>
+              </a:spcAft>
+              <a:buSzPct val="100000"/>
+              <a:buChar char="•"/>
+            </a:pPr>
+            <a:r>
+              <a:rPr lang="en-US" sz="1050" dirty="0">
+                <a:solidFill>
+                  <a:srgbClr val="1A1E24"/>
+                </a:solidFill>
+                <a:latin typeface="Calibri" pitchFamily="34" charset="0"/>
+                <a:ea typeface="Calibri" pitchFamily="34" charset="-122"/>
+                <a:cs typeface="Calibri" pitchFamily="34" charset="-120"/>
+              </a:rPr>
+              <a:t>Continuous lead generation</a:t>
+            </a:r>
+            <a:endParaRPr lang="en-US" sz="1050" dirty="0"/>
+          </a:p>
+          <a:p>
+            <a:pPr marL="152400" indent="-152400">
+              <a:lnSpc>
+                <a:spcPct val="100000"/>
+              </a:lnSpc>
+              <a:spcAft>
+                <a:spcPts val="600"/>
+              </a:spcAft>
+              <a:buSzPct val="100000"/>
+              <a:buChar char="•"/>
+            </a:pPr>
+            <a:r>
+              <a:rPr lang="en-US" sz="1050" dirty="0">
+                <a:solidFill>
+                  <a:srgbClr val="1A1E24"/>
+                </a:solidFill>
+                <a:latin typeface="Calibri" pitchFamily="34" charset="0"/>
+                <a:ea typeface="Calibri" pitchFamily="34" charset="-122"/>
+                <a:cs typeface="Calibri" pitchFamily="34" charset="-120"/>
+              </a:rPr>
+              <a:t>Qualify &amp; assign leads</a:t>
+            </a:r>
+            <a:endParaRPr lang="en-US" sz="1050" dirty="0"/>
+          </a:p>
+          <a:p>
+            <a:pPr marL="152400" indent="-152400">
+              <a:lnSpc>
+                <a:spcPct val="100000"/>
+              </a:lnSpc>
+              <a:spcAft>
+                <a:spcPts val="600"/>
+              </a:spcAft>
+              <a:buSzPct val="100000"/>
+              <a:buChar char="•"/>
+            </a:pPr>
+            <a:r>
+              <a:rPr lang="en-US" sz="1050" dirty="0">
+                <a:solidFill>
+                  <a:srgbClr val="1A1E24"/>
+                </a:solidFill>
+                <a:latin typeface="Calibri" pitchFamily="34" charset="0"/>
+                <a:ea typeface="Calibri" pitchFamily="34" charset="-122"/>
+                <a:cs typeface="Calibri" pitchFamily="34" charset="-120"/>
+              </a:rPr>
+              <a:t>Weekly optimization &amp; A/B tests</a:t>
+            </a:r>
+            <a:endParaRPr lang="en-US" sz="1050" dirty="0"/>
+          </a:p>
+          <a:p>
+            <a:pPr marL="152400" indent="-152400">
+              <a:lnSpc>
+                <a:spcPct val="100000"/>
+              </a:lnSpc>
+              <a:spcAft>
+                <a:spcPts val="600"/>
+              </a:spcAft>
+              <a:buSzPct val="100000"/>
+              <a:buChar char="•"/>
+            </a:pPr>
+            <a:r>
+              <a:rPr lang="en-US" sz="1050" dirty="0">
+                <a:solidFill>
+                  <a:srgbClr val="1A1E24"/>
+                </a:solidFill>
+                <a:latin typeface="Calibri" pitchFamily="34" charset="0"/>
+                <a:ea typeface="Calibri" pitchFamily="34" charset="-122"/>
+                <a:cs typeface="Calibri" pitchFamily="34" charset="-120"/>
+              </a:rPr>
+              <a:t>Track CPL, QL &amp; ROI</a:t>
+            </a:r>
+            <a:endParaRPr lang="en-US" sz="1050" dirty="0"/>
+          </a:p>
+        </p:txBody>
+      </p:sp>
+      <p:sp>
+        <p:nvSpPr>
+          <p:cNvPr id="24" name="Shape 22"/>
+          <p:cNvSpPr/>
+          <p:nvPr/>
+        </p:nvSpPr>
+        <p:spPr>
+          <a:xfrm>
+            <a:off x="10012680" y="1426464"/>
+            <a:ext cx="585216" cy="585216"/>
+          </a:xfrm>
+          <a:prstGeom prst="ellipse">
+            <a:avLst/>
+          </a:prstGeom>
+          <a:solidFill>
+            <a:srgbClr val="C6A15B"/>
+          </a:solidFill>
+          <a:ln w="25400">
+            <a:solidFill>
+              <a:srgbClr val="FFFFFF"/>
+            </a:solidFill>
+            <a:prstDash val="solid"/>
+          </a:ln>
+        </p:spPr>
+      </p:sp>
+      <p:sp>
+        <p:nvSpPr>
+          <p:cNvPr id="25" name="Text 23"/>
+          <p:cNvSpPr/>
+          <p:nvPr/>
+        </p:nvSpPr>
+        <p:spPr>
+          <a:xfrm>
+            <a:off x="10012680" y="1426464"/>
+            <a:ext cx="585216" cy="585216"/>
+          </a:xfrm>
+          <a:prstGeom prst="rect">
+            <a:avLst/>
+          </a:prstGeom>
+          <a:noFill/>
+          <a:ln/>
+        </p:spPr>
+        <p:txBody>
+          <a:bodyPr wrap="square" lIns="0" tIns="0" rIns="0" bIns="0" rtlCol="0" anchor="ctr"/>
+          <a:lstStyle/>
+          <a:p>
+            <a:pPr algn="ctr" indent="0" marL="0">
+              <a:buNone/>
+            </a:pPr>
+            <a:r>
+              <a:rPr lang="en-US" sz="2200" b="1" dirty="0">
+                <a:solidFill>
+                  <a:srgbClr val="0E1116"/>
+                </a:solidFill>
+                <a:latin typeface="Cambria" pitchFamily="34" charset="0"/>
+                <a:ea typeface="Cambria" pitchFamily="34" charset="-122"/>
+                <a:cs typeface="Cambria" pitchFamily="34" charset="-120"/>
+              </a:rPr>
+              <a:t>4</a:t>
+            </a:r>
+            <a:endParaRPr lang="en-US" sz="2200" dirty="0"/>
+          </a:p>
+        </p:txBody>
+      </p:sp>
+      <p:sp>
+        <p:nvSpPr>
+          <p:cNvPr id="26" name="Shape 24"/>
+          <p:cNvSpPr/>
+          <p:nvPr/>
+        </p:nvSpPr>
+        <p:spPr>
+          <a:xfrm>
+            <a:off x="9061704" y="2212848"/>
+            <a:ext cx="2487168" cy="2971800"/>
+          </a:xfrm>
+          <a:prstGeom prst="roundRect">
+            <a:avLst>
+              <a:gd name="adj" fmla="val 2941"/>
+            </a:avLst>
+          </a:prstGeom>
+          <a:solidFill>
+            <a:srgbClr val="F3F1EA"/>
+          </a:solidFill>
+          <a:ln w="12700">
+            <a:solidFill>
+              <a:srgbClr val="E4E0D6"/>
+            </a:solidFill>
+            <a:prstDash val="solid"/>
+          </a:ln>
+          <a:effectLst>
+            <a:outerShdw sx="100000" sy="100000" kx="0" ky="0" algn="bl" rotWithShape="0" blurRad="63500" dist="25400" dir="5400000">
+              <a:srgbClr val="000000">
+                <a:alpha val="12000"/>
+              </a:srgbClr>
+            </a:outerShdw>
+          </a:effectLst>
+        </p:spPr>
+      </p:sp>
+      <p:sp>
+        <p:nvSpPr>
+          <p:cNvPr id="27" name="Text 25"/>
+          <p:cNvSpPr/>
+          <p:nvPr/>
+        </p:nvSpPr>
+        <p:spPr>
+          <a:xfrm>
+            <a:off x="9290304" y="2377440"/>
+            <a:ext cx="2029968" cy="274320"/>
+          </a:xfrm>
+          <a:prstGeom prst="rect">
+            <a:avLst/>
+          </a:prstGeom>
+          <a:noFill/>
+          <a:ln/>
+        </p:spPr>
+        <p:txBody>
+          <a:bodyPr wrap="square" lIns="0" tIns="0" rIns="0" bIns="0" rtlCol="0" anchor="ctr"/>
+          <a:lstStyle/>
+          <a:p>
+            <a:pPr indent="0" marL="0">
+              <a:buNone/>
+            </a:pPr>
+            <a:r>
+              <a:rPr lang="en-US" sz="1000" b="1" spc="150" kern="0" dirty="0">
+                <a:solidFill>
+                  <a:srgbClr val="C6A15B"/>
+                </a:solidFill>
+                <a:latin typeface="Calibri" pitchFamily="34" charset="0"/>
+                <a:ea typeface="Calibri" pitchFamily="34" charset="-122"/>
+                <a:cs typeface="Calibri" pitchFamily="34" charset="-120"/>
+              </a:rPr>
+              <a:t>ONGOING</a:t>
+            </a:r>
+            <a:endParaRPr lang="en-US" sz="1000" dirty="0"/>
+          </a:p>
+        </p:txBody>
+      </p:sp>
+      <p:sp>
+        <p:nvSpPr>
+          <p:cNvPr id="28" name="Text 26"/>
+          <p:cNvSpPr/>
+          <p:nvPr/>
+        </p:nvSpPr>
+        <p:spPr>
+          <a:xfrm>
+            <a:off x="9290304" y="2633472"/>
+            <a:ext cx="2029968" cy="457200"/>
+          </a:xfrm>
+          <a:prstGeom prst="rect">
+            <a:avLst/>
+          </a:prstGeom>
+          <a:noFill/>
+          <a:ln/>
+        </p:spPr>
+        <p:txBody>
+          <a:bodyPr wrap="square" lIns="0" tIns="0" rIns="0" bIns="0" rtlCol="0" anchor="ctr"/>
+          <a:lstStyle/>
+          <a:p>
+            <a:pPr indent="0" marL="0">
+              <a:buNone/>
+            </a:pPr>
+            <a:r>
+              <a:rPr lang="en-US" sz="1650" b="1" dirty="0">
+                <a:solidFill>
+                  <a:srgbClr val="1A1E24"/>
+                </a:solidFill>
+                <a:latin typeface="Cambria" pitchFamily="34" charset="0"/>
+                <a:ea typeface="Cambria" pitchFamily="34" charset="-122"/>
+                <a:cs typeface="Cambria" pitchFamily="34" charset="-120"/>
+              </a:rPr>
+              <a:t>Stay Market-Ready</a:t>
+            </a:r>
+            <a:endParaRPr lang="en-US" sz="1650" dirty="0"/>
+          </a:p>
+        </p:txBody>
+      </p:sp>
+      <p:sp>
+        <p:nvSpPr>
+          <p:cNvPr id="29" name="Text 27"/>
+          <p:cNvSpPr/>
+          <p:nvPr/>
+        </p:nvSpPr>
+        <p:spPr>
+          <a:xfrm>
+            <a:off x="9317736" y="3182112"/>
+            <a:ext cx="2029968" cy="1920240"/>
+          </a:xfrm>
+          <a:prstGeom prst="rect">
+            <a:avLst/>
+          </a:prstGeom>
+          <a:noFill/>
+          <a:ln/>
+        </p:spPr>
+        <p:txBody>
+          <a:bodyPr wrap="square" lIns="0" tIns="0" rIns="0" bIns="0" rtlCol="0" anchor="t"/>
+          <a:lstStyle/>
+          <a:p>
+            <a:pPr marL="152400" indent="-152400">
+              <a:lnSpc>
+                <a:spcPct val="100000"/>
+              </a:lnSpc>
+              <a:spcAft>
+                <a:spcPts val="600"/>
+              </a:spcAft>
+              <a:buSzPct val="100000"/>
+              <a:buChar char="•"/>
+            </a:pPr>
+            <a:r>
+              <a:rPr lang="en-US" sz="1050" dirty="0">
+                <a:solidFill>
+                  <a:srgbClr val="1A1E24"/>
+                </a:solidFill>
+                <a:latin typeface="Calibri" pitchFamily="34" charset="0"/>
+                <a:ea typeface="Calibri" pitchFamily="34" charset="-122"/>
+                <a:cs typeface="Calibri" pitchFamily="34" charset="-120"/>
+              </a:rPr>
+              <a:t>Adjust to real-estate cost shifts</a:t>
+            </a:r>
+            <a:endParaRPr lang="en-US" sz="1050" dirty="0"/>
+          </a:p>
+          <a:p>
+            <a:pPr marL="152400" indent="-152400">
+              <a:lnSpc>
+                <a:spcPct val="100000"/>
+              </a:lnSpc>
+              <a:spcAft>
+                <a:spcPts val="600"/>
+              </a:spcAft>
+              <a:buSzPct val="100000"/>
+              <a:buChar char="•"/>
+            </a:pPr>
+            <a:r>
+              <a:rPr lang="en-US" sz="1050" dirty="0">
+                <a:solidFill>
+                  <a:srgbClr val="1A1E24"/>
+                </a:solidFill>
+                <a:latin typeface="Calibri" pitchFamily="34" charset="0"/>
+                <a:ea typeface="Calibri" pitchFamily="34" charset="-122"/>
+                <a:cs typeface="Calibri" pitchFamily="34" charset="-120"/>
+              </a:rPr>
+              <a:t>Keep CPL efficient</a:t>
+            </a:r>
+            <a:endParaRPr lang="en-US" sz="1050" dirty="0"/>
+          </a:p>
+          <a:p>
+            <a:pPr marL="152400" indent="-152400">
+              <a:lnSpc>
+                <a:spcPct val="100000"/>
+              </a:lnSpc>
+              <a:spcAft>
+                <a:spcPts val="600"/>
+              </a:spcAft>
+              <a:buSzPct val="100000"/>
+              <a:buChar char="•"/>
+            </a:pPr>
+            <a:r>
+              <a:rPr lang="en-US" sz="1050" dirty="0">
+                <a:solidFill>
+                  <a:srgbClr val="1A1E24"/>
+                </a:solidFill>
+                <a:latin typeface="Calibri" pitchFamily="34" charset="0"/>
+                <a:ea typeface="Calibri" pitchFamily="34" charset="-122"/>
+                <a:cs typeface="Calibri" pitchFamily="34" charset="-120"/>
+              </a:rPr>
+              <a:t>Attract customers consistently</a:t>
+            </a:r>
+            <a:endParaRPr lang="en-US" sz="1050" dirty="0"/>
+          </a:p>
+          <a:p>
+            <a:pPr marL="152400" indent="-152400">
+              <a:lnSpc>
+                <a:spcPct val="100000"/>
+              </a:lnSpc>
+              <a:spcAft>
+                <a:spcPts val="600"/>
+              </a:spcAft>
+              <a:buSzPct val="100000"/>
+              <a:buChar char="•"/>
+            </a:pPr>
+            <a:r>
+              <a:rPr lang="en-US" sz="1050" dirty="0">
+                <a:solidFill>
+                  <a:srgbClr val="1A1E24"/>
+                </a:solidFill>
+                <a:latin typeface="Calibri" pitchFamily="34" charset="0"/>
+                <a:ea typeface="Calibri" pitchFamily="34" charset="-122"/>
+                <a:cs typeface="Calibri" pitchFamily="34" charset="-120"/>
+              </a:rPr>
               <a:t>Scale what works, cut the rest</a:t>
             </a:r>
             <a:endParaRPr lang="en-US" sz="1050" dirty="0"/>
@@ -8973,7 +11188,7 @@
                 <a:ea typeface="Calibri" pitchFamily="34" charset="-122"/>
                 <a:cs typeface="Calibri" pitchFamily="34" charset="-120"/>
               </a:rPr>
-              <a:t>04</a:t>
+              <a:t>05</a:t>
             </a:r>
             <a:endParaRPr lang="en-US" sz="950" dirty="0"/>
           </a:p>
